--- a/AXI DMA Driver Test Instructions.pptx
+++ b/AXI DMA Driver Test Instructions.pptx
@@ -11,6 +11,7 @@
     <p:sldId id="259" r:id="rId5"/>
     <p:sldId id="260" r:id="rId6"/>
     <p:sldId id="261" r:id="rId7"/>
+    <p:sldId id="262" r:id="rId8"/>
   </p:sldIdLst>
   <p:sldSz cx="12192000" cy="6858000"/>
   <p:notesSz cx="6858000" cy="9144000"/>
@@ -109,6 +110,11 @@
       </a:defRPr>
     </a:lvl9pPr>
   </p:defaultTextStyle>
+  <p:extLst>
+    <p:ext uri="{EFAFB233-063F-42B5-8137-9DF3F51BA10A}">
+      <p15:sldGuideLst xmlns:p15="http://schemas.microsoft.com/office/powerpoint/2012/main"/>
+    </p:ext>
+  </p:extLst>
 </p:presentation>
 </file>
 
@@ -279,6 +285,13 @@
               <a:schemeClr val="lt1"/>
             </a:fontRef>
           </p:style>
+          <p:txBody>
+            <a:bodyPr/>
+            <a:lstStyle/>
+            <a:p>
+              <a:endParaRPr lang="it-IT"/>
+            </a:p>
+          </p:txBody>
         </p:sp>
         <p:sp>
           <p:nvSpPr>
@@ -342,6 +355,13 @@
               <a:schemeClr val="lt1"/>
             </a:fontRef>
           </p:style>
+          <p:txBody>
+            <a:bodyPr/>
+            <a:lstStyle/>
+            <a:p>
+              <a:endParaRPr lang="it-IT"/>
+            </a:p>
+          </p:txBody>
         </p:sp>
         <p:sp>
           <p:nvSpPr>
@@ -383,6 +403,13 @@
               <a:schemeClr val="lt1"/>
             </a:fontRef>
           </p:style>
+          <p:txBody>
+            <a:bodyPr/>
+            <a:lstStyle/>
+            <a:p>
+              <a:endParaRPr lang="it-IT"/>
+            </a:p>
+          </p:txBody>
         </p:sp>
         <p:sp>
           <p:nvSpPr>
@@ -447,6 +474,13 @@
               <a:schemeClr val="lt1"/>
             </a:fontRef>
           </p:style>
+          <p:txBody>
+            <a:bodyPr/>
+            <a:lstStyle/>
+            <a:p>
+              <a:endParaRPr lang="it-IT"/>
+            </a:p>
+          </p:txBody>
         </p:sp>
         <p:sp>
           <p:nvSpPr>
@@ -512,6 +546,13 @@
               <a:schemeClr val="lt1"/>
             </a:fontRef>
           </p:style>
+          <p:txBody>
+            <a:bodyPr/>
+            <a:lstStyle/>
+            <a:p>
+              <a:endParaRPr lang="it-IT"/>
+            </a:p>
+          </p:txBody>
         </p:sp>
         <p:sp>
           <p:nvSpPr>
@@ -575,6 +616,13 @@
               <a:schemeClr val="lt1"/>
             </a:fontRef>
           </p:style>
+          <p:txBody>
+            <a:bodyPr/>
+            <a:lstStyle/>
+            <a:p>
+              <a:endParaRPr lang="it-IT"/>
+            </a:p>
+          </p:txBody>
         </p:sp>
         <p:sp>
           <p:nvSpPr>
@@ -616,6 +664,13 @@
               <a:schemeClr val="lt1"/>
             </a:fontRef>
           </p:style>
+          <p:txBody>
+            <a:bodyPr/>
+            <a:lstStyle/>
+            <a:p>
+              <a:endParaRPr lang="it-IT"/>
+            </a:p>
+          </p:txBody>
         </p:sp>
         <p:sp>
           <p:nvSpPr>
@@ -657,6 +712,13 @@
               <a:schemeClr val="lt1"/>
             </a:fontRef>
           </p:style>
+          <p:txBody>
+            <a:bodyPr/>
+            <a:lstStyle/>
+            <a:p>
+              <a:endParaRPr lang="it-IT"/>
+            </a:p>
+          </p:txBody>
         </p:sp>
       </p:grpSp>
       <p:sp>
@@ -834,7 +896,7 @@
           <a:p>
             <a:fld id="{CFBE34AB-B73E-4B0C-8699-A3D555403971}" type="datetimeFigureOut">
               <a:rPr lang="it-IT" smtClean="0"/>
-              <a:t>06/10/2025</a:t>
+              <a:t>07/11/2025</a:t>
             </a:fld>
             <a:endParaRPr lang="it-IT"/>
           </a:p>
@@ -1085,7 +1147,7 @@
           <a:p>
             <a:fld id="{CFBE34AB-B73E-4B0C-8699-A3D555403971}" type="datetimeFigureOut">
               <a:rPr lang="it-IT" smtClean="0"/>
-              <a:t>06/10/2025</a:t>
+              <a:t>07/11/2025</a:t>
             </a:fld>
             <a:endParaRPr lang="it-IT"/>
           </a:p>
@@ -1399,7 +1461,7 @@
           <a:p>
             <a:fld id="{CFBE34AB-B73E-4B0C-8699-A3D555403971}" type="datetimeFigureOut">
               <a:rPr lang="it-IT" smtClean="0"/>
-              <a:t>06/10/2025</a:t>
+              <a:t>07/11/2025</a:t>
             </a:fld>
             <a:endParaRPr lang="it-IT"/>
           </a:p>
@@ -1740,7 +1802,7 @@
           <a:p>
             <a:fld id="{CFBE34AB-B73E-4B0C-8699-A3D555403971}" type="datetimeFigureOut">
               <a:rPr lang="it-IT" smtClean="0"/>
-              <a:t>06/10/2025</a:t>
+              <a:t>07/11/2025</a:t>
             </a:fld>
             <a:endParaRPr lang="it-IT"/>
           </a:p>
@@ -2054,7 +2116,7 @@
           <a:p>
             <a:fld id="{CFBE34AB-B73E-4B0C-8699-A3D555403971}" type="datetimeFigureOut">
               <a:rPr lang="it-IT" smtClean="0"/>
-              <a:t>06/10/2025</a:t>
+              <a:t>07/11/2025</a:t>
             </a:fld>
             <a:endParaRPr lang="it-IT"/>
           </a:p>
@@ -2447,7 +2509,7 @@
           <a:p>
             <a:fld id="{CFBE34AB-B73E-4B0C-8699-A3D555403971}" type="datetimeFigureOut">
               <a:rPr lang="it-IT" smtClean="0"/>
-              <a:t>06/10/2025</a:t>
+              <a:t>07/11/2025</a:t>
             </a:fld>
             <a:endParaRPr lang="it-IT"/>
           </a:p>
@@ -2617,7 +2679,7 @@
           <a:p>
             <a:fld id="{CFBE34AB-B73E-4B0C-8699-A3D555403971}" type="datetimeFigureOut">
               <a:rPr lang="it-IT" smtClean="0"/>
-              <a:t>06/10/2025</a:t>
+              <a:t>07/11/2025</a:t>
             </a:fld>
             <a:endParaRPr lang="it-IT"/>
           </a:p>
@@ -2797,7 +2859,7 @@
           <a:p>
             <a:fld id="{CFBE34AB-B73E-4B0C-8699-A3D555403971}" type="datetimeFigureOut">
               <a:rPr lang="it-IT" smtClean="0"/>
-              <a:t>06/10/2025</a:t>
+              <a:t>07/11/2025</a:t>
             </a:fld>
             <a:endParaRPr lang="it-IT"/>
           </a:p>
@@ -2973,7 +3035,7 @@
           <a:p>
             <a:fld id="{CFBE34AB-B73E-4B0C-8699-A3D555403971}" type="datetimeFigureOut">
               <a:rPr lang="it-IT" smtClean="0"/>
-              <a:t>06/10/2025</a:t>
+              <a:t>07/11/2025</a:t>
             </a:fld>
             <a:endParaRPr lang="it-IT"/>
           </a:p>
@@ -3220,7 +3282,7 @@
           <a:p>
             <a:fld id="{CFBE34AB-B73E-4B0C-8699-A3D555403971}" type="datetimeFigureOut">
               <a:rPr lang="it-IT" smtClean="0"/>
-              <a:t>06/10/2025</a:t>
+              <a:t>07/11/2025</a:t>
             </a:fld>
             <a:endParaRPr lang="it-IT"/>
           </a:p>
@@ -3452,7 +3514,7 @@
           <a:p>
             <a:fld id="{CFBE34AB-B73E-4B0C-8699-A3D555403971}" type="datetimeFigureOut">
               <a:rPr lang="it-IT" smtClean="0"/>
-              <a:t>06/10/2025</a:t>
+              <a:t>07/11/2025</a:t>
             </a:fld>
             <a:endParaRPr lang="it-IT"/>
           </a:p>
@@ -3826,7 +3888,7 @@
           <a:p>
             <a:fld id="{CFBE34AB-B73E-4B0C-8699-A3D555403971}" type="datetimeFigureOut">
               <a:rPr lang="it-IT" smtClean="0"/>
-              <a:t>06/10/2025</a:t>
+              <a:t>07/11/2025</a:t>
             </a:fld>
             <a:endParaRPr lang="it-IT"/>
           </a:p>
@@ -3949,7 +4011,7 @@
           <a:p>
             <a:fld id="{CFBE34AB-B73E-4B0C-8699-A3D555403971}" type="datetimeFigureOut">
               <a:rPr lang="it-IT" smtClean="0"/>
-              <a:t>06/10/2025</a:t>
+              <a:t>07/11/2025</a:t>
             </a:fld>
             <a:endParaRPr lang="it-IT"/>
           </a:p>
@@ -4044,7 +4106,7 @@
           <a:p>
             <a:fld id="{CFBE34AB-B73E-4B0C-8699-A3D555403971}" type="datetimeFigureOut">
               <a:rPr lang="it-IT" smtClean="0"/>
-              <a:t>06/10/2025</a:t>
+              <a:t>07/11/2025</a:t>
             </a:fld>
             <a:endParaRPr lang="it-IT"/>
           </a:p>
@@ -4299,7 +4361,7 @@
           <a:p>
             <a:fld id="{CFBE34AB-B73E-4B0C-8699-A3D555403971}" type="datetimeFigureOut">
               <a:rPr lang="it-IT" smtClean="0"/>
-              <a:t>06/10/2025</a:t>
+              <a:t>07/11/2025</a:t>
             </a:fld>
             <a:endParaRPr lang="it-IT"/>
           </a:p>
@@ -4562,7 +4624,7 @@
           <a:p>
             <a:fld id="{CFBE34AB-B73E-4B0C-8699-A3D555403971}" type="datetimeFigureOut">
               <a:rPr lang="it-IT" smtClean="0"/>
-              <a:t>06/10/2025</a:t>
+              <a:t>07/11/2025</a:t>
             </a:fld>
             <a:endParaRPr lang="it-IT"/>
           </a:p>
@@ -4795,6 +4857,13 @@
               <a:schemeClr val="lt1"/>
             </a:fontRef>
           </p:style>
+          <p:txBody>
+            <a:bodyPr/>
+            <a:lstStyle/>
+            <a:p>
+              <a:endParaRPr lang="it-IT"/>
+            </a:p>
+          </p:txBody>
         </p:sp>
         <p:sp>
           <p:nvSpPr>
@@ -4858,6 +4927,13 @@
               <a:schemeClr val="lt1"/>
             </a:fontRef>
           </p:style>
+          <p:txBody>
+            <a:bodyPr/>
+            <a:lstStyle/>
+            <a:p>
+              <a:endParaRPr lang="it-IT"/>
+            </a:p>
+          </p:txBody>
         </p:sp>
         <p:sp>
           <p:nvSpPr>
@@ -4899,6 +4975,13 @@
               <a:schemeClr val="lt1"/>
             </a:fontRef>
           </p:style>
+          <p:txBody>
+            <a:bodyPr/>
+            <a:lstStyle/>
+            <a:p>
+              <a:endParaRPr lang="it-IT"/>
+            </a:p>
+          </p:txBody>
         </p:sp>
         <p:sp>
           <p:nvSpPr>
@@ -4963,6 +5046,13 @@
               <a:schemeClr val="lt1"/>
             </a:fontRef>
           </p:style>
+          <p:txBody>
+            <a:bodyPr/>
+            <a:lstStyle/>
+            <a:p>
+              <a:endParaRPr lang="it-IT"/>
+            </a:p>
+          </p:txBody>
         </p:sp>
         <p:sp>
           <p:nvSpPr>
@@ -5028,6 +5118,13 @@
               <a:schemeClr val="lt1"/>
             </a:fontRef>
           </p:style>
+          <p:txBody>
+            <a:bodyPr/>
+            <a:lstStyle/>
+            <a:p>
+              <a:endParaRPr lang="it-IT"/>
+            </a:p>
+          </p:txBody>
         </p:sp>
         <p:sp>
           <p:nvSpPr>
@@ -5091,6 +5188,13 @@
               <a:schemeClr val="lt1"/>
             </a:fontRef>
           </p:style>
+          <p:txBody>
+            <a:bodyPr/>
+            <a:lstStyle/>
+            <a:p>
+              <a:endParaRPr lang="it-IT"/>
+            </a:p>
+          </p:txBody>
         </p:sp>
         <p:sp>
           <p:nvSpPr>
@@ -5132,6 +5236,13 @@
               <a:schemeClr val="lt1"/>
             </a:fontRef>
           </p:style>
+          <p:txBody>
+            <a:bodyPr/>
+            <a:lstStyle/>
+            <a:p>
+              <a:endParaRPr lang="it-IT"/>
+            </a:p>
+          </p:txBody>
         </p:sp>
         <p:sp>
           <p:nvSpPr>
@@ -5173,6 +5284,13 @@
               <a:schemeClr val="lt1"/>
             </a:fontRef>
           </p:style>
+          <p:txBody>
+            <a:bodyPr/>
+            <a:lstStyle/>
+            <a:p>
+              <a:endParaRPr lang="it-IT"/>
+            </a:p>
+          </p:txBody>
         </p:sp>
       </p:grpSp>
       <p:sp>
@@ -5305,7 +5423,7 @@
           <a:p>
             <a:fld id="{CFBE34AB-B73E-4B0C-8699-A3D555403971}" type="datetimeFigureOut">
               <a:rPr lang="it-IT" smtClean="0"/>
-              <a:t>06/10/2025</a:t>
+              <a:t>07/11/2025</a:t>
             </a:fld>
             <a:endParaRPr lang="it-IT"/>
           </a:p>
@@ -7840,6 +7958,187 @@
 </p:sld>
 </file>
 
+<file path=ppt/slides/slide7.xml><?xml version="1.0" encoding="utf-8"?>
+<p:sld xmlns:a="http://schemas.openxmlformats.org/drawingml/2006/main" xmlns:r="http://schemas.openxmlformats.org/officeDocument/2006/relationships" xmlns:p="http://schemas.openxmlformats.org/presentationml/2006/main">
+  <p:cSld>
+    <p:spTree>
+      <p:nvGrpSpPr>
+        <p:cNvPr id="1" name=""/>
+        <p:cNvGrpSpPr/>
+        <p:nvPr/>
+      </p:nvGrpSpPr>
+      <p:grpSpPr>
+        <a:xfrm>
+          <a:off x="0" y="0"/>
+          <a:ext cx="0" cy="0"/>
+          <a:chOff x="0" y="0"/>
+          <a:chExt cx="0" cy="0"/>
+        </a:xfrm>
+      </p:grpSpPr>
+      <p:sp>
+        <p:nvSpPr>
+          <p:cNvPr id="2" name="Titolo 1">
+            <a:extLst>
+              <a:ext uri="{FF2B5EF4-FFF2-40B4-BE49-F238E27FC236}">
+                <a16:creationId xmlns:a16="http://schemas.microsoft.com/office/drawing/2014/main" id="{8F07F4C8-D44F-886C-CB1A-0B274707B47F}"/>
+              </a:ext>
+            </a:extLst>
+          </p:cNvPr>
+          <p:cNvSpPr>
+            <a:spLocks noGrp="1"/>
+          </p:cNvSpPr>
+          <p:nvPr>
+            <p:ph type="title"/>
+          </p:nvPr>
+        </p:nvSpPr>
+        <p:spPr/>
+        <p:txBody>
+          <a:bodyPr/>
+          <a:lstStyle/>
+          <a:p>
+            <a:r>
+              <a:rPr lang="it-IT" dirty="0"/>
+              <a:t>On </a:t>
+            </a:r>
+            <a:r>
+              <a:rPr lang="it-IT" dirty="0" err="1"/>
+              <a:t>generic</a:t>
+            </a:r>
+            <a:r>
+              <a:rPr lang="it-IT" dirty="0"/>
+              <a:t> FPGA drivers</a:t>
+            </a:r>
+          </a:p>
+        </p:txBody>
+      </p:sp>
+      <p:sp>
+        <p:nvSpPr>
+          <p:cNvPr id="3" name="Segnaposto contenuto 2">
+            <a:extLst>
+              <a:ext uri="{FF2B5EF4-FFF2-40B4-BE49-F238E27FC236}">
+                <a16:creationId xmlns:a16="http://schemas.microsoft.com/office/drawing/2014/main" id="{91339D68-E95E-4FAA-D056-3C135A30DF68}"/>
+              </a:ext>
+            </a:extLst>
+          </p:cNvPr>
+          <p:cNvSpPr>
+            <a:spLocks noGrp="1"/>
+          </p:cNvSpPr>
+          <p:nvPr>
+            <p:ph idx="1"/>
+          </p:nvPr>
+        </p:nvSpPr>
+        <p:spPr/>
+        <p:txBody>
+          <a:bodyPr/>
+          <a:lstStyle/>
+          <a:p>
+            <a:r>
+              <a:rPr lang="it-IT" dirty="0" err="1"/>
+              <a:t>It</a:t>
+            </a:r>
+            <a:r>
+              <a:rPr lang="it-IT" dirty="0"/>
+              <a:t> </a:t>
+            </a:r>
+            <a:r>
+              <a:rPr lang="it-IT" dirty="0" err="1"/>
+              <a:t>is</a:t>
+            </a:r>
+            <a:r>
+              <a:rPr lang="it-IT" dirty="0"/>
+              <a:t> </a:t>
+            </a:r>
+            <a:r>
+              <a:rPr lang="it-IT" dirty="0" err="1"/>
+              <a:t>possible</a:t>
+            </a:r>
+            <a:r>
+              <a:rPr lang="it-IT" dirty="0"/>
+              <a:t> to </a:t>
+            </a:r>
+            <a:r>
+              <a:rPr lang="it-IT" dirty="0" err="1"/>
+              <a:t>adjust</a:t>
+            </a:r>
+            <a:r>
+              <a:rPr lang="it-IT" dirty="0"/>
+              <a:t> the driver to work for a </a:t>
+            </a:r>
+            <a:r>
+              <a:rPr lang="it-IT" dirty="0" err="1"/>
+              <a:t>generic</a:t>
+            </a:r>
+            <a:r>
+              <a:rPr lang="it-IT" dirty="0"/>
+              <a:t> FPGA </a:t>
+            </a:r>
+            <a:r>
+              <a:rPr lang="it-IT" dirty="0" err="1"/>
+              <a:t>interface</a:t>
+            </a:r>
+            <a:r>
+              <a:rPr lang="it-IT" dirty="0"/>
+              <a:t> by </a:t>
+            </a:r>
+            <a:r>
+              <a:rPr lang="it-IT" dirty="0" err="1"/>
+              <a:t>tweaking</a:t>
+            </a:r>
+            <a:r>
+              <a:rPr lang="it-IT" dirty="0"/>
+              <a:t> the </a:t>
+            </a:r>
+            <a:r>
+              <a:rPr lang="it-IT" dirty="0" err="1"/>
+              <a:t>functions</a:t>
+            </a:r>
+            <a:r>
+              <a:rPr lang="it-IT" dirty="0"/>
+              <a:t> and the device-</a:t>
+            </a:r>
+            <a:r>
+              <a:rPr lang="it-IT" dirty="0" err="1"/>
+              <a:t>tree</a:t>
+            </a:r>
+            <a:r>
+              <a:rPr lang="it-IT" dirty="0"/>
+              <a:t>,</a:t>
+            </a:r>
+            <a:r>
+              <a:rPr lang="en-US" dirty="0"/>
+              <a:t> but implementing it would imply more limited kernel side control of the hardware, or direct control of the hardware from </a:t>
+            </a:r>
+            <a:r>
+              <a:rPr lang="en-US" dirty="0" err="1"/>
+              <a:t>userspace</a:t>
+            </a:r>
+            <a:r>
+              <a:rPr lang="en-US" dirty="0"/>
+              <a:t> using pointers to PL addresses, increasing the risk of runtime errors and crashes. </a:t>
+            </a:r>
+          </a:p>
+          <a:p>
+            <a:r>
+              <a:rPr lang="en-US" dirty="0"/>
+              <a:t>In most cases, a driver specialized to the PL interface in use is preferable.</a:t>
+            </a:r>
+            <a:endParaRPr lang="it-IT" dirty="0"/>
+          </a:p>
+        </p:txBody>
+      </p:sp>
+    </p:spTree>
+    <p:extLst>
+      <p:ext uri="{BB962C8B-B14F-4D97-AF65-F5344CB8AC3E}">
+        <p14:creationId xmlns:p14="http://schemas.microsoft.com/office/powerpoint/2010/main" val="2935065846"/>
+      </p:ext>
+    </p:extLst>
+  </p:cSld>
+  <p:clrMapOvr>
+    <a:masterClrMapping/>
+  </p:clrMapOvr>
+</p:sld>
+</file>
+
 <file path=ppt/theme/theme1.xml><?xml version="1.0" encoding="utf-8"?>
 <a:theme xmlns:a="http://schemas.openxmlformats.org/drawingml/2006/main" name="Sfaccettatura">
   <a:themeElements>

--- a/AXI DMA Driver Test Instructions.pptx
+++ b/AXI DMA Driver Test Instructions.pptx
@@ -896,7 +896,7 @@
           <a:p>
             <a:fld id="{CFBE34AB-B73E-4B0C-8699-A3D555403971}" type="datetimeFigureOut">
               <a:rPr lang="it-IT" smtClean="0"/>
-              <a:t>07/11/2025</a:t>
+              <a:t>14/11/2025</a:t>
             </a:fld>
             <a:endParaRPr lang="it-IT"/>
           </a:p>
@@ -1147,7 +1147,7 @@
           <a:p>
             <a:fld id="{CFBE34AB-B73E-4B0C-8699-A3D555403971}" type="datetimeFigureOut">
               <a:rPr lang="it-IT" smtClean="0"/>
-              <a:t>07/11/2025</a:t>
+              <a:t>14/11/2025</a:t>
             </a:fld>
             <a:endParaRPr lang="it-IT"/>
           </a:p>
@@ -1461,7 +1461,7 @@
           <a:p>
             <a:fld id="{CFBE34AB-B73E-4B0C-8699-A3D555403971}" type="datetimeFigureOut">
               <a:rPr lang="it-IT" smtClean="0"/>
-              <a:t>07/11/2025</a:t>
+              <a:t>14/11/2025</a:t>
             </a:fld>
             <a:endParaRPr lang="it-IT"/>
           </a:p>
@@ -1802,7 +1802,7 @@
           <a:p>
             <a:fld id="{CFBE34AB-B73E-4B0C-8699-A3D555403971}" type="datetimeFigureOut">
               <a:rPr lang="it-IT" smtClean="0"/>
-              <a:t>07/11/2025</a:t>
+              <a:t>14/11/2025</a:t>
             </a:fld>
             <a:endParaRPr lang="it-IT"/>
           </a:p>
@@ -2116,7 +2116,7 @@
           <a:p>
             <a:fld id="{CFBE34AB-B73E-4B0C-8699-A3D555403971}" type="datetimeFigureOut">
               <a:rPr lang="it-IT" smtClean="0"/>
-              <a:t>07/11/2025</a:t>
+              <a:t>14/11/2025</a:t>
             </a:fld>
             <a:endParaRPr lang="it-IT"/>
           </a:p>
@@ -2509,7 +2509,7 @@
           <a:p>
             <a:fld id="{CFBE34AB-B73E-4B0C-8699-A3D555403971}" type="datetimeFigureOut">
               <a:rPr lang="it-IT" smtClean="0"/>
-              <a:t>07/11/2025</a:t>
+              <a:t>14/11/2025</a:t>
             </a:fld>
             <a:endParaRPr lang="it-IT"/>
           </a:p>
@@ -2679,7 +2679,7 @@
           <a:p>
             <a:fld id="{CFBE34AB-B73E-4B0C-8699-A3D555403971}" type="datetimeFigureOut">
               <a:rPr lang="it-IT" smtClean="0"/>
-              <a:t>07/11/2025</a:t>
+              <a:t>14/11/2025</a:t>
             </a:fld>
             <a:endParaRPr lang="it-IT"/>
           </a:p>
@@ -2859,7 +2859,7 @@
           <a:p>
             <a:fld id="{CFBE34AB-B73E-4B0C-8699-A3D555403971}" type="datetimeFigureOut">
               <a:rPr lang="it-IT" smtClean="0"/>
-              <a:t>07/11/2025</a:t>
+              <a:t>14/11/2025</a:t>
             </a:fld>
             <a:endParaRPr lang="it-IT"/>
           </a:p>
@@ -3035,7 +3035,7 @@
           <a:p>
             <a:fld id="{CFBE34AB-B73E-4B0C-8699-A3D555403971}" type="datetimeFigureOut">
               <a:rPr lang="it-IT" smtClean="0"/>
-              <a:t>07/11/2025</a:t>
+              <a:t>14/11/2025</a:t>
             </a:fld>
             <a:endParaRPr lang="it-IT"/>
           </a:p>
@@ -3282,7 +3282,7 @@
           <a:p>
             <a:fld id="{CFBE34AB-B73E-4B0C-8699-A3D555403971}" type="datetimeFigureOut">
               <a:rPr lang="it-IT" smtClean="0"/>
-              <a:t>07/11/2025</a:t>
+              <a:t>14/11/2025</a:t>
             </a:fld>
             <a:endParaRPr lang="it-IT"/>
           </a:p>
@@ -3514,7 +3514,7 @@
           <a:p>
             <a:fld id="{CFBE34AB-B73E-4B0C-8699-A3D555403971}" type="datetimeFigureOut">
               <a:rPr lang="it-IT" smtClean="0"/>
-              <a:t>07/11/2025</a:t>
+              <a:t>14/11/2025</a:t>
             </a:fld>
             <a:endParaRPr lang="it-IT"/>
           </a:p>
@@ -3888,7 +3888,7 @@
           <a:p>
             <a:fld id="{CFBE34AB-B73E-4B0C-8699-A3D555403971}" type="datetimeFigureOut">
               <a:rPr lang="it-IT" smtClean="0"/>
-              <a:t>07/11/2025</a:t>
+              <a:t>14/11/2025</a:t>
             </a:fld>
             <a:endParaRPr lang="it-IT"/>
           </a:p>
@@ -4011,7 +4011,7 @@
           <a:p>
             <a:fld id="{CFBE34AB-B73E-4B0C-8699-A3D555403971}" type="datetimeFigureOut">
               <a:rPr lang="it-IT" smtClean="0"/>
-              <a:t>07/11/2025</a:t>
+              <a:t>14/11/2025</a:t>
             </a:fld>
             <a:endParaRPr lang="it-IT"/>
           </a:p>
@@ -4106,7 +4106,7 @@
           <a:p>
             <a:fld id="{CFBE34AB-B73E-4B0C-8699-A3D555403971}" type="datetimeFigureOut">
               <a:rPr lang="it-IT" smtClean="0"/>
-              <a:t>07/11/2025</a:t>
+              <a:t>14/11/2025</a:t>
             </a:fld>
             <a:endParaRPr lang="it-IT"/>
           </a:p>
@@ -4361,7 +4361,7 @@
           <a:p>
             <a:fld id="{CFBE34AB-B73E-4B0C-8699-A3D555403971}" type="datetimeFigureOut">
               <a:rPr lang="it-IT" smtClean="0"/>
-              <a:t>07/11/2025</a:t>
+              <a:t>14/11/2025</a:t>
             </a:fld>
             <a:endParaRPr lang="it-IT"/>
           </a:p>
@@ -4624,7 +4624,7 @@
           <a:p>
             <a:fld id="{CFBE34AB-B73E-4B0C-8699-A3D555403971}" type="datetimeFigureOut">
               <a:rPr lang="it-IT" smtClean="0"/>
-              <a:t>07/11/2025</a:t>
+              <a:t>14/11/2025</a:t>
             </a:fld>
             <a:endParaRPr lang="it-IT"/>
           </a:p>
@@ -5423,7 +5423,7 @@
           <a:p>
             <a:fld id="{CFBE34AB-B73E-4B0C-8699-A3D555403971}" type="datetimeFigureOut">
               <a:rPr lang="it-IT" smtClean="0"/>
-              <a:t>07/11/2025</a:t>
+              <a:t>14/11/2025</a:t>
             </a:fld>
             <a:endParaRPr lang="it-IT"/>
           </a:p>
@@ -6592,7 +6592,7 @@
           <a:p>
             <a:r>
               <a:rPr lang="it-IT" dirty="0"/>
-              <a:t>Step 2: Standalone </a:t>
+              <a:t>Step 2: </a:t>
             </a:r>
             <a:r>
               <a:rPr lang="it-IT" dirty="0" err="1"/>
@@ -6600,7 +6600,7 @@
             </a:r>
             <a:r>
               <a:rPr lang="it-IT" dirty="0"/>
-              <a:t> test</a:t>
+              <a:t> connection test</a:t>
             </a:r>
           </a:p>
         </p:txBody>
@@ -7238,8 +7238,14 @@
               <a:t> clone </a:t>
             </a:r>
             <a:r>
-              <a:rPr lang="it-IT" dirty="0"/>
-              <a:t>the repo </a:t>
+              <a:rPr lang="it-IT" i="1" dirty="0">
+                <a:hlinkClick r:id="rId2"/>
+              </a:rPr>
+              <a:t>https://github.com/mdc-suite/AXI-based-drivers</a:t>
+            </a:r>
+            <a:r>
+              <a:rPr lang="it-IT" i="1" dirty="0"/>
+              <a:t> </a:t>
             </a:r>
             <a:r>
               <a:rPr lang="it-IT" dirty="0" err="1"/>

--- a/AXI DMA Driver Test Instructions.pptx
+++ b/AXI DMA Driver Test Instructions.pptx
@@ -4,14 +4,22 @@
   <p:sldMasterIdLst>
     <p:sldMasterId id="2147483707" r:id="rId1"/>
   </p:sldMasterIdLst>
+  <p:notesMasterIdLst>
+    <p:notesMasterId r:id="rId14"/>
+  </p:notesMasterIdLst>
   <p:sldIdLst>
     <p:sldId id="256" r:id="rId2"/>
-    <p:sldId id="257" r:id="rId3"/>
-    <p:sldId id="258" r:id="rId4"/>
-    <p:sldId id="259" r:id="rId5"/>
-    <p:sldId id="260" r:id="rId6"/>
-    <p:sldId id="261" r:id="rId7"/>
-    <p:sldId id="262" r:id="rId8"/>
+    <p:sldId id="263" r:id="rId3"/>
+    <p:sldId id="257" r:id="rId4"/>
+    <p:sldId id="270" r:id="rId5"/>
+    <p:sldId id="258" r:id="rId6"/>
+    <p:sldId id="259" r:id="rId7"/>
+    <p:sldId id="271" r:id="rId8"/>
+    <p:sldId id="260" r:id="rId9"/>
+    <p:sldId id="261" r:id="rId10"/>
+    <p:sldId id="272" r:id="rId11"/>
+    <p:sldId id="274" r:id="rId12"/>
+    <p:sldId id="275" r:id="rId13"/>
   </p:sldIdLst>
   <p:sldSz cx="12192000" cy="6858000"/>
   <p:notesSz cx="6858000" cy="9144000"/>
@@ -116,6 +124,2438 @@
     </p:ext>
   </p:extLst>
 </p:presentation>
+</file>
+
+<file path=ppt/notesMasters/notesMaster1.xml><?xml version="1.0" encoding="utf-8"?>
+<p:notesMaster xmlns:a="http://schemas.openxmlformats.org/drawingml/2006/main" xmlns:r="http://schemas.openxmlformats.org/officeDocument/2006/relationships" xmlns:p="http://schemas.openxmlformats.org/presentationml/2006/main">
+  <p:cSld>
+    <p:bg>
+      <p:bgRef idx="1001">
+        <a:schemeClr val="bg1"/>
+      </p:bgRef>
+    </p:bg>
+    <p:spTree>
+      <p:nvGrpSpPr>
+        <p:cNvPr id="1" name=""/>
+        <p:cNvGrpSpPr/>
+        <p:nvPr/>
+      </p:nvGrpSpPr>
+      <p:grpSpPr>
+        <a:xfrm>
+          <a:off x="0" y="0"/>
+          <a:ext cx="0" cy="0"/>
+          <a:chOff x="0" y="0"/>
+          <a:chExt cx="0" cy="0"/>
+        </a:xfrm>
+      </p:grpSpPr>
+      <p:sp>
+        <p:nvSpPr>
+          <p:cNvPr id="2" name="Segnaposto intestazione 1"/>
+          <p:cNvSpPr>
+            <a:spLocks noGrp="1"/>
+          </p:cNvSpPr>
+          <p:nvPr>
+            <p:ph type="hdr" sz="quarter"/>
+          </p:nvPr>
+        </p:nvSpPr>
+        <p:spPr>
+          <a:xfrm>
+            <a:off x="0" y="0"/>
+            <a:ext cx="2971800" cy="458788"/>
+          </a:xfrm>
+          <a:prstGeom prst="rect">
+            <a:avLst/>
+          </a:prstGeom>
+        </p:spPr>
+        <p:txBody>
+          <a:bodyPr vert="horz" lIns="91440" tIns="45720" rIns="91440" bIns="45720" rtlCol="0"/>
+          <a:lstStyle>
+            <a:lvl1pPr algn="l">
+              <a:defRPr sz="1200"/>
+            </a:lvl1pPr>
+          </a:lstStyle>
+          <a:p>
+            <a:endParaRPr lang="it-IT"/>
+          </a:p>
+        </p:txBody>
+      </p:sp>
+      <p:sp>
+        <p:nvSpPr>
+          <p:cNvPr id="3" name="Segnaposto data 2"/>
+          <p:cNvSpPr>
+            <a:spLocks noGrp="1"/>
+          </p:cNvSpPr>
+          <p:nvPr>
+            <p:ph type="dt" idx="1"/>
+          </p:nvPr>
+        </p:nvSpPr>
+        <p:spPr>
+          <a:xfrm>
+            <a:off x="3884613" y="0"/>
+            <a:ext cx="2971800" cy="458788"/>
+          </a:xfrm>
+          <a:prstGeom prst="rect">
+            <a:avLst/>
+          </a:prstGeom>
+        </p:spPr>
+        <p:txBody>
+          <a:bodyPr vert="horz" lIns="91440" tIns="45720" rIns="91440" bIns="45720" rtlCol="0"/>
+          <a:lstStyle>
+            <a:lvl1pPr algn="r">
+              <a:defRPr sz="1200"/>
+            </a:lvl1pPr>
+          </a:lstStyle>
+          <a:p>
+            <a:fld id="{63C82BFA-5A5D-44C4-90E7-9E9BC34BA458}" type="datetimeFigureOut">
+              <a:rPr lang="it-IT" smtClean="0"/>
+              <a:t>21/11/2025</a:t>
+            </a:fld>
+            <a:endParaRPr lang="it-IT"/>
+          </a:p>
+        </p:txBody>
+      </p:sp>
+      <p:sp>
+        <p:nvSpPr>
+          <p:cNvPr id="4" name="Segnaposto immagine diapositiva 3"/>
+          <p:cNvSpPr>
+            <a:spLocks noGrp="1" noRot="1" noChangeAspect="1"/>
+          </p:cNvSpPr>
+          <p:nvPr>
+            <p:ph type="sldImg" idx="2"/>
+          </p:nvPr>
+        </p:nvSpPr>
+        <p:spPr>
+          <a:xfrm>
+            <a:off x="685800" y="1143000"/>
+            <a:ext cx="5486400" cy="3086100"/>
+          </a:xfrm>
+          <a:prstGeom prst="rect">
+            <a:avLst/>
+          </a:prstGeom>
+          <a:noFill/>
+          <a:ln w="12700">
+            <a:solidFill>
+              <a:prstClr val="black"/>
+            </a:solidFill>
+          </a:ln>
+        </p:spPr>
+        <p:txBody>
+          <a:bodyPr vert="horz" lIns="91440" tIns="45720" rIns="91440" bIns="45720" rtlCol="0" anchor="ctr"/>
+          <a:lstStyle/>
+          <a:p>
+            <a:endParaRPr lang="it-IT"/>
+          </a:p>
+        </p:txBody>
+      </p:sp>
+      <p:sp>
+        <p:nvSpPr>
+          <p:cNvPr id="5" name="Segnaposto note 4"/>
+          <p:cNvSpPr>
+            <a:spLocks noGrp="1"/>
+          </p:cNvSpPr>
+          <p:nvPr>
+            <p:ph type="body" sz="quarter" idx="3"/>
+          </p:nvPr>
+        </p:nvSpPr>
+        <p:spPr>
+          <a:xfrm>
+            <a:off x="685800" y="4400550"/>
+            <a:ext cx="5486400" cy="3600450"/>
+          </a:xfrm>
+          <a:prstGeom prst="rect">
+            <a:avLst/>
+          </a:prstGeom>
+        </p:spPr>
+        <p:txBody>
+          <a:bodyPr vert="horz" lIns="91440" tIns="45720" rIns="91440" bIns="45720" rtlCol="0"/>
+          <a:lstStyle/>
+          <a:p>
+            <a:pPr lvl="0"/>
+            <a:r>
+              <a:rPr lang="it-IT"/>
+              <a:t>Fare clic per modificare gli stili del testo dello schema</a:t>
+            </a:r>
+          </a:p>
+          <a:p>
+            <a:pPr lvl="1"/>
+            <a:r>
+              <a:rPr lang="it-IT"/>
+              <a:t>Secondo livello</a:t>
+            </a:r>
+          </a:p>
+          <a:p>
+            <a:pPr lvl="2"/>
+            <a:r>
+              <a:rPr lang="it-IT"/>
+              <a:t>Terzo livello</a:t>
+            </a:r>
+          </a:p>
+          <a:p>
+            <a:pPr lvl="3"/>
+            <a:r>
+              <a:rPr lang="it-IT"/>
+              <a:t>Quarto livello</a:t>
+            </a:r>
+          </a:p>
+          <a:p>
+            <a:pPr lvl="4"/>
+            <a:r>
+              <a:rPr lang="it-IT"/>
+              <a:t>Quinto livello</a:t>
+            </a:r>
+          </a:p>
+        </p:txBody>
+      </p:sp>
+      <p:sp>
+        <p:nvSpPr>
+          <p:cNvPr id="6" name="Segnaposto piè di pagina 5"/>
+          <p:cNvSpPr>
+            <a:spLocks noGrp="1"/>
+          </p:cNvSpPr>
+          <p:nvPr>
+            <p:ph type="ftr" sz="quarter" idx="4"/>
+          </p:nvPr>
+        </p:nvSpPr>
+        <p:spPr>
+          <a:xfrm>
+            <a:off x="0" y="8685213"/>
+            <a:ext cx="2971800" cy="458787"/>
+          </a:xfrm>
+          <a:prstGeom prst="rect">
+            <a:avLst/>
+          </a:prstGeom>
+        </p:spPr>
+        <p:txBody>
+          <a:bodyPr vert="horz" lIns="91440" tIns="45720" rIns="91440" bIns="45720" rtlCol="0" anchor="b"/>
+          <a:lstStyle>
+            <a:lvl1pPr algn="l">
+              <a:defRPr sz="1200"/>
+            </a:lvl1pPr>
+          </a:lstStyle>
+          <a:p>
+            <a:endParaRPr lang="it-IT"/>
+          </a:p>
+        </p:txBody>
+      </p:sp>
+      <p:sp>
+        <p:nvSpPr>
+          <p:cNvPr id="7" name="Segnaposto numero diapositiva 6"/>
+          <p:cNvSpPr>
+            <a:spLocks noGrp="1"/>
+          </p:cNvSpPr>
+          <p:nvPr>
+            <p:ph type="sldNum" sz="quarter" idx="5"/>
+          </p:nvPr>
+        </p:nvSpPr>
+        <p:spPr>
+          <a:xfrm>
+            <a:off x="3884613" y="8685213"/>
+            <a:ext cx="2971800" cy="458787"/>
+          </a:xfrm>
+          <a:prstGeom prst="rect">
+            <a:avLst/>
+          </a:prstGeom>
+        </p:spPr>
+        <p:txBody>
+          <a:bodyPr vert="horz" lIns="91440" tIns="45720" rIns="91440" bIns="45720" rtlCol="0" anchor="b"/>
+          <a:lstStyle>
+            <a:lvl1pPr algn="r">
+              <a:defRPr sz="1200"/>
+            </a:lvl1pPr>
+          </a:lstStyle>
+          <a:p>
+            <a:fld id="{A7C3BD9F-1625-4330-A034-FF41683B093C}" type="slidenum">
+              <a:rPr lang="it-IT" smtClean="0"/>
+              <a:t>‹N›</a:t>
+            </a:fld>
+            <a:endParaRPr lang="it-IT"/>
+          </a:p>
+        </p:txBody>
+      </p:sp>
+    </p:spTree>
+    <p:extLst>
+      <p:ext uri="{BB962C8B-B14F-4D97-AF65-F5344CB8AC3E}">
+        <p14:creationId xmlns:p14="http://schemas.microsoft.com/office/powerpoint/2010/main" val="2005948304"/>
+      </p:ext>
+    </p:extLst>
+  </p:cSld>
+  <p:clrMap bg1="lt1" tx1="dk1" bg2="lt2" tx2="dk2" accent1="accent1" accent2="accent2" accent3="accent3" accent4="accent4" accent5="accent5" accent6="accent6" hlink="hlink" folHlink="folHlink"/>
+  <p:notesStyle>
+    <a:lvl1pPr marL="0" algn="l" defTabSz="914400" rtl="0" eaLnBrk="1" latinLnBrk="0" hangingPunct="1">
+      <a:defRPr sz="1200" kern="1200">
+        <a:solidFill>
+          <a:schemeClr val="tx1"/>
+        </a:solidFill>
+        <a:latin typeface="+mn-lt"/>
+        <a:ea typeface="+mn-ea"/>
+        <a:cs typeface="+mn-cs"/>
+      </a:defRPr>
+    </a:lvl1pPr>
+    <a:lvl2pPr marL="457200" algn="l" defTabSz="914400" rtl="0" eaLnBrk="1" latinLnBrk="0" hangingPunct="1">
+      <a:defRPr sz="1200" kern="1200">
+        <a:solidFill>
+          <a:schemeClr val="tx1"/>
+        </a:solidFill>
+        <a:latin typeface="+mn-lt"/>
+        <a:ea typeface="+mn-ea"/>
+        <a:cs typeface="+mn-cs"/>
+      </a:defRPr>
+    </a:lvl2pPr>
+    <a:lvl3pPr marL="914400" algn="l" defTabSz="914400" rtl="0" eaLnBrk="1" latinLnBrk="0" hangingPunct="1">
+      <a:defRPr sz="1200" kern="1200">
+        <a:solidFill>
+          <a:schemeClr val="tx1"/>
+        </a:solidFill>
+        <a:latin typeface="+mn-lt"/>
+        <a:ea typeface="+mn-ea"/>
+        <a:cs typeface="+mn-cs"/>
+      </a:defRPr>
+    </a:lvl3pPr>
+    <a:lvl4pPr marL="1371600" algn="l" defTabSz="914400" rtl="0" eaLnBrk="1" latinLnBrk="0" hangingPunct="1">
+      <a:defRPr sz="1200" kern="1200">
+        <a:solidFill>
+          <a:schemeClr val="tx1"/>
+        </a:solidFill>
+        <a:latin typeface="+mn-lt"/>
+        <a:ea typeface="+mn-ea"/>
+        <a:cs typeface="+mn-cs"/>
+      </a:defRPr>
+    </a:lvl4pPr>
+    <a:lvl5pPr marL="1828800" algn="l" defTabSz="914400" rtl="0" eaLnBrk="1" latinLnBrk="0" hangingPunct="1">
+      <a:defRPr sz="1200" kern="1200">
+        <a:solidFill>
+          <a:schemeClr val="tx1"/>
+        </a:solidFill>
+        <a:latin typeface="+mn-lt"/>
+        <a:ea typeface="+mn-ea"/>
+        <a:cs typeface="+mn-cs"/>
+      </a:defRPr>
+    </a:lvl5pPr>
+    <a:lvl6pPr marL="2286000" algn="l" defTabSz="914400" rtl="0" eaLnBrk="1" latinLnBrk="0" hangingPunct="1">
+      <a:defRPr sz="1200" kern="1200">
+        <a:solidFill>
+          <a:schemeClr val="tx1"/>
+        </a:solidFill>
+        <a:latin typeface="+mn-lt"/>
+        <a:ea typeface="+mn-ea"/>
+        <a:cs typeface="+mn-cs"/>
+      </a:defRPr>
+    </a:lvl6pPr>
+    <a:lvl7pPr marL="2743200" algn="l" defTabSz="914400" rtl="0" eaLnBrk="1" latinLnBrk="0" hangingPunct="1">
+      <a:defRPr sz="1200" kern="1200">
+        <a:solidFill>
+          <a:schemeClr val="tx1"/>
+        </a:solidFill>
+        <a:latin typeface="+mn-lt"/>
+        <a:ea typeface="+mn-ea"/>
+        <a:cs typeface="+mn-cs"/>
+      </a:defRPr>
+    </a:lvl7pPr>
+    <a:lvl8pPr marL="3200400" algn="l" defTabSz="914400" rtl="0" eaLnBrk="1" latinLnBrk="0" hangingPunct="1">
+      <a:defRPr sz="1200" kern="1200">
+        <a:solidFill>
+          <a:schemeClr val="tx1"/>
+        </a:solidFill>
+        <a:latin typeface="+mn-lt"/>
+        <a:ea typeface="+mn-ea"/>
+        <a:cs typeface="+mn-cs"/>
+      </a:defRPr>
+    </a:lvl8pPr>
+    <a:lvl9pPr marL="3657600" algn="l" defTabSz="914400" rtl="0" eaLnBrk="1" latinLnBrk="0" hangingPunct="1">
+      <a:defRPr sz="1200" kern="1200">
+        <a:solidFill>
+          <a:schemeClr val="tx1"/>
+        </a:solidFill>
+        <a:latin typeface="+mn-lt"/>
+        <a:ea typeface="+mn-ea"/>
+        <a:cs typeface="+mn-cs"/>
+      </a:defRPr>
+    </a:lvl9pPr>
+  </p:notesStyle>
+</p:notesMaster>
+</file>
+
+<file path=ppt/notesSlides/notesSlide1.xml><?xml version="1.0" encoding="utf-8"?>
+<p:notes xmlns:a="http://schemas.openxmlformats.org/drawingml/2006/main" xmlns:r="http://schemas.openxmlformats.org/officeDocument/2006/relationships" xmlns:p="http://schemas.openxmlformats.org/presentationml/2006/main">
+  <p:cSld>
+    <p:spTree>
+      <p:nvGrpSpPr>
+        <p:cNvPr id="1" name=""/>
+        <p:cNvGrpSpPr/>
+        <p:nvPr/>
+      </p:nvGrpSpPr>
+      <p:grpSpPr>
+        <a:xfrm>
+          <a:off x="0" y="0"/>
+          <a:ext cx="0" cy="0"/>
+          <a:chOff x="0" y="0"/>
+          <a:chExt cx="0" cy="0"/>
+        </a:xfrm>
+      </p:grpSpPr>
+      <p:sp>
+        <p:nvSpPr>
+          <p:cNvPr id="2" name="Segnaposto immagine diapositiva 1"/>
+          <p:cNvSpPr>
+            <a:spLocks noGrp="1" noRot="1" noChangeAspect="1"/>
+          </p:cNvSpPr>
+          <p:nvPr>
+            <p:ph type="sldImg"/>
+          </p:nvPr>
+        </p:nvSpPr>
+        <p:spPr/>
+      </p:sp>
+      <p:sp>
+        <p:nvSpPr>
+          <p:cNvPr id="3" name="Segnaposto note 2"/>
+          <p:cNvSpPr>
+            <a:spLocks noGrp="1"/>
+          </p:cNvSpPr>
+          <p:nvPr>
+            <p:ph type="body" idx="1"/>
+          </p:nvPr>
+        </p:nvSpPr>
+        <p:spPr/>
+        <p:txBody>
+          <a:bodyPr/>
+          <a:lstStyle/>
+          <a:p>
+            <a:r>
+              <a:rPr lang="it-IT" dirty="0"/>
+              <a:t>By Giuseppe Satta</a:t>
+            </a:r>
+          </a:p>
+        </p:txBody>
+      </p:sp>
+      <p:sp>
+        <p:nvSpPr>
+          <p:cNvPr id="4" name="Segnaposto numero diapositiva 3"/>
+          <p:cNvSpPr>
+            <a:spLocks noGrp="1"/>
+          </p:cNvSpPr>
+          <p:nvPr>
+            <p:ph type="sldNum" sz="quarter" idx="5"/>
+          </p:nvPr>
+        </p:nvSpPr>
+        <p:spPr/>
+        <p:txBody>
+          <a:bodyPr/>
+          <a:lstStyle/>
+          <a:p>
+            <a:fld id="{A7C3BD9F-1625-4330-A034-FF41683B093C}" type="slidenum">
+              <a:rPr lang="it-IT" smtClean="0"/>
+              <a:t>1</a:t>
+            </a:fld>
+            <a:endParaRPr lang="it-IT"/>
+          </a:p>
+        </p:txBody>
+      </p:sp>
+    </p:spTree>
+    <p:extLst>
+      <p:ext uri="{BB962C8B-B14F-4D97-AF65-F5344CB8AC3E}">
+        <p14:creationId xmlns:p14="http://schemas.microsoft.com/office/powerpoint/2010/main" val="1173129172"/>
+      </p:ext>
+    </p:extLst>
+  </p:cSld>
+  <p:clrMapOvr>
+    <a:masterClrMapping/>
+  </p:clrMapOvr>
+</p:notes>
+</file>
+
+<file path=ppt/notesSlides/notesSlide10.xml><?xml version="1.0" encoding="utf-8"?>
+<p:notes xmlns:a="http://schemas.openxmlformats.org/drawingml/2006/main" xmlns:r="http://schemas.openxmlformats.org/officeDocument/2006/relationships" xmlns:p="http://schemas.openxmlformats.org/presentationml/2006/main">
+  <p:cSld>
+    <p:spTree>
+      <p:nvGrpSpPr>
+        <p:cNvPr id="1" name=""/>
+        <p:cNvGrpSpPr/>
+        <p:nvPr/>
+      </p:nvGrpSpPr>
+      <p:grpSpPr>
+        <a:xfrm>
+          <a:off x="0" y="0"/>
+          <a:ext cx="0" cy="0"/>
+          <a:chOff x="0" y="0"/>
+          <a:chExt cx="0" cy="0"/>
+        </a:xfrm>
+      </p:grpSpPr>
+      <p:sp>
+        <p:nvSpPr>
+          <p:cNvPr id="2" name="Segnaposto immagine diapositiva 1"/>
+          <p:cNvSpPr>
+            <a:spLocks noGrp="1" noRot="1" noChangeAspect="1"/>
+          </p:cNvSpPr>
+          <p:nvPr>
+            <p:ph type="sldImg"/>
+          </p:nvPr>
+        </p:nvSpPr>
+        <p:spPr/>
+      </p:sp>
+      <p:sp>
+        <p:nvSpPr>
+          <p:cNvPr id="3" name="Segnaposto note 2"/>
+          <p:cNvSpPr>
+            <a:spLocks noGrp="1"/>
+          </p:cNvSpPr>
+          <p:nvPr>
+            <p:ph type="body" idx="1"/>
+          </p:nvPr>
+        </p:nvSpPr>
+        <p:spPr/>
+        <p:txBody>
+          <a:bodyPr/>
+          <a:lstStyle/>
+          <a:p>
+            <a:pPr marL="0" marR="0" lvl="0" indent="0" algn="l" defTabSz="914400" rtl="0" eaLnBrk="1" fontAlgn="auto" latinLnBrk="0" hangingPunct="1">
+              <a:lnSpc>
+                <a:spcPct val="100000"/>
+              </a:lnSpc>
+              <a:spcBef>
+                <a:spcPts val="0"/>
+              </a:spcBef>
+              <a:spcAft>
+                <a:spcPts val="0"/>
+              </a:spcAft>
+              <a:buClrTx/>
+              <a:buSzTx/>
+              <a:buFontTx/>
+              <a:buNone/>
+              <a:tabLst/>
+              <a:defRPr/>
+            </a:pPr>
+            <a:r>
+              <a:rPr lang="it-IT" dirty="0" err="1"/>
+              <a:t>If</a:t>
+            </a:r>
+            <a:r>
+              <a:rPr lang="it-IT" dirty="0"/>
+              <a:t> </a:t>
+            </a:r>
+            <a:r>
+              <a:rPr lang="it-IT" dirty="0" err="1"/>
+              <a:t>different</a:t>
+            </a:r>
+            <a:r>
+              <a:rPr lang="it-IT" dirty="0"/>
+              <a:t> hardware </a:t>
+            </a:r>
+            <a:r>
+              <a:rPr lang="it-IT" dirty="0" err="1"/>
+              <a:t>is</a:t>
+            </a:r>
+            <a:r>
+              <a:rPr lang="it-IT" dirty="0"/>
+              <a:t> </a:t>
+            </a:r>
+            <a:r>
+              <a:rPr lang="it-IT" dirty="0" err="1"/>
+              <a:t>used</a:t>
+            </a:r>
+            <a:r>
+              <a:rPr lang="it-IT" dirty="0"/>
+              <a:t> the device-</a:t>
+            </a:r>
+            <a:r>
+              <a:rPr lang="it-IT" dirty="0" err="1"/>
+              <a:t>tree</a:t>
+            </a:r>
+            <a:r>
+              <a:rPr lang="it-IT" dirty="0"/>
+              <a:t> overlay </a:t>
+            </a:r>
+            <a:r>
+              <a:rPr lang="it-IT" dirty="0" err="1"/>
+              <a:t>has</a:t>
+            </a:r>
+            <a:r>
+              <a:rPr lang="it-IT" dirty="0"/>
+              <a:t> to be </a:t>
+            </a:r>
+            <a:r>
+              <a:rPr lang="it-IT" dirty="0" err="1"/>
+              <a:t>changed</a:t>
+            </a:r>
+            <a:r>
+              <a:rPr lang="it-IT" dirty="0"/>
+              <a:t> </a:t>
+            </a:r>
+            <a:r>
+              <a:rPr lang="it-IT" dirty="0" err="1"/>
+              <a:t>as</a:t>
+            </a:r>
+            <a:r>
+              <a:rPr lang="it-IT" dirty="0"/>
+              <a:t> </a:t>
+            </a:r>
+            <a:r>
+              <a:rPr lang="it-IT" dirty="0" err="1"/>
+              <a:t>well</a:t>
+            </a:r>
+            <a:r>
+              <a:rPr lang="it-IT" dirty="0"/>
+              <a:t> in </a:t>
+            </a:r>
+            <a:r>
+              <a:rPr lang="it-IT" dirty="0" err="1"/>
+              <a:t>order</a:t>
+            </a:r>
+            <a:r>
+              <a:rPr lang="it-IT" dirty="0"/>
+              <a:t> to match </a:t>
+            </a:r>
+            <a:r>
+              <a:rPr lang="it-IT" dirty="0" err="1"/>
+              <a:t>it</a:t>
+            </a:r>
+            <a:r>
+              <a:rPr lang="it-IT" dirty="0"/>
+              <a:t>, </a:t>
+            </a:r>
+            <a:r>
+              <a:rPr lang="it-IT" dirty="0" err="1"/>
+              <a:t>instructions</a:t>
+            </a:r>
+            <a:r>
+              <a:rPr lang="it-IT" dirty="0"/>
+              <a:t> are in the repository README.</a:t>
+            </a:r>
+          </a:p>
+          <a:p>
+            <a:pPr marL="0" marR="0" lvl="0" indent="0" algn="l" defTabSz="914400" rtl="0" eaLnBrk="1" fontAlgn="auto" latinLnBrk="0" hangingPunct="1">
+              <a:lnSpc>
+                <a:spcPct val="100000"/>
+              </a:lnSpc>
+              <a:spcBef>
+                <a:spcPts val="0"/>
+              </a:spcBef>
+              <a:spcAft>
+                <a:spcPts val="0"/>
+              </a:spcAft>
+              <a:buClrTx/>
+              <a:buSzTx/>
+              <a:buFontTx/>
+              <a:buNone/>
+              <a:tabLst/>
+              <a:defRPr/>
+            </a:pPr>
+            <a:r>
+              <a:rPr lang="it-IT" dirty="0" err="1"/>
+              <a:t>Vivado</a:t>
+            </a:r>
+            <a:r>
+              <a:rPr lang="it-IT" dirty="0"/>
+              <a:t> </a:t>
+            </a:r>
+            <a:r>
+              <a:rPr lang="it-IT" dirty="0" err="1"/>
+              <a:t>is</a:t>
+            </a:r>
+            <a:r>
+              <a:rPr lang="it-IT" dirty="0"/>
+              <a:t> the </a:t>
+            </a:r>
+            <a:r>
+              <a:rPr lang="it-IT" dirty="0" err="1"/>
+              <a:t>recommended</a:t>
+            </a:r>
+            <a:r>
+              <a:rPr lang="it-IT" dirty="0"/>
+              <a:t> tool to use for hardware </a:t>
+            </a:r>
+            <a:r>
+              <a:rPr lang="it-IT" dirty="0" err="1"/>
+              <a:t>development</a:t>
+            </a:r>
+            <a:r>
+              <a:rPr lang="it-IT" dirty="0"/>
+              <a:t> for </a:t>
+            </a:r>
+            <a:r>
+              <a:rPr lang="it-IT" dirty="0" err="1"/>
+              <a:t>any</a:t>
+            </a:r>
+            <a:r>
+              <a:rPr lang="it-IT" dirty="0"/>
+              <a:t> </a:t>
+            </a:r>
+            <a:r>
+              <a:rPr lang="it-IT" dirty="0" err="1"/>
+              <a:t>kind</a:t>
+            </a:r>
+            <a:r>
+              <a:rPr lang="it-IT" dirty="0"/>
+              <a:t> of AMD/</a:t>
+            </a:r>
+            <a:r>
+              <a:rPr lang="it-IT" dirty="0" err="1"/>
+              <a:t>Xilinx</a:t>
+            </a:r>
+            <a:r>
+              <a:rPr lang="it-IT" dirty="0"/>
+              <a:t> </a:t>
+            </a:r>
+            <a:r>
+              <a:rPr lang="it-IT" dirty="0" err="1"/>
+              <a:t>platform</a:t>
+            </a:r>
+            <a:r>
+              <a:rPr lang="it-IT" dirty="0"/>
+              <a:t> (like the </a:t>
+            </a:r>
+            <a:r>
+              <a:rPr lang="it-IT" dirty="0" err="1"/>
+              <a:t>Kria</a:t>
+            </a:r>
+            <a:r>
+              <a:rPr lang="it-IT" dirty="0"/>
+              <a:t>).</a:t>
+            </a:r>
+          </a:p>
+          <a:p>
+            <a:endParaRPr lang="it-IT" dirty="0"/>
+          </a:p>
+        </p:txBody>
+      </p:sp>
+      <p:sp>
+        <p:nvSpPr>
+          <p:cNvPr id="4" name="Segnaposto numero diapositiva 3"/>
+          <p:cNvSpPr>
+            <a:spLocks noGrp="1"/>
+          </p:cNvSpPr>
+          <p:nvPr>
+            <p:ph type="sldNum" sz="quarter" idx="5"/>
+          </p:nvPr>
+        </p:nvSpPr>
+        <p:spPr/>
+        <p:txBody>
+          <a:bodyPr/>
+          <a:lstStyle/>
+          <a:p>
+            <a:fld id="{A7C3BD9F-1625-4330-A034-FF41683B093C}" type="slidenum">
+              <a:rPr lang="it-IT" smtClean="0"/>
+              <a:t>10</a:t>
+            </a:fld>
+            <a:endParaRPr lang="it-IT"/>
+          </a:p>
+        </p:txBody>
+      </p:sp>
+    </p:spTree>
+    <p:extLst>
+      <p:ext uri="{BB962C8B-B14F-4D97-AF65-F5344CB8AC3E}">
+        <p14:creationId xmlns:p14="http://schemas.microsoft.com/office/powerpoint/2010/main" val="136984271"/>
+      </p:ext>
+    </p:extLst>
+  </p:cSld>
+  <p:clrMapOvr>
+    <a:masterClrMapping/>
+  </p:clrMapOvr>
+</p:notes>
+</file>
+
+<file path=ppt/notesSlides/notesSlide11.xml><?xml version="1.0" encoding="utf-8"?>
+<p:notes xmlns:a="http://schemas.openxmlformats.org/drawingml/2006/main" xmlns:r="http://schemas.openxmlformats.org/officeDocument/2006/relationships" xmlns:p="http://schemas.openxmlformats.org/presentationml/2006/main">
+  <p:cSld>
+    <p:spTree>
+      <p:nvGrpSpPr>
+        <p:cNvPr id="1" name=""/>
+        <p:cNvGrpSpPr/>
+        <p:nvPr/>
+      </p:nvGrpSpPr>
+      <p:grpSpPr>
+        <a:xfrm>
+          <a:off x="0" y="0"/>
+          <a:ext cx="0" cy="0"/>
+          <a:chOff x="0" y="0"/>
+          <a:chExt cx="0" cy="0"/>
+        </a:xfrm>
+      </p:grpSpPr>
+      <p:sp>
+        <p:nvSpPr>
+          <p:cNvPr id="2" name="Segnaposto immagine diapositiva 1"/>
+          <p:cNvSpPr>
+            <a:spLocks noGrp="1" noRot="1" noChangeAspect="1"/>
+          </p:cNvSpPr>
+          <p:nvPr>
+            <p:ph type="sldImg"/>
+          </p:nvPr>
+        </p:nvSpPr>
+        <p:spPr/>
+      </p:sp>
+      <p:sp>
+        <p:nvSpPr>
+          <p:cNvPr id="3" name="Segnaposto note 2"/>
+          <p:cNvSpPr>
+            <a:spLocks noGrp="1"/>
+          </p:cNvSpPr>
+          <p:nvPr>
+            <p:ph type="body" idx="1"/>
+          </p:nvPr>
+        </p:nvSpPr>
+        <p:spPr/>
+        <p:txBody>
+          <a:bodyPr/>
+          <a:lstStyle/>
+          <a:p>
+            <a:r>
+              <a:rPr lang="it-IT" dirty="0"/>
+              <a:t>The </a:t>
+            </a:r>
+            <a:r>
+              <a:rPr lang="it-IT" dirty="0" err="1"/>
+              <a:t>animations</a:t>
+            </a:r>
+            <a:r>
+              <a:rPr lang="it-IT" dirty="0"/>
+              <a:t> </a:t>
+            </a:r>
+            <a:r>
+              <a:rPr lang="it-IT" dirty="0" err="1"/>
+              <a:t>here</a:t>
+            </a:r>
+            <a:r>
+              <a:rPr lang="it-IT" dirty="0"/>
+              <a:t> illustrate the flow of </a:t>
+            </a:r>
+            <a:r>
+              <a:rPr lang="it-IT" dirty="0" err="1"/>
+              <a:t>operations</a:t>
+            </a:r>
+            <a:r>
+              <a:rPr lang="it-IT" dirty="0"/>
+              <a:t> on the system </a:t>
+            </a:r>
+            <a:r>
+              <a:rPr lang="it-IT" dirty="0" err="1"/>
+              <a:t>diagram</a:t>
+            </a:r>
+            <a:r>
+              <a:rPr lang="it-IT" dirty="0"/>
+              <a:t> </a:t>
+            </a:r>
+            <a:r>
+              <a:rPr lang="it-IT" dirty="0" err="1"/>
+              <a:t>when</a:t>
+            </a:r>
+            <a:r>
+              <a:rPr lang="it-IT" dirty="0"/>
+              <a:t> the driver </a:t>
+            </a:r>
+            <a:r>
+              <a:rPr lang="it-IT" dirty="0" err="1"/>
+              <a:t>is</a:t>
+            </a:r>
+            <a:r>
+              <a:rPr lang="it-IT" dirty="0"/>
+              <a:t> </a:t>
+            </a:r>
+            <a:r>
+              <a:rPr lang="it-IT" dirty="0" err="1"/>
+              <a:t>used</a:t>
+            </a:r>
+            <a:r>
+              <a:rPr lang="it-IT" dirty="0"/>
+              <a:t> (i.e. </a:t>
+            </a:r>
+            <a:r>
+              <a:rPr lang="it-IT" dirty="0" err="1"/>
+              <a:t>when</a:t>
+            </a:r>
+            <a:r>
+              <a:rPr lang="it-IT" dirty="0"/>
+              <a:t> a system call </a:t>
+            </a:r>
+            <a:r>
+              <a:rPr lang="it-IT" dirty="0" err="1"/>
+              <a:t>is</a:t>
+            </a:r>
+            <a:r>
+              <a:rPr lang="it-IT" dirty="0"/>
+              <a:t> </a:t>
+            </a:r>
+            <a:r>
+              <a:rPr lang="it-IT" dirty="0" err="1"/>
+              <a:t>used</a:t>
+            </a:r>
+            <a:r>
+              <a:rPr lang="it-IT" dirty="0"/>
+              <a:t> in a </a:t>
+            </a:r>
+            <a:r>
+              <a:rPr lang="it-IT" dirty="0" err="1"/>
+              <a:t>program</a:t>
+            </a:r>
+            <a:r>
+              <a:rPr lang="it-IT" dirty="0"/>
+              <a:t>).</a:t>
+            </a:r>
+          </a:p>
+        </p:txBody>
+      </p:sp>
+      <p:sp>
+        <p:nvSpPr>
+          <p:cNvPr id="4" name="Segnaposto numero diapositiva 3"/>
+          <p:cNvSpPr>
+            <a:spLocks noGrp="1"/>
+          </p:cNvSpPr>
+          <p:nvPr>
+            <p:ph type="sldNum" sz="quarter" idx="5"/>
+          </p:nvPr>
+        </p:nvSpPr>
+        <p:spPr/>
+        <p:txBody>
+          <a:bodyPr/>
+          <a:lstStyle/>
+          <a:p>
+            <a:fld id="{A7C3BD9F-1625-4330-A034-FF41683B093C}" type="slidenum">
+              <a:rPr lang="it-IT" smtClean="0"/>
+              <a:t>11</a:t>
+            </a:fld>
+            <a:endParaRPr lang="it-IT"/>
+          </a:p>
+        </p:txBody>
+      </p:sp>
+    </p:spTree>
+    <p:extLst>
+      <p:ext uri="{BB962C8B-B14F-4D97-AF65-F5344CB8AC3E}">
+        <p14:creationId xmlns:p14="http://schemas.microsoft.com/office/powerpoint/2010/main" val="1521111292"/>
+      </p:ext>
+    </p:extLst>
+  </p:cSld>
+  <p:clrMapOvr>
+    <a:masterClrMapping/>
+  </p:clrMapOvr>
+</p:notes>
+</file>
+
+<file path=ppt/notesSlides/notesSlide12.xml><?xml version="1.0" encoding="utf-8"?>
+<p:notes xmlns:a="http://schemas.openxmlformats.org/drawingml/2006/main" xmlns:r="http://schemas.openxmlformats.org/officeDocument/2006/relationships" xmlns:p="http://schemas.openxmlformats.org/presentationml/2006/main">
+  <p:cSld>
+    <p:spTree>
+      <p:nvGrpSpPr>
+        <p:cNvPr id="1" name=""/>
+        <p:cNvGrpSpPr/>
+        <p:nvPr/>
+      </p:nvGrpSpPr>
+      <p:grpSpPr>
+        <a:xfrm>
+          <a:off x="0" y="0"/>
+          <a:ext cx="0" cy="0"/>
+          <a:chOff x="0" y="0"/>
+          <a:chExt cx="0" cy="0"/>
+        </a:xfrm>
+      </p:grpSpPr>
+      <p:sp>
+        <p:nvSpPr>
+          <p:cNvPr id="2" name="Segnaposto immagine diapositiva 1"/>
+          <p:cNvSpPr>
+            <a:spLocks noGrp="1" noRot="1" noChangeAspect="1"/>
+          </p:cNvSpPr>
+          <p:nvPr>
+            <p:ph type="sldImg"/>
+          </p:nvPr>
+        </p:nvSpPr>
+        <p:spPr/>
+      </p:sp>
+      <p:sp>
+        <p:nvSpPr>
+          <p:cNvPr id="3" name="Segnaposto note 2"/>
+          <p:cNvSpPr>
+            <a:spLocks noGrp="1"/>
+          </p:cNvSpPr>
+          <p:nvPr>
+            <p:ph type="body" idx="1"/>
+          </p:nvPr>
+        </p:nvSpPr>
+        <p:spPr/>
+        <p:txBody>
+          <a:bodyPr/>
+          <a:lstStyle/>
+          <a:p>
+            <a:r>
+              <a:rPr lang="it-IT" dirty="0"/>
+              <a:t>After the </a:t>
+            </a:r>
+            <a:r>
+              <a:rPr lang="it-IT" dirty="0" err="1"/>
+              <a:t>result</a:t>
+            </a:r>
+            <a:r>
+              <a:rPr lang="it-IT" dirty="0"/>
+              <a:t> </a:t>
+            </a:r>
+            <a:r>
+              <a:rPr lang="it-IT" dirty="0" err="1"/>
+              <a:t>is</a:t>
+            </a:r>
+            <a:r>
+              <a:rPr lang="it-IT" dirty="0"/>
+              <a:t> </a:t>
+            </a:r>
+            <a:r>
+              <a:rPr lang="it-IT" dirty="0" err="1"/>
+              <a:t>produced</a:t>
+            </a:r>
+            <a:r>
+              <a:rPr lang="it-IT" dirty="0"/>
+              <a:t>, </a:t>
+            </a:r>
+            <a:r>
+              <a:rPr lang="it-IT" dirty="0" err="1"/>
+              <a:t>it</a:t>
+            </a:r>
+            <a:r>
+              <a:rPr lang="it-IT" dirty="0"/>
+              <a:t> takes the opposite </a:t>
+            </a:r>
+            <a:r>
+              <a:rPr lang="it-IT" dirty="0" err="1"/>
+              <a:t>path</a:t>
+            </a:r>
+            <a:r>
+              <a:rPr lang="it-IT" dirty="0"/>
+              <a:t> from </a:t>
+            </a:r>
+            <a:r>
+              <a:rPr lang="it-IT" dirty="0" err="1"/>
+              <a:t>earlier</a:t>
+            </a:r>
+            <a:r>
+              <a:rPr lang="it-IT" dirty="0"/>
+              <a:t>, </a:t>
+            </a:r>
+            <a:r>
+              <a:rPr lang="it-IT" dirty="0" err="1"/>
+              <a:t>going</a:t>
+            </a:r>
+            <a:r>
+              <a:rPr lang="it-IT" dirty="0"/>
+              <a:t> back up </a:t>
+            </a:r>
+            <a:r>
+              <a:rPr lang="it-IT" dirty="0" err="1"/>
+              <a:t>through</a:t>
+            </a:r>
+            <a:r>
+              <a:rPr lang="it-IT" dirty="0"/>
+              <a:t> the kernel to </a:t>
+            </a:r>
+            <a:r>
+              <a:rPr lang="it-IT" dirty="0" err="1"/>
+              <a:t>finally</a:t>
+            </a:r>
+            <a:r>
+              <a:rPr lang="it-IT" dirty="0"/>
+              <a:t> end up in </a:t>
+            </a:r>
+            <a:r>
+              <a:rPr lang="it-IT" dirty="0" err="1"/>
+              <a:t>userspace</a:t>
+            </a:r>
+            <a:r>
+              <a:rPr lang="it-IT" dirty="0"/>
+              <a:t> (</a:t>
+            </a:r>
+            <a:r>
+              <a:rPr lang="it-IT" dirty="0" err="1"/>
+              <a:t>our</a:t>
+            </a:r>
+            <a:r>
+              <a:rPr lang="it-IT" dirty="0"/>
+              <a:t> </a:t>
+            </a:r>
+            <a:r>
+              <a:rPr lang="it-IT" dirty="0" err="1"/>
+              <a:t>application</a:t>
+            </a:r>
+            <a:r>
+              <a:rPr lang="it-IT" dirty="0"/>
+              <a:t>), </a:t>
+            </a:r>
+            <a:r>
+              <a:rPr lang="it-IT" dirty="0" err="1"/>
+              <a:t>where</a:t>
+            </a:r>
+            <a:r>
+              <a:rPr lang="it-IT" dirty="0"/>
+              <a:t> </a:t>
+            </a:r>
+            <a:r>
+              <a:rPr lang="it-IT" dirty="0" err="1"/>
+              <a:t>it</a:t>
+            </a:r>
+            <a:r>
+              <a:rPr lang="it-IT" dirty="0"/>
+              <a:t> </a:t>
+            </a:r>
+            <a:r>
+              <a:rPr lang="it-IT" dirty="0" err="1"/>
+              <a:t>was</a:t>
+            </a:r>
+            <a:r>
+              <a:rPr lang="it-IT" dirty="0"/>
+              <a:t> </a:t>
+            </a:r>
+            <a:r>
+              <a:rPr lang="it-IT" dirty="0" err="1"/>
+              <a:t>requested</a:t>
+            </a:r>
+            <a:r>
+              <a:rPr lang="it-IT" dirty="0"/>
+              <a:t>.</a:t>
+            </a:r>
+          </a:p>
+        </p:txBody>
+      </p:sp>
+      <p:sp>
+        <p:nvSpPr>
+          <p:cNvPr id="4" name="Segnaposto numero diapositiva 3"/>
+          <p:cNvSpPr>
+            <a:spLocks noGrp="1"/>
+          </p:cNvSpPr>
+          <p:nvPr>
+            <p:ph type="sldNum" sz="quarter" idx="5"/>
+          </p:nvPr>
+        </p:nvSpPr>
+        <p:spPr/>
+        <p:txBody>
+          <a:bodyPr/>
+          <a:lstStyle/>
+          <a:p>
+            <a:fld id="{A7C3BD9F-1625-4330-A034-FF41683B093C}" type="slidenum">
+              <a:rPr lang="it-IT" smtClean="0"/>
+              <a:t>12</a:t>
+            </a:fld>
+            <a:endParaRPr lang="it-IT"/>
+          </a:p>
+        </p:txBody>
+      </p:sp>
+    </p:spTree>
+    <p:extLst>
+      <p:ext uri="{BB962C8B-B14F-4D97-AF65-F5344CB8AC3E}">
+        <p14:creationId xmlns:p14="http://schemas.microsoft.com/office/powerpoint/2010/main" val="1504728723"/>
+      </p:ext>
+    </p:extLst>
+  </p:cSld>
+  <p:clrMapOvr>
+    <a:masterClrMapping/>
+  </p:clrMapOvr>
+</p:notes>
+</file>
+
+<file path=ppt/notesSlides/notesSlide2.xml><?xml version="1.0" encoding="utf-8"?>
+<p:notes xmlns:a="http://schemas.openxmlformats.org/drawingml/2006/main" xmlns:r="http://schemas.openxmlformats.org/officeDocument/2006/relationships" xmlns:p="http://schemas.openxmlformats.org/presentationml/2006/main">
+  <p:cSld>
+    <p:spTree>
+      <p:nvGrpSpPr>
+        <p:cNvPr id="1" name=""/>
+        <p:cNvGrpSpPr/>
+        <p:nvPr/>
+      </p:nvGrpSpPr>
+      <p:grpSpPr>
+        <a:xfrm>
+          <a:off x="0" y="0"/>
+          <a:ext cx="0" cy="0"/>
+          <a:chOff x="0" y="0"/>
+          <a:chExt cx="0" cy="0"/>
+        </a:xfrm>
+      </p:grpSpPr>
+      <p:sp>
+        <p:nvSpPr>
+          <p:cNvPr id="2" name="Segnaposto immagine diapositiva 1"/>
+          <p:cNvSpPr>
+            <a:spLocks noGrp="1" noRot="1" noChangeAspect="1"/>
+          </p:cNvSpPr>
+          <p:nvPr>
+            <p:ph type="sldImg"/>
+          </p:nvPr>
+        </p:nvSpPr>
+        <p:spPr/>
+      </p:sp>
+      <p:sp>
+        <p:nvSpPr>
+          <p:cNvPr id="3" name="Segnaposto note 2"/>
+          <p:cNvSpPr>
+            <a:spLocks noGrp="1"/>
+          </p:cNvSpPr>
+          <p:nvPr>
+            <p:ph type="body" idx="1"/>
+          </p:nvPr>
+        </p:nvSpPr>
+        <p:spPr/>
+        <p:txBody>
+          <a:bodyPr/>
+          <a:lstStyle/>
+          <a:p>
+            <a:r>
+              <a:rPr lang="it-IT" dirty="0"/>
+              <a:t>A brief system </a:t>
+            </a:r>
+            <a:r>
+              <a:rPr lang="it-IT" dirty="0" err="1"/>
+              <a:t>overview</a:t>
+            </a:r>
+            <a:r>
+              <a:rPr lang="it-IT" dirty="0"/>
+              <a:t>. Device drivers </a:t>
+            </a:r>
+            <a:r>
+              <a:rPr lang="it-IT" dirty="0" err="1"/>
+              <a:t>provide</a:t>
+            </a:r>
+            <a:r>
+              <a:rPr lang="it-IT" dirty="0"/>
+              <a:t> a </a:t>
+            </a:r>
+            <a:r>
+              <a:rPr lang="it-IT" dirty="0" err="1"/>
+              <a:t>means</a:t>
+            </a:r>
+            <a:r>
+              <a:rPr lang="it-IT" dirty="0"/>
+              <a:t> of </a:t>
+            </a:r>
+            <a:r>
+              <a:rPr lang="it-IT" dirty="0" err="1"/>
+              <a:t>communication</a:t>
+            </a:r>
+            <a:r>
+              <a:rPr lang="it-IT" dirty="0"/>
+              <a:t> </a:t>
+            </a:r>
+            <a:r>
+              <a:rPr lang="it-IT" dirty="0" err="1"/>
+              <a:t>between</a:t>
+            </a:r>
+            <a:r>
+              <a:rPr lang="it-IT" dirty="0"/>
+              <a:t> the hardware (FPGA in </a:t>
+            </a:r>
+            <a:r>
+              <a:rPr lang="it-IT" dirty="0" err="1"/>
+              <a:t>this</a:t>
+            </a:r>
+            <a:r>
+              <a:rPr lang="it-IT" dirty="0"/>
+              <a:t> case) and the </a:t>
+            </a:r>
+            <a:r>
+              <a:rPr lang="it-IT" dirty="0" err="1"/>
+              <a:t>rest</a:t>
+            </a:r>
+            <a:r>
+              <a:rPr lang="it-IT" dirty="0"/>
+              <a:t> of the system. </a:t>
+            </a:r>
+          </a:p>
+        </p:txBody>
+      </p:sp>
+      <p:sp>
+        <p:nvSpPr>
+          <p:cNvPr id="4" name="Segnaposto numero diapositiva 3"/>
+          <p:cNvSpPr>
+            <a:spLocks noGrp="1"/>
+          </p:cNvSpPr>
+          <p:nvPr>
+            <p:ph type="sldNum" sz="quarter" idx="5"/>
+          </p:nvPr>
+        </p:nvSpPr>
+        <p:spPr/>
+        <p:txBody>
+          <a:bodyPr/>
+          <a:lstStyle/>
+          <a:p>
+            <a:fld id="{A7C3BD9F-1625-4330-A034-FF41683B093C}" type="slidenum">
+              <a:rPr lang="it-IT" smtClean="0"/>
+              <a:t>2</a:t>
+            </a:fld>
+            <a:endParaRPr lang="it-IT"/>
+          </a:p>
+        </p:txBody>
+      </p:sp>
+    </p:spTree>
+    <p:extLst>
+      <p:ext uri="{BB962C8B-B14F-4D97-AF65-F5344CB8AC3E}">
+        <p14:creationId xmlns:p14="http://schemas.microsoft.com/office/powerpoint/2010/main" val="2040303255"/>
+      </p:ext>
+    </p:extLst>
+  </p:cSld>
+  <p:clrMapOvr>
+    <a:masterClrMapping/>
+  </p:clrMapOvr>
+</p:notes>
+</file>
+
+<file path=ppt/notesSlides/notesSlide3.xml><?xml version="1.0" encoding="utf-8"?>
+<p:notes xmlns:a="http://schemas.openxmlformats.org/drawingml/2006/main" xmlns:r="http://schemas.openxmlformats.org/officeDocument/2006/relationships" xmlns:p="http://schemas.openxmlformats.org/presentationml/2006/main">
+  <p:cSld>
+    <p:spTree>
+      <p:nvGrpSpPr>
+        <p:cNvPr id="1" name=""/>
+        <p:cNvGrpSpPr/>
+        <p:nvPr/>
+      </p:nvGrpSpPr>
+      <p:grpSpPr>
+        <a:xfrm>
+          <a:off x="0" y="0"/>
+          <a:ext cx="0" cy="0"/>
+          <a:chOff x="0" y="0"/>
+          <a:chExt cx="0" cy="0"/>
+        </a:xfrm>
+      </p:grpSpPr>
+      <p:sp>
+        <p:nvSpPr>
+          <p:cNvPr id="2" name="Segnaposto immagine diapositiva 1"/>
+          <p:cNvSpPr>
+            <a:spLocks noGrp="1" noRot="1" noChangeAspect="1"/>
+          </p:cNvSpPr>
+          <p:nvPr>
+            <p:ph type="sldImg"/>
+          </p:nvPr>
+        </p:nvSpPr>
+        <p:spPr/>
+      </p:sp>
+      <p:sp>
+        <p:nvSpPr>
+          <p:cNvPr id="3" name="Segnaposto note 2"/>
+          <p:cNvSpPr>
+            <a:spLocks noGrp="1"/>
+          </p:cNvSpPr>
+          <p:nvPr>
+            <p:ph type="body" idx="1"/>
+          </p:nvPr>
+        </p:nvSpPr>
+        <p:spPr/>
+        <p:txBody>
+          <a:bodyPr/>
+          <a:lstStyle/>
+          <a:p>
+            <a:r>
+              <a:rPr lang="it-IT" dirty="0"/>
+              <a:t>The font </a:t>
+            </a:r>
+            <a:r>
+              <a:rPr lang="it-IT" dirty="0" err="1"/>
+              <a:t>change</a:t>
+            </a:r>
+            <a:r>
+              <a:rPr lang="it-IT" dirty="0"/>
+              <a:t> </a:t>
+            </a:r>
+            <a:r>
+              <a:rPr lang="it-IT" dirty="0" err="1"/>
+              <a:t>is</a:t>
+            </a:r>
+            <a:r>
+              <a:rPr lang="it-IT" dirty="0"/>
+              <a:t> </a:t>
+            </a:r>
+            <a:r>
+              <a:rPr lang="it-IT" dirty="0" err="1"/>
+              <a:t>necessary</a:t>
+            </a:r>
+            <a:r>
+              <a:rPr lang="it-IT" dirty="0"/>
+              <a:t> </a:t>
+            </a:r>
+            <a:r>
+              <a:rPr lang="it-IT" dirty="0" err="1"/>
+              <a:t>because</a:t>
+            </a:r>
+            <a:r>
+              <a:rPr lang="it-IT" dirty="0"/>
+              <a:t> the </a:t>
+            </a:r>
+            <a:r>
+              <a:rPr lang="it-IT" dirty="0" err="1"/>
+              <a:t>puTTY</a:t>
+            </a:r>
+            <a:r>
+              <a:rPr lang="it-IT" dirty="0"/>
+              <a:t> </a:t>
+            </a:r>
+            <a:r>
+              <a:rPr lang="it-IT" dirty="0" err="1"/>
+              <a:t>program’s</a:t>
+            </a:r>
+            <a:r>
+              <a:rPr lang="it-IT" dirty="0"/>
+              <a:t> default font for the console window </a:t>
+            </a:r>
+            <a:r>
+              <a:rPr lang="it-IT" dirty="0" err="1"/>
+              <a:t>might</a:t>
+            </a:r>
+            <a:r>
+              <a:rPr lang="it-IT" dirty="0"/>
+              <a:t> </a:t>
+            </a:r>
+            <a:r>
+              <a:rPr lang="it-IT" dirty="0" err="1"/>
+              <a:t>not</a:t>
+            </a:r>
+            <a:r>
+              <a:rPr lang="it-IT" dirty="0"/>
+              <a:t> be </a:t>
+            </a:r>
+            <a:r>
+              <a:rPr lang="it-IT" dirty="0" err="1"/>
+              <a:t>present</a:t>
+            </a:r>
+            <a:r>
+              <a:rPr lang="it-IT" dirty="0"/>
+              <a:t> in </a:t>
+            </a:r>
+            <a:r>
+              <a:rPr lang="it-IT" dirty="0" err="1"/>
+              <a:t>your</a:t>
+            </a:r>
+            <a:r>
+              <a:rPr lang="it-IT" dirty="0"/>
+              <a:t> system, or </a:t>
+            </a:r>
+            <a:r>
+              <a:rPr lang="it-IT" dirty="0" err="1"/>
+              <a:t>is</a:t>
+            </a:r>
+            <a:r>
+              <a:rPr lang="it-IT" dirty="0"/>
+              <a:t> </a:t>
+            </a:r>
+            <a:r>
+              <a:rPr lang="it-IT" dirty="0" err="1"/>
+              <a:t>named</a:t>
+            </a:r>
+            <a:r>
+              <a:rPr lang="it-IT" dirty="0"/>
+              <a:t> </a:t>
+            </a:r>
+            <a:r>
+              <a:rPr lang="it-IT" dirty="0" err="1"/>
+              <a:t>differently</a:t>
+            </a:r>
+            <a:r>
+              <a:rPr lang="it-IT" dirty="0"/>
+              <a:t>. </a:t>
+            </a:r>
+            <a:r>
+              <a:rPr lang="it-IT" dirty="0" err="1"/>
+              <a:t>Continuing</a:t>
+            </a:r>
+            <a:r>
+              <a:rPr lang="it-IT" dirty="0"/>
+              <a:t> </a:t>
+            </a:r>
+            <a:r>
+              <a:rPr lang="it-IT" dirty="0" err="1"/>
+              <a:t>without</a:t>
+            </a:r>
+            <a:r>
+              <a:rPr lang="it-IT" dirty="0"/>
+              <a:t> </a:t>
+            </a:r>
+            <a:r>
+              <a:rPr lang="it-IT" dirty="0" err="1"/>
+              <a:t>changing</a:t>
+            </a:r>
+            <a:r>
+              <a:rPr lang="it-IT" dirty="0"/>
+              <a:t> the font </a:t>
+            </a:r>
+            <a:r>
+              <a:rPr lang="it-IT" dirty="0" err="1"/>
+              <a:t>results</a:t>
+            </a:r>
+            <a:r>
+              <a:rPr lang="it-IT" dirty="0"/>
+              <a:t> in the console window </a:t>
+            </a:r>
+            <a:r>
+              <a:rPr lang="it-IT" dirty="0" err="1"/>
+              <a:t>returning</a:t>
+            </a:r>
+            <a:r>
+              <a:rPr lang="it-IT" dirty="0"/>
+              <a:t> an </a:t>
+            </a:r>
+            <a:r>
+              <a:rPr lang="it-IT" dirty="0" err="1"/>
+              <a:t>error</a:t>
+            </a:r>
+            <a:r>
+              <a:rPr lang="it-IT" dirty="0"/>
+              <a:t> and </a:t>
+            </a:r>
+            <a:r>
+              <a:rPr lang="it-IT" dirty="0" err="1"/>
+              <a:t>not</a:t>
+            </a:r>
+            <a:r>
+              <a:rPr lang="it-IT" dirty="0"/>
+              <a:t> </a:t>
+            </a:r>
+            <a:r>
+              <a:rPr lang="it-IT" dirty="0" err="1"/>
+              <a:t>being</a:t>
+            </a:r>
+            <a:r>
+              <a:rPr lang="it-IT" dirty="0"/>
+              <a:t> </a:t>
+            </a:r>
+            <a:r>
+              <a:rPr lang="it-IT" dirty="0" err="1"/>
+              <a:t>usable</a:t>
+            </a:r>
+            <a:r>
+              <a:rPr lang="it-IT" dirty="0"/>
+              <a:t>.</a:t>
+            </a:r>
+          </a:p>
+        </p:txBody>
+      </p:sp>
+      <p:sp>
+        <p:nvSpPr>
+          <p:cNvPr id="4" name="Segnaposto numero diapositiva 3"/>
+          <p:cNvSpPr>
+            <a:spLocks noGrp="1"/>
+          </p:cNvSpPr>
+          <p:nvPr>
+            <p:ph type="sldNum" sz="quarter" idx="5"/>
+          </p:nvPr>
+        </p:nvSpPr>
+        <p:spPr/>
+        <p:txBody>
+          <a:bodyPr/>
+          <a:lstStyle/>
+          <a:p>
+            <a:fld id="{A7C3BD9F-1625-4330-A034-FF41683B093C}" type="slidenum">
+              <a:rPr lang="it-IT" smtClean="0"/>
+              <a:t>3</a:t>
+            </a:fld>
+            <a:endParaRPr lang="it-IT"/>
+          </a:p>
+        </p:txBody>
+      </p:sp>
+    </p:spTree>
+    <p:extLst>
+      <p:ext uri="{BB962C8B-B14F-4D97-AF65-F5344CB8AC3E}">
+        <p14:creationId xmlns:p14="http://schemas.microsoft.com/office/powerpoint/2010/main" val="3971667893"/>
+      </p:ext>
+    </p:extLst>
+  </p:cSld>
+  <p:clrMapOvr>
+    <a:masterClrMapping/>
+  </p:clrMapOvr>
+</p:notes>
+</file>
+
+<file path=ppt/notesSlides/notesSlide4.xml><?xml version="1.0" encoding="utf-8"?>
+<p:notes xmlns:a="http://schemas.openxmlformats.org/drawingml/2006/main" xmlns:r="http://schemas.openxmlformats.org/officeDocument/2006/relationships" xmlns:p="http://schemas.openxmlformats.org/presentationml/2006/main">
+  <p:cSld>
+    <p:spTree>
+      <p:nvGrpSpPr>
+        <p:cNvPr id="1" name=""/>
+        <p:cNvGrpSpPr/>
+        <p:nvPr/>
+      </p:nvGrpSpPr>
+      <p:grpSpPr>
+        <a:xfrm>
+          <a:off x="0" y="0"/>
+          <a:ext cx="0" cy="0"/>
+          <a:chOff x="0" y="0"/>
+          <a:chExt cx="0" cy="0"/>
+        </a:xfrm>
+      </p:grpSpPr>
+      <p:sp>
+        <p:nvSpPr>
+          <p:cNvPr id="2" name="Segnaposto immagine diapositiva 1"/>
+          <p:cNvSpPr>
+            <a:spLocks noGrp="1" noRot="1" noChangeAspect="1"/>
+          </p:cNvSpPr>
+          <p:nvPr>
+            <p:ph type="sldImg"/>
+          </p:nvPr>
+        </p:nvSpPr>
+        <p:spPr/>
+      </p:sp>
+      <p:sp>
+        <p:nvSpPr>
+          <p:cNvPr id="3" name="Segnaposto note 2"/>
+          <p:cNvSpPr>
+            <a:spLocks noGrp="1"/>
+          </p:cNvSpPr>
+          <p:nvPr>
+            <p:ph type="body" idx="1"/>
+          </p:nvPr>
+        </p:nvSpPr>
+        <p:spPr/>
+        <p:txBody>
+          <a:bodyPr/>
+          <a:lstStyle/>
+          <a:p>
+            <a:r>
+              <a:rPr lang="it-IT" u="sng" dirty="0"/>
+              <a:t> </a:t>
+            </a:r>
+          </a:p>
+        </p:txBody>
+      </p:sp>
+      <p:sp>
+        <p:nvSpPr>
+          <p:cNvPr id="4" name="Segnaposto numero diapositiva 3"/>
+          <p:cNvSpPr>
+            <a:spLocks noGrp="1"/>
+          </p:cNvSpPr>
+          <p:nvPr>
+            <p:ph type="sldNum" sz="quarter" idx="5"/>
+          </p:nvPr>
+        </p:nvSpPr>
+        <p:spPr/>
+        <p:txBody>
+          <a:bodyPr/>
+          <a:lstStyle/>
+          <a:p>
+            <a:fld id="{A7C3BD9F-1625-4330-A034-FF41683B093C}" type="slidenum">
+              <a:rPr lang="it-IT" smtClean="0"/>
+              <a:t>4</a:t>
+            </a:fld>
+            <a:endParaRPr lang="it-IT"/>
+          </a:p>
+        </p:txBody>
+      </p:sp>
+    </p:spTree>
+    <p:extLst>
+      <p:ext uri="{BB962C8B-B14F-4D97-AF65-F5344CB8AC3E}">
+        <p14:creationId xmlns:p14="http://schemas.microsoft.com/office/powerpoint/2010/main" val="3185807964"/>
+      </p:ext>
+    </p:extLst>
+  </p:cSld>
+  <p:clrMapOvr>
+    <a:masterClrMapping/>
+  </p:clrMapOvr>
+</p:notes>
+</file>
+
+<file path=ppt/notesSlides/notesSlide5.xml><?xml version="1.0" encoding="utf-8"?>
+<p:notes xmlns:a="http://schemas.openxmlformats.org/drawingml/2006/main" xmlns:r="http://schemas.openxmlformats.org/officeDocument/2006/relationships" xmlns:p="http://schemas.openxmlformats.org/presentationml/2006/main">
+  <p:cSld>
+    <p:spTree>
+      <p:nvGrpSpPr>
+        <p:cNvPr id="1" name=""/>
+        <p:cNvGrpSpPr/>
+        <p:nvPr/>
+      </p:nvGrpSpPr>
+      <p:grpSpPr>
+        <a:xfrm>
+          <a:off x="0" y="0"/>
+          <a:ext cx="0" cy="0"/>
+          <a:chOff x="0" y="0"/>
+          <a:chExt cx="0" cy="0"/>
+        </a:xfrm>
+      </p:grpSpPr>
+      <p:sp>
+        <p:nvSpPr>
+          <p:cNvPr id="2" name="Segnaposto immagine diapositiva 1"/>
+          <p:cNvSpPr>
+            <a:spLocks noGrp="1" noRot="1" noChangeAspect="1"/>
+          </p:cNvSpPr>
+          <p:nvPr>
+            <p:ph type="sldImg"/>
+          </p:nvPr>
+        </p:nvSpPr>
+        <p:spPr/>
+      </p:sp>
+      <p:sp>
+        <p:nvSpPr>
+          <p:cNvPr id="3" name="Segnaposto note 2"/>
+          <p:cNvSpPr>
+            <a:spLocks noGrp="1"/>
+          </p:cNvSpPr>
+          <p:nvPr>
+            <p:ph type="body" idx="1"/>
+          </p:nvPr>
+        </p:nvSpPr>
+        <p:spPr/>
+        <p:txBody>
+          <a:bodyPr/>
+          <a:lstStyle/>
+          <a:p>
+            <a:r>
+              <a:rPr lang="it-IT" dirty="0"/>
+              <a:t>Lines in </a:t>
+            </a:r>
+            <a:r>
+              <a:rPr lang="it-IT" dirty="0" err="1"/>
+              <a:t>both</a:t>
+            </a:r>
+            <a:r>
+              <a:rPr lang="it-IT" dirty="0"/>
+              <a:t> </a:t>
+            </a:r>
+            <a:r>
+              <a:rPr lang="it-IT" dirty="0" err="1"/>
+              <a:t>italics</a:t>
+            </a:r>
+            <a:r>
+              <a:rPr lang="it-IT" dirty="0"/>
+              <a:t> and </a:t>
+            </a:r>
+            <a:r>
+              <a:rPr lang="it-IT" dirty="0" err="1"/>
+              <a:t>bold</a:t>
+            </a:r>
+            <a:r>
+              <a:rPr lang="it-IT" dirty="0"/>
+              <a:t> are Linux Shell </a:t>
+            </a:r>
+            <a:r>
+              <a:rPr lang="it-IT" dirty="0" err="1"/>
+              <a:t>commands</a:t>
+            </a:r>
+            <a:r>
+              <a:rPr lang="it-IT" dirty="0"/>
+              <a:t>. </a:t>
+            </a:r>
+          </a:p>
+        </p:txBody>
+      </p:sp>
+      <p:sp>
+        <p:nvSpPr>
+          <p:cNvPr id="4" name="Segnaposto numero diapositiva 3"/>
+          <p:cNvSpPr>
+            <a:spLocks noGrp="1"/>
+          </p:cNvSpPr>
+          <p:nvPr>
+            <p:ph type="sldNum" sz="quarter" idx="5"/>
+          </p:nvPr>
+        </p:nvSpPr>
+        <p:spPr/>
+        <p:txBody>
+          <a:bodyPr/>
+          <a:lstStyle/>
+          <a:p>
+            <a:fld id="{A7C3BD9F-1625-4330-A034-FF41683B093C}" type="slidenum">
+              <a:rPr lang="it-IT" smtClean="0"/>
+              <a:t>5</a:t>
+            </a:fld>
+            <a:endParaRPr lang="it-IT"/>
+          </a:p>
+        </p:txBody>
+      </p:sp>
+    </p:spTree>
+    <p:extLst>
+      <p:ext uri="{BB962C8B-B14F-4D97-AF65-F5344CB8AC3E}">
+        <p14:creationId xmlns:p14="http://schemas.microsoft.com/office/powerpoint/2010/main" val="1203852934"/>
+      </p:ext>
+    </p:extLst>
+  </p:cSld>
+  <p:clrMapOvr>
+    <a:masterClrMapping/>
+  </p:clrMapOvr>
+</p:notes>
+</file>
+
+<file path=ppt/notesSlides/notesSlide6.xml><?xml version="1.0" encoding="utf-8"?>
+<p:notes xmlns:a="http://schemas.openxmlformats.org/drawingml/2006/main" xmlns:r="http://schemas.openxmlformats.org/officeDocument/2006/relationships" xmlns:p="http://schemas.openxmlformats.org/presentationml/2006/main">
+  <p:cSld>
+    <p:spTree>
+      <p:nvGrpSpPr>
+        <p:cNvPr id="1" name=""/>
+        <p:cNvGrpSpPr/>
+        <p:nvPr/>
+      </p:nvGrpSpPr>
+      <p:grpSpPr>
+        <a:xfrm>
+          <a:off x="0" y="0"/>
+          <a:ext cx="0" cy="0"/>
+          <a:chOff x="0" y="0"/>
+          <a:chExt cx="0" cy="0"/>
+        </a:xfrm>
+      </p:grpSpPr>
+      <p:sp>
+        <p:nvSpPr>
+          <p:cNvPr id="2" name="Segnaposto immagine diapositiva 1"/>
+          <p:cNvSpPr>
+            <a:spLocks noGrp="1" noRot="1" noChangeAspect="1"/>
+          </p:cNvSpPr>
+          <p:nvPr>
+            <p:ph type="sldImg"/>
+          </p:nvPr>
+        </p:nvSpPr>
+        <p:spPr/>
+      </p:sp>
+      <p:sp>
+        <p:nvSpPr>
+          <p:cNvPr id="3" name="Segnaposto note 2"/>
+          <p:cNvSpPr>
+            <a:spLocks noGrp="1"/>
+          </p:cNvSpPr>
+          <p:nvPr>
+            <p:ph type="body" idx="1"/>
+          </p:nvPr>
+        </p:nvSpPr>
+        <p:spPr/>
+        <p:txBody>
+          <a:bodyPr/>
+          <a:lstStyle/>
+          <a:p>
+            <a:r>
+              <a:rPr lang="it-IT" dirty="0" err="1"/>
+              <a:t>This</a:t>
+            </a:r>
+            <a:r>
+              <a:rPr lang="it-IT" dirty="0"/>
+              <a:t> test </a:t>
+            </a:r>
+            <a:r>
+              <a:rPr lang="it-IT" dirty="0" err="1"/>
+              <a:t>verifies</a:t>
+            </a:r>
+            <a:r>
+              <a:rPr lang="it-IT" dirty="0"/>
+              <a:t> </a:t>
+            </a:r>
+            <a:r>
+              <a:rPr lang="it-IT" dirty="0" err="1"/>
+              <a:t>if</a:t>
+            </a:r>
+            <a:r>
+              <a:rPr lang="it-IT" dirty="0"/>
+              <a:t> </a:t>
+            </a:r>
+            <a:r>
+              <a:rPr lang="it-IT" dirty="0" err="1"/>
+              <a:t>we</a:t>
+            </a:r>
+            <a:r>
+              <a:rPr lang="it-IT" dirty="0"/>
+              <a:t> can </a:t>
+            </a:r>
+            <a:r>
+              <a:rPr lang="it-IT" dirty="0" err="1"/>
+              <a:t>connect</a:t>
+            </a:r>
+            <a:r>
+              <a:rPr lang="it-IT" dirty="0"/>
+              <a:t> </a:t>
+            </a:r>
+            <a:r>
+              <a:rPr lang="it-IT" dirty="0" err="1"/>
+              <a:t>successfully</a:t>
+            </a:r>
+            <a:r>
+              <a:rPr lang="it-IT" dirty="0"/>
+              <a:t> to the board and </a:t>
+            </a:r>
+            <a:r>
+              <a:rPr lang="it-IT" dirty="0" err="1"/>
+              <a:t>if</a:t>
+            </a:r>
+            <a:r>
+              <a:rPr lang="it-IT" dirty="0"/>
+              <a:t> </a:t>
+            </a:r>
+            <a:r>
+              <a:rPr lang="it-IT" dirty="0" err="1"/>
+              <a:t>we</a:t>
+            </a:r>
+            <a:r>
+              <a:rPr lang="it-IT" dirty="0"/>
+              <a:t> </a:t>
+            </a:r>
+            <a:r>
+              <a:rPr lang="it-IT" dirty="0" err="1"/>
+              <a:t>have</a:t>
+            </a:r>
+            <a:r>
+              <a:rPr lang="it-IT" dirty="0"/>
+              <a:t> </a:t>
+            </a:r>
+            <a:r>
+              <a:rPr lang="it-IT" dirty="0" err="1"/>
+              <a:t>installed</a:t>
+            </a:r>
+            <a:r>
+              <a:rPr lang="it-IT" dirty="0"/>
+              <a:t> the Ubuntu </a:t>
+            </a:r>
+            <a:r>
+              <a:rPr lang="it-IT" dirty="0" err="1"/>
+              <a:t>operating</a:t>
+            </a:r>
+            <a:r>
+              <a:rPr lang="it-IT" dirty="0"/>
+              <a:t> system (</a:t>
+            </a:r>
+            <a:r>
+              <a:rPr lang="it-IT" dirty="0" err="1"/>
+              <a:t>henceforth</a:t>
+            </a:r>
+            <a:r>
+              <a:rPr lang="it-IT" dirty="0"/>
+              <a:t> </a:t>
+            </a:r>
+            <a:r>
+              <a:rPr lang="it-IT" dirty="0" err="1"/>
+              <a:t>called</a:t>
+            </a:r>
+            <a:r>
+              <a:rPr lang="it-IT" dirty="0"/>
+              <a:t> OS) </a:t>
+            </a:r>
+            <a:r>
+              <a:rPr lang="it-IT" dirty="0" err="1"/>
+              <a:t>correctly</a:t>
+            </a:r>
+            <a:r>
+              <a:rPr lang="it-IT" dirty="0"/>
+              <a:t>.</a:t>
+            </a:r>
+          </a:p>
+        </p:txBody>
+      </p:sp>
+      <p:sp>
+        <p:nvSpPr>
+          <p:cNvPr id="4" name="Segnaposto numero diapositiva 3"/>
+          <p:cNvSpPr>
+            <a:spLocks noGrp="1"/>
+          </p:cNvSpPr>
+          <p:nvPr>
+            <p:ph type="sldNum" sz="quarter" idx="5"/>
+          </p:nvPr>
+        </p:nvSpPr>
+        <p:spPr/>
+        <p:txBody>
+          <a:bodyPr/>
+          <a:lstStyle/>
+          <a:p>
+            <a:fld id="{A7C3BD9F-1625-4330-A034-FF41683B093C}" type="slidenum">
+              <a:rPr lang="it-IT" smtClean="0"/>
+              <a:t>6</a:t>
+            </a:fld>
+            <a:endParaRPr lang="it-IT"/>
+          </a:p>
+        </p:txBody>
+      </p:sp>
+    </p:spTree>
+    <p:extLst>
+      <p:ext uri="{BB962C8B-B14F-4D97-AF65-F5344CB8AC3E}">
+        <p14:creationId xmlns:p14="http://schemas.microsoft.com/office/powerpoint/2010/main" val="2771729767"/>
+      </p:ext>
+    </p:extLst>
+  </p:cSld>
+  <p:clrMapOvr>
+    <a:masterClrMapping/>
+  </p:clrMapOvr>
+</p:notes>
+</file>
+
+<file path=ppt/notesSlides/notesSlide7.xml><?xml version="1.0" encoding="utf-8"?>
+<p:notes xmlns:a="http://schemas.openxmlformats.org/drawingml/2006/main" xmlns:r="http://schemas.openxmlformats.org/officeDocument/2006/relationships" xmlns:p="http://schemas.openxmlformats.org/presentationml/2006/main">
+  <p:cSld>
+    <p:spTree>
+      <p:nvGrpSpPr>
+        <p:cNvPr id="1" name=""/>
+        <p:cNvGrpSpPr/>
+        <p:nvPr/>
+      </p:nvGrpSpPr>
+      <p:grpSpPr>
+        <a:xfrm>
+          <a:off x="0" y="0"/>
+          <a:ext cx="0" cy="0"/>
+          <a:chOff x="0" y="0"/>
+          <a:chExt cx="0" cy="0"/>
+        </a:xfrm>
+      </p:grpSpPr>
+      <p:sp>
+        <p:nvSpPr>
+          <p:cNvPr id="2" name="Segnaposto immagine diapositiva 1"/>
+          <p:cNvSpPr>
+            <a:spLocks noGrp="1" noRot="1" noChangeAspect="1"/>
+          </p:cNvSpPr>
+          <p:nvPr>
+            <p:ph type="sldImg"/>
+          </p:nvPr>
+        </p:nvSpPr>
+        <p:spPr/>
+      </p:sp>
+      <p:sp>
+        <p:nvSpPr>
+          <p:cNvPr id="3" name="Segnaposto note 2"/>
+          <p:cNvSpPr>
+            <a:spLocks noGrp="1"/>
+          </p:cNvSpPr>
+          <p:nvPr>
+            <p:ph type="body" idx="1"/>
+          </p:nvPr>
+        </p:nvSpPr>
+        <p:spPr/>
+        <p:txBody>
+          <a:bodyPr/>
+          <a:lstStyle/>
+          <a:p>
+            <a:r>
+              <a:rPr lang="it-IT" dirty="0"/>
+              <a:t>By default, after the login </a:t>
+            </a:r>
+            <a:r>
+              <a:rPr lang="it-IT" dirty="0" err="1"/>
+              <a:t>operation</a:t>
+            </a:r>
+            <a:r>
+              <a:rPr lang="it-IT" dirty="0"/>
+              <a:t> the system puts the shell inside the directory ‘/home/[username </a:t>
+            </a:r>
+            <a:r>
+              <a:rPr lang="it-IT" dirty="0" err="1"/>
+              <a:t>chosen</a:t>
+            </a:r>
+            <a:r>
+              <a:rPr lang="it-IT" dirty="0"/>
+              <a:t> </a:t>
+            </a:r>
+            <a:r>
+              <a:rPr lang="it-IT" dirty="0" err="1"/>
+              <a:t>during</a:t>
+            </a:r>
+            <a:r>
+              <a:rPr lang="it-IT" dirty="0"/>
+              <a:t> login]’. </a:t>
+            </a:r>
+          </a:p>
+        </p:txBody>
+      </p:sp>
+      <p:sp>
+        <p:nvSpPr>
+          <p:cNvPr id="4" name="Segnaposto numero diapositiva 3"/>
+          <p:cNvSpPr>
+            <a:spLocks noGrp="1"/>
+          </p:cNvSpPr>
+          <p:nvPr>
+            <p:ph type="sldNum" sz="quarter" idx="5"/>
+          </p:nvPr>
+        </p:nvSpPr>
+        <p:spPr/>
+        <p:txBody>
+          <a:bodyPr/>
+          <a:lstStyle/>
+          <a:p>
+            <a:fld id="{A7C3BD9F-1625-4330-A034-FF41683B093C}" type="slidenum">
+              <a:rPr lang="it-IT" smtClean="0"/>
+              <a:t>7</a:t>
+            </a:fld>
+            <a:endParaRPr lang="it-IT"/>
+          </a:p>
+        </p:txBody>
+      </p:sp>
+    </p:spTree>
+    <p:extLst>
+      <p:ext uri="{BB962C8B-B14F-4D97-AF65-F5344CB8AC3E}">
+        <p14:creationId xmlns:p14="http://schemas.microsoft.com/office/powerpoint/2010/main" val="1451308778"/>
+      </p:ext>
+    </p:extLst>
+  </p:cSld>
+  <p:clrMapOvr>
+    <a:masterClrMapping/>
+  </p:clrMapOvr>
+</p:notes>
+</file>
+
+<file path=ppt/notesSlides/notesSlide8.xml><?xml version="1.0" encoding="utf-8"?>
+<p:notes xmlns:a="http://schemas.openxmlformats.org/drawingml/2006/main" xmlns:r="http://schemas.openxmlformats.org/officeDocument/2006/relationships" xmlns:p="http://schemas.openxmlformats.org/presentationml/2006/main">
+  <p:cSld>
+    <p:spTree>
+      <p:nvGrpSpPr>
+        <p:cNvPr id="1" name=""/>
+        <p:cNvGrpSpPr/>
+        <p:nvPr/>
+      </p:nvGrpSpPr>
+      <p:grpSpPr>
+        <a:xfrm>
+          <a:off x="0" y="0"/>
+          <a:ext cx="0" cy="0"/>
+          <a:chOff x="0" y="0"/>
+          <a:chExt cx="0" cy="0"/>
+        </a:xfrm>
+      </p:grpSpPr>
+      <p:sp>
+        <p:nvSpPr>
+          <p:cNvPr id="2" name="Segnaposto immagine diapositiva 1"/>
+          <p:cNvSpPr>
+            <a:spLocks noGrp="1" noRot="1" noChangeAspect="1"/>
+          </p:cNvSpPr>
+          <p:nvPr>
+            <p:ph type="sldImg"/>
+          </p:nvPr>
+        </p:nvSpPr>
+        <p:spPr/>
+      </p:sp>
+      <p:sp>
+        <p:nvSpPr>
+          <p:cNvPr id="3" name="Segnaposto note 2"/>
+          <p:cNvSpPr>
+            <a:spLocks noGrp="1"/>
+          </p:cNvSpPr>
+          <p:nvPr>
+            <p:ph type="body" idx="1"/>
+          </p:nvPr>
+        </p:nvSpPr>
+        <p:spPr/>
+        <p:txBody>
+          <a:bodyPr/>
+          <a:lstStyle/>
+          <a:p>
+            <a:r>
+              <a:rPr lang="it-IT" dirty="0" err="1"/>
+              <a:t>As</a:t>
+            </a:r>
+            <a:r>
+              <a:rPr lang="it-IT" dirty="0"/>
+              <a:t> </a:t>
+            </a:r>
+            <a:r>
+              <a:rPr lang="it-IT" dirty="0" err="1"/>
+              <a:t>mentioned</a:t>
+            </a:r>
+            <a:r>
+              <a:rPr lang="it-IT" dirty="0"/>
+              <a:t> </a:t>
+            </a:r>
+            <a:r>
+              <a:rPr lang="it-IT" dirty="0" err="1"/>
+              <a:t>earlier</a:t>
+            </a:r>
+            <a:r>
+              <a:rPr lang="it-IT" dirty="0"/>
+              <a:t>, lines in </a:t>
+            </a:r>
+            <a:r>
+              <a:rPr lang="it-IT" dirty="0" err="1"/>
+              <a:t>both</a:t>
+            </a:r>
+            <a:r>
+              <a:rPr lang="it-IT" dirty="0"/>
+              <a:t> </a:t>
+            </a:r>
+            <a:r>
+              <a:rPr lang="it-IT" dirty="0" err="1"/>
+              <a:t>italics</a:t>
+            </a:r>
+            <a:r>
+              <a:rPr lang="it-IT" dirty="0"/>
+              <a:t> and </a:t>
+            </a:r>
+            <a:r>
+              <a:rPr lang="it-IT" dirty="0" err="1"/>
+              <a:t>bold</a:t>
+            </a:r>
+            <a:r>
+              <a:rPr lang="it-IT" dirty="0"/>
+              <a:t> are Shell </a:t>
+            </a:r>
+            <a:r>
+              <a:rPr lang="it-IT" dirty="0" err="1"/>
+              <a:t>commands</a:t>
+            </a:r>
+            <a:r>
+              <a:rPr lang="it-IT" dirty="0"/>
+              <a:t>. </a:t>
+            </a:r>
+          </a:p>
+          <a:p>
+            <a:r>
+              <a:rPr lang="it-IT" dirty="0" err="1"/>
+              <a:t>It</a:t>
+            </a:r>
+            <a:r>
+              <a:rPr lang="it-IT" dirty="0"/>
+              <a:t> </a:t>
+            </a:r>
+            <a:r>
+              <a:rPr lang="it-IT" dirty="0" err="1"/>
+              <a:t>is</a:t>
+            </a:r>
+            <a:r>
+              <a:rPr lang="it-IT" dirty="0"/>
+              <a:t> </a:t>
+            </a:r>
+            <a:r>
+              <a:rPr lang="it-IT" dirty="0" err="1"/>
+              <a:t>highly</a:t>
+            </a:r>
+            <a:r>
+              <a:rPr lang="it-IT" dirty="0"/>
+              <a:t> </a:t>
+            </a:r>
+            <a:r>
+              <a:rPr lang="it-IT" dirty="0" err="1"/>
+              <a:t>recommended</a:t>
+            </a:r>
+            <a:r>
+              <a:rPr lang="it-IT" dirty="0"/>
+              <a:t> to set up some form of FTP software, </a:t>
+            </a:r>
+            <a:r>
+              <a:rPr lang="it-IT" dirty="0" err="1"/>
+              <a:t>as</a:t>
+            </a:r>
+            <a:r>
+              <a:rPr lang="it-IT" dirty="0"/>
+              <a:t> </a:t>
+            </a:r>
+            <a:r>
+              <a:rPr lang="it-IT" dirty="0" err="1"/>
+              <a:t>it</a:t>
+            </a:r>
+            <a:r>
+              <a:rPr lang="it-IT" dirty="0"/>
+              <a:t> makes </a:t>
+            </a:r>
+            <a:r>
+              <a:rPr lang="it-IT" dirty="0" err="1"/>
+              <a:t>transfering</a:t>
+            </a:r>
+            <a:r>
+              <a:rPr lang="it-IT" dirty="0"/>
+              <a:t> files </a:t>
+            </a:r>
+            <a:r>
+              <a:rPr lang="it-IT" dirty="0" err="1"/>
+              <a:t>much</a:t>
+            </a:r>
+            <a:r>
+              <a:rPr lang="it-IT" dirty="0"/>
+              <a:t> </a:t>
+            </a:r>
+            <a:r>
+              <a:rPr lang="it-IT" dirty="0" err="1"/>
+              <a:t>less</a:t>
+            </a:r>
+            <a:r>
+              <a:rPr lang="it-IT" dirty="0"/>
+              <a:t> </a:t>
+            </a:r>
+            <a:r>
+              <a:rPr lang="it-IT" dirty="0" err="1"/>
+              <a:t>tedious</a:t>
+            </a:r>
+            <a:r>
+              <a:rPr lang="it-IT" dirty="0"/>
+              <a:t>.</a:t>
+            </a:r>
+          </a:p>
+        </p:txBody>
+      </p:sp>
+      <p:sp>
+        <p:nvSpPr>
+          <p:cNvPr id="4" name="Segnaposto numero diapositiva 3"/>
+          <p:cNvSpPr>
+            <a:spLocks noGrp="1"/>
+          </p:cNvSpPr>
+          <p:nvPr>
+            <p:ph type="sldNum" sz="quarter" idx="5"/>
+          </p:nvPr>
+        </p:nvSpPr>
+        <p:spPr/>
+        <p:txBody>
+          <a:bodyPr/>
+          <a:lstStyle/>
+          <a:p>
+            <a:fld id="{A7C3BD9F-1625-4330-A034-FF41683B093C}" type="slidenum">
+              <a:rPr lang="it-IT" smtClean="0"/>
+              <a:t>8</a:t>
+            </a:fld>
+            <a:endParaRPr lang="it-IT"/>
+          </a:p>
+        </p:txBody>
+      </p:sp>
+    </p:spTree>
+    <p:extLst>
+      <p:ext uri="{BB962C8B-B14F-4D97-AF65-F5344CB8AC3E}">
+        <p14:creationId xmlns:p14="http://schemas.microsoft.com/office/powerpoint/2010/main" val="2547111464"/>
+      </p:ext>
+    </p:extLst>
+  </p:cSld>
+  <p:clrMapOvr>
+    <a:masterClrMapping/>
+  </p:clrMapOvr>
+</p:notes>
+</file>
+
+<file path=ppt/notesSlides/notesSlide9.xml><?xml version="1.0" encoding="utf-8"?>
+<p:notes xmlns:a="http://schemas.openxmlformats.org/drawingml/2006/main" xmlns:r="http://schemas.openxmlformats.org/officeDocument/2006/relationships" xmlns:p="http://schemas.openxmlformats.org/presentationml/2006/main">
+  <p:cSld>
+    <p:spTree>
+      <p:nvGrpSpPr>
+        <p:cNvPr id="1" name=""/>
+        <p:cNvGrpSpPr/>
+        <p:nvPr/>
+      </p:nvGrpSpPr>
+      <p:grpSpPr>
+        <a:xfrm>
+          <a:off x="0" y="0"/>
+          <a:ext cx="0" cy="0"/>
+          <a:chOff x="0" y="0"/>
+          <a:chExt cx="0" cy="0"/>
+        </a:xfrm>
+      </p:grpSpPr>
+      <p:sp>
+        <p:nvSpPr>
+          <p:cNvPr id="2" name="Segnaposto immagine diapositiva 1"/>
+          <p:cNvSpPr>
+            <a:spLocks noGrp="1" noRot="1" noChangeAspect="1"/>
+          </p:cNvSpPr>
+          <p:nvPr>
+            <p:ph type="sldImg"/>
+          </p:nvPr>
+        </p:nvSpPr>
+        <p:spPr/>
+      </p:sp>
+      <p:sp>
+        <p:nvSpPr>
+          <p:cNvPr id="3" name="Segnaposto note 2"/>
+          <p:cNvSpPr>
+            <a:spLocks noGrp="1"/>
+          </p:cNvSpPr>
+          <p:nvPr>
+            <p:ph type="body" idx="1"/>
+          </p:nvPr>
+        </p:nvSpPr>
+        <p:spPr/>
+        <p:txBody>
+          <a:bodyPr/>
+          <a:lstStyle/>
+          <a:p>
+            <a:r>
+              <a:rPr lang="it-IT" dirty="0" err="1"/>
+              <a:t>It</a:t>
+            </a:r>
+            <a:r>
+              <a:rPr lang="it-IT" dirty="0"/>
+              <a:t> </a:t>
+            </a:r>
+            <a:r>
+              <a:rPr lang="it-IT" dirty="0" err="1"/>
+              <a:t>is</a:t>
+            </a:r>
+            <a:r>
+              <a:rPr lang="it-IT" dirty="0"/>
+              <a:t> </a:t>
+            </a:r>
+            <a:r>
+              <a:rPr lang="it-IT" dirty="0" err="1"/>
+              <a:t>possible</a:t>
+            </a:r>
+            <a:r>
+              <a:rPr lang="it-IT" dirty="0"/>
+              <a:t> to </a:t>
+            </a:r>
+            <a:r>
+              <a:rPr lang="it-IT" dirty="0" err="1"/>
+              <a:t>adjust</a:t>
+            </a:r>
+            <a:r>
+              <a:rPr lang="it-IT" dirty="0"/>
+              <a:t> the driver to work for a </a:t>
+            </a:r>
+            <a:r>
+              <a:rPr lang="it-IT" dirty="0" err="1"/>
+              <a:t>generic</a:t>
+            </a:r>
+            <a:r>
+              <a:rPr lang="it-IT" dirty="0"/>
+              <a:t> FPGA </a:t>
+            </a:r>
+            <a:r>
+              <a:rPr lang="it-IT" dirty="0" err="1"/>
+              <a:t>interface</a:t>
+            </a:r>
+            <a:r>
+              <a:rPr lang="it-IT" dirty="0"/>
+              <a:t> by </a:t>
+            </a:r>
+            <a:r>
+              <a:rPr lang="it-IT" dirty="0" err="1"/>
+              <a:t>tweaking</a:t>
+            </a:r>
+            <a:r>
+              <a:rPr lang="it-IT" dirty="0"/>
+              <a:t> the </a:t>
+            </a:r>
+            <a:r>
+              <a:rPr lang="it-IT" dirty="0" err="1"/>
+              <a:t>functions</a:t>
+            </a:r>
+            <a:r>
+              <a:rPr lang="it-IT" dirty="0"/>
+              <a:t> and the device-</a:t>
+            </a:r>
+            <a:r>
+              <a:rPr lang="it-IT" dirty="0" err="1"/>
+              <a:t>tree</a:t>
+            </a:r>
+            <a:r>
+              <a:rPr lang="it-IT" dirty="0"/>
+              <a:t>,</a:t>
+            </a:r>
+            <a:r>
+              <a:rPr lang="en-US" dirty="0"/>
+              <a:t> but implementing it would imply more limited kernel side control of the hardware, or direct control of the hardware from </a:t>
+            </a:r>
+            <a:r>
+              <a:rPr lang="en-US" dirty="0" err="1"/>
+              <a:t>userspace</a:t>
+            </a:r>
+            <a:r>
+              <a:rPr lang="en-US" dirty="0"/>
+              <a:t> using pointers to PL addresses, increasing the risk of runtime errors and crashes. </a:t>
+            </a:r>
+          </a:p>
+          <a:p>
+            <a:r>
+              <a:rPr lang="en-US" dirty="0"/>
+              <a:t>In most cases, a driver specialized to the PL interface in use is preferable.</a:t>
+            </a:r>
+            <a:endParaRPr lang="it-IT" dirty="0"/>
+          </a:p>
+          <a:p>
+            <a:endParaRPr lang="it-IT" dirty="0"/>
+          </a:p>
+        </p:txBody>
+      </p:sp>
+      <p:sp>
+        <p:nvSpPr>
+          <p:cNvPr id="4" name="Segnaposto numero diapositiva 3"/>
+          <p:cNvSpPr>
+            <a:spLocks noGrp="1"/>
+          </p:cNvSpPr>
+          <p:nvPr>
+            <p:ph type="sldNum" sz="quarter" idx="5"/>
+          </p:nvPr>
+        </p:nvSpPr>
+        <p:spPr/>
+        <p:txBody>
+          <a:bodyPr/>
+          <a:lstStyle/>
+          <a:p>
+            <a:fld id="{A7C3BD9F-1625-4330-A034-FF41683B093C}" type="slidenum">
+              <a:rPr lang="it-IT" smtClean="0"/>
+              <a:t>9</a:t>
+            </a:fld>
+            <a:endParaRPr lang="it-IT"/>
+          </a:p>
+        </p:txBody>
+      </p:sp>
+    </p:spTree>
+    <p:extLst>
+      <p:ext uri="{BB962C8B-B14F-4D97-AF65-F5344CB8AC3E}">
+        <p14:creationId xmlns:p14="http://schemas.microsoft.com/office/powerpoint/2010/main" val="4211640063"/>
+      </p:ext>
+    </p:extLst>
+  </p:cSld>
+  <p:clrMapOvr>
+    <a:masterClrMapping/>
+  </p:clrMapOvr>
+</p:notes>
 </file>
 
 <file path=ppt/slideLayouts/slideLayout1.xml><?xml version="1.0" encoding="utf-8"?>
@@ -896,7 +3336,7 @@
           <a:p>
             <a:fld id="{CFBE34AB-B73E-4B0C-8699-A3D555403971}" type="datetimeFigureOut">
               <a:rPr lang="it-IT" smtClean="0"/>
-              <a:t>14/11/2025</a:t>
+              <a:t>21/11/2025</a:t>
             </a:fld>
             <a:endParaRPr lang="it-IT"/>
           </a:p>
@@ -1147,7 +3587,7 @@
           <a:p>
             <a:fld id="{CFBE34AB-B73E-4B0C-8699-A3D555403971}" type="datetimeFigureOut">
               <a:rPr lang="it-IT" smtClean="0"/>
-              <a:t>14/11/2025</a:t>
+              <a:t>21/11/2025</a:t>
             </a:fld>
             <a:endParaRPr lang="it-IT"/>
           </a:p>
@@ -1461,7 +3901,7 @@
           <a:p>
             <a:fld id="{CFBE34AB-B73E-4B0C-8699-A3D555403971}" type="datetimeFigureOut">
               <a:rPr lang="it-IT" smtClean="0"/>
-              <a:t>14/11/2025</a:t>
+              <a:t>21/11/2025</a:t>
             </a:fld>
             <a:endParaRPr lang="it-IT"/>
           </a:p>
@@ -1802,7 +4242,7 @@
           <a:p>
             <a:fld id="{CFBE34AB-B73E-4B0C-8699-A3D555403971}" type="datetimeFigureOut">
               <a:rPr lang="it-IT" smtClean="0"/>
-              <a:t>14/11/2025</a:t>
+              <a:t>21/11/2025</a:t>
             </a:fld>
             <a:endParaRPr lang="it-IT"/>
           </a:p>
@@ -2116,7 +4556,7 @@
           <a:p>
             <a:fld id="{CFBE34AB-B73E-4B0C-8699-A3D555403971}" type="datetimeFigureOut">
               <a:rPr lang="it-IT" smtClean="0"/>
-              <a:t>14/11/2025</a:t>
+              <a:t>21/11/2025</a:t>
             </a:fld>
             <a:endParaRPr lang="it-IT"/>
           </a:p>
@@ -2509,7 +4949,7 @@
           <a:p>
             <a:fld id="{CFBE34AB-B73E-4B0C-8699-A3D555403971}" type="datetimeFigureOut">
               <a:rPr lang="it-IT" smtClean="0"/>
-              <a:t>14/11/2025</a:t>
+              <a:t>21/11/2025</a:t>
             </a:fld>
             <a:endParaRPr lang="it-IT"/>
           </a:p>
@@ -2679,7 +5119,7 @@
           <a:p>
             <a:fld id="{CFBE34AB-B73E-4B0C-8699-A3D555403971}" type="datetimeFigureOut">
               <a:rPr lang="it-IT" smtClean="0"/>
-              <a:t>14/11/2025</a:t>
+              <a:t>21/11/2025</a:t>
             </a:fld>
             <a:endParaRPr lang="it-IT"/>
           </a:p>
@@ -2859,7 +5299,7 @@
           <a:p>
             <a:fld id="{CFBE34AB-B73E-4B0C-8699-A3D555403971}" type="datetimeFigureOut">
               <a:rPr lang="it-IT" smtClean="0"/>
-              <a:t>14/11/2025</a:t>
+              <a:t>21/11/2025</a:t>
             </a:fld>
             <a:endParaRPr lang="it-IT"/>
           </a:p>
@@ -3035,7 +5475,7 @@
           <a:p>
             <a:fld id="{CFBE34AB-B73E-4B0C-8699-A3D555403971}" type="datetimeFigureOut">
               <a:rPr lang="it-IT" smtClean="0"/>
-              <a:t>14/11/2025</a:t>
+              <a:t>21/11/2025</a:t>
             </a:fld>
             <a:endParaRPr lang="it-IT"/>
           </a:p>
@@ -3282,7 +5722,7 @@
           <a:p>
             <a:fld id="{CFBE34AB-B73E-4B0C-8699-A3D555403971}" type="datetimeFigureOut">
               <a:rPr lang="it-IT" smtClean="0"/>
-              <a:t>14/11/2025</a:t>
+              <a:t>21/11/2025</a:t>
             </a:fld>
             <a:endParaRPr lang="it-IT"/>
           </a:p>
@@ -3514,7 +5954,7 @@
           <a:p>
             <a:fld id="{CFBE34AB-B73E-4B0C-8699-A3D555403971}" type="datetimeFigureOut">
               <a:rPr lang="it-IT" smtClean="0"/>
-              <a:t>14/11/2025</a:t>
+              <a:t>21/11/2025</a:t>
             </a:fld>
             <a:endParaRPr lang="it-IT"/>
           </a:p>
@@ -3888,7 +6328,7 @@
           <a:p>
             <a:fld id="{CFBE34AB-B73E-4B0C-8699-A3D555403971}" type="datetimeFigureOut">
               <a:rPr lang="it-IT" smtClean="0"/>
-              <a:t>14/11/2025</a:t>
+              <a:t>21/11/2025</a:t>
             </a:fld>
             <a:endParaRPr lang="it-IT"/>
           </a:p>
@@ -4011,7 +6451,7 @@
           <a:p>
             <a:fld id="{CFBE34AB-B73E-4B0C-8699-A3D555403971}" type="datetimeFigureOut">
               <a:rPr lang="it-IT" smtClean="0"/>
-              <a:t>14/11/2025</a:t>
+              <a:t>21/11/2025</a:t>
             </a:fld>
             <a:endParaRPr lang="it-IT"/>
           </a:p>
@@ -4106,7 +6546,7 @@
           <a:p>
             <a:fld id="{CFBE34AB-B73E-4B0C-8699-A3D555403971}" type="datetimeFigureOut">
               <a:rPr lang="it-IT" smtClean="0"/>
-              <a:t>14/11/2025</a:t>
+              <a:t>21/11/2025</a:t>
             </a:fld>
             <a:endParaRPr lang="it-IT"/>
           </a:p>
@@ -4361,7 +6801,7 @@
           <a:p>
             <a:fld id="{CFBE34AB-B73E-4B0C-8699-A3D555403971}" type="datetimeFigureOut">
               <a:rPr lang="it-IT" smtClean="0"/>
-              <a:t>14/11/2025</a:t>
+              <a:t>21/11/2025</a:t>
             </a:fld>
             <a:endParaRPr lang="it-IT"/>
           </a:p>
@@ -4624,7 +7064,7 @@
           <a:p>
             <a:fld id="{CFBE34AB-B73E-4B0C-8699-A3D555403971}" type="datetimeFigureOut">
               <a:rPr lang="it-IT" smtClean="0"/>
-              <a:t>14/11/2025</a:t>
+              <a:t>21/11/2025</a:t>
             </a:fld>
             <a:endParaRPr lang="it-IT"/>
           </a:p>
@@ -5423,7 +7863,7 @@
           <a:p>
             <a:fld id="{CFBE34AB-B73E-4B0C-8699-A3D555403971}" type="datetimeFigureOut">
               <a:rPr lang="it-IT" smtClean="0"/>
-              <a:t>14/11/2025</a:t>
+              <a:t>21/11/2025</a:t>
             </a:fld>
             <a:endParaRPr lang="it-IT"/>
           </a:p>
@@ -6029,6 +8469,3887 @@
 </p:sld>
 </file>
 
+<file path=ppt/slides/slide10.xml><?xml version="1.0" encoding="utf-8"?>
+<p:sld xmlns:a="http://schemas.openxmlformats.org/drawingml/2006/main" xmlns:r="http://schemas.openxmlformats.org/officeDocument/2006/relationships" xmlns:p="http://schemas.openxmlformats.org/presentationml/2006/main">
+  <p:cSld>
+    <p:spTree>
+      <p:nvGrpSpPr>
+        <p:cNvPr id="1" name="">
+          <a:extLst>
+            <a:ext uri="{FF2B5EF4-FFF2-40B4-BE49-F238E27FC236}">
+              <a16:creationId xmlns:a16="http://schemas.microsoft.com/office/drawing/2014/main" id="{2DC11077-9FE1-B3A1-6A85-918F480731D2}"/>
+            </a:ext>
+          </a:extLst>
+        </p:cNvPr>
+        <p:cNvGrpSpPr/>
+        <p:nvPr/>
+      </p:nvGrpSpPr>
+      <p:grpSpPr>
+        <a:xfrm>
+          <a:off x="0" y="0"/>
+          <a:ext cx="0" cy="0"/>
+          <a:chOff x="0" y="0"/>
+          <a:chExt cx="0" cy="0"/>
+        </a:xfrm>
+      </p:grpSpPr>
+      <p:sp>
+        <p:nvSpPr>
+          <p:cNvPr id="2" name="Titolo 1">
+            <a:extLst>
+              <a:ext uri="{FF2B5EF4-FFF2-40B4-BE49-F238E27FC236}">
+                <a16:creationId xmlns:a16="http://schemas.microsoft.com/office/drawing/2014/main" id="{09FC2A61-CE68-5D51-746E-614322124A10}"/>
+              </a:ext>
+            </a:extLst>
+          </p:cNvPr>
+          <p:cNvSpPr>
+            <a:spLocks noGrp="1"/>
+          </p:cNvSpPr>
+          <p:nvPr>
+            <p:ph type="title"/>
+          </p:nvPr>
+        </p:nvSpPr>
+        <p:spPr/>
+        <p:txBody>
+          <a:bodyPr/>
+          <a:lstStyle/>
+          <a:p>
+            <a:r>
+              <a:rPr lang="it-IT" dirty="0"/>
+              <a:t>Step 4: Driver test</a:t>
+            </a:r>
+          </a:p>
+        </p:txBody>
+      </p:sp>
+      <p:sp>
+        <p:nvSpPr>
+          <p:cNvPr id="3" name="Segnaposto contenuto 2">
+            <a:extLst>
+              <a:ext uri="{FF2B5EF4-FFF2-40B4-BE49-F238E27FC236}">
+                <a16:creationId xmlns:a16="http://schemas.microsoft.com/office/drawing/2014/main" id="{B14541E4-F545-EDDD-331B-87153686B67E}"/>
+              </a:ext>
+            </a:extLst>
+          </p:cNvPr>
+          <p:cNvSpPr>
+            <a:spLocks noGrp="1"/>
+          </p:cNvSpPr>
+          <p:nvPr>
+            <p:ph idx="1"/>
+          </p:nvPr>
+        </p:nvSpPr>
+        <p:spPr>
+          <a:xfrm>
+            <a:off x="384438" y="1364457"/>
+            <a:ext cx="8889564" cy="4676906"/>
+          </a:xfrm>
+        </p:spPr>
+        <p:txBody>
+          <a:bodyPr/>
+          <a:lstStyle/>
+          <a:p>
+            <a:r>
+              <a:rPr lang="it-IT" dirty="0" err="1"/>
+              <a:t>Run</a:t>
+            </a:r>
+            <a:r>
+              <a:rPr lang="it-IT" dirty="0"/>
+              <a:t> </a:t>
+            </a:r>
+            <a:r>
+              <a:rPr lang="it-IT" b="1" i="1" dirty="0"/>
+              <a:t>sudo </a:t>
+            </a:r>
+            <a:r>
+              <a:rPr lang="it-IT" b="1" i="1" dirty="0" err="1"/>
+              <a:t>fpgautil</a:t>
+            </a:r>
+            <a:r>
+              <a:rPr lang="it-IT" b="1" i="1" dirty="0"/>
+              <a:t> –b aes256_dma.bin</a:t>
+            </a:r>
+            <a:r>
+              <a:rPr lang="it-IT" dirty="0"/>
+              <a:t> to load the bitstream;</a:t>
+            </a:r>
+          </a:p>
+          <a:p>
+            <a:r>
+              <a:rPr lang="it-IT" dirty="0" err="1"/>
+              <a:t>Run</a:t>
+            </a:r>
+            <a:r>
+              <a:rPr lang="it-IT" dirty="0"/>
+              <a:t> </a:t>
+            </a:r>
+            <a:r>
+              <a:rPr lang="it-IT" b="1" i="1" dirty="0" err="1"/>
+              <a:t>dtc</a:t>
+            </a:r>
+            <a:r>
+              <a:rPr lang="it-IT" b="1" i="1" dirty="0"/>
+              <a:t> –i </a:t>
+            </a:r>
+            <a:r>
+              <a:rPr lang="it-IT" b="1" i="1" dirty="0" err="1"/>
+              <a:t>pl.dtsi</a:t>
+            </a:r>
+            <a:r>
+              <a:rPr lang="it-IT" b="1" i="1" dirty="0"/>
+              <a:t> –o </a:t>
+            </a:r>
+            <a:r>
+              <a:rPr lang="it-IT" b="1" i="1" dirty="0" err="1"/>
+              <a:t>pl.dtbo</a:t>
+            </a:r>
+            <a:r>
+              <a:rPr lang="it-IT" b="1" i="1" dirty="0"/>
+              <a:t> -@ </a:t>
+            </a:r>
+            <a:r>
+              <a:rPr lang="it-IT" dirty="0"/>
+              <a:t>to compile the device-</a:t>
+            </a:r>
+            <a:r>
+              <a:rPr lang="it-IT" dirty="0" err="1"/>
+              <a:t>tree</a:t>
+            </a:r>
+            <a:r>
+              <a:rPr lang="it-IT" dirty="0"/>
+              <a:t> overlay;</a:t>
+            </a:r>
+          </a:p>
+          <a:p>
+            <a:r>
+              <a:rPr lang="it-IT" dirty="0" err="1"/>
+              <a:t>Run</a:t>
+            </a:r>
+            <a:r>
+              <a:rPr lang="it-IT" dirty="0"/>
+              <a:t> </a:t>
+            </a:r>
+            <a:r>
+              <a:rPr lang="it-IT" b="1" i="1" dirty="0"/>
+              <a:t>sudo </a:t>
+            </a:r>
+            <a:r>
+              <a:rPr lang="it-IT" b="1" i="1" dirty="0" err="1"/>
+              <a:t>fpgautil</a:t>
+            </a:r>
+            <a:r>
+              <a:rPr lang="it-IT" b="1" i="1" dirty="0"/>
+              <a:t> –o </a:t>
+            </a:r>
+            <a:r>
+              <a:rPr lang="it-IT" b="1" i="1" dirty="0" err="1"/>
+              <a:t>pl.dtbo</a:t>
+            </a:r>
+            <a:r>
+              <a:rPr lang="it-IT" b="1" dirty="0"/>
+              <a:t> </a:t>
+            </a:r>
+            <a:r>
+              <a:rPr lang="it-IT" dirty="0"/>
+              <a:t>to </a:t>
+            </a:r>
+            <a:r>
+              <a:rPr lang="it-IT" dirty="0" err="1"/>
+              <a:t>insert</a:t>
+            </a:r>
+            <a:r>
+              <a:rPr lang="it-IT" dirty="0"/>
+              <a:t> the overlay;</a:t>
+            </a:r>
+          </a:p>
+          <a:p>
+            <a:r>
+              <a:rPr lang="it-IT" dirty="0" err="1"/>
+              <a:t>Run</a:t>
+            </a:r>
+            <a:r>
+              <a:rPr lang="it-IT" dirty="0"/>
+              <a:t> </a:t>
+            </a:r>
+            <a:r>
+              <a:rPr lang="it-IT" b="1" i="1" dirty="0"/>
+              <a:t>sudo </a:t>
+            </a:r>
+            <a:r>
+              <a:rPr lang="it-IT" b="1" i="1" dirty="0" err="1"/>
+              <a:t>dmesg</a:t>
+            </a:r>
+            <a:r>
+              <a:rPr lang="it-IT" dirty="0"/>
+              <a:t> </a:t>
+            </a:r>
+            <a:r>
+              <a:rPr lang="it-IT" dirty="0" err="1"/>
+              <a:t>again</a:t>
+            </a:r>
+            <a:r>
+              <a:rPr lang="it-IT" dirty="0"/>
+              <a:t>: </a:t>
+            </a:r>
+            <a:r>
+              <a:rPr lang="it-IT" dirty="0" err="1"/>
+              <a:t>you</a:t>
+            </a:r>
+            <a:r>
+              <a:rPr lang="it-IT" dirty="0"/>
+              <a:t> </a:t>
+            </a:r>
+            <a:r>
+              <a:rPr lang="it-IT" dirty="0" err="1"/>
+              <a:t>should</a:t>
+            </a:r>
+            <a:r>
+              <a:rPr lang="it-IT" dirty="0"/>
+              <a:t> </a:t>
+            </a:r>
+            <a:r>
+              <a:rPr lang="it-IT" dirty="0" err="1"/>
+              <a:t>see</a:t>
+            </a:r>
+            <a:r>
+              <a:rPr lang="it-IT" dirty="0"/>
+              <a:t> </a:t>
+            </a:r>
+            <a:r>
+              <a:rPr lang="it-IT" dirty="0" err="1"/>
+              <a:t>that</a:t>
+            </a:r>
+            <a:r>
+              <a:rPr lang="it-IT" dirty="0"/>
+              <a:t> the driver </a:t>
+            </a:r>
+            <a:r>
+              <a:rPr lang="it-IT" dirty="0" err="1"/>
+              <a:t>has</a:t>
+            </a:r>
+            <a:r>
+              <a:rPr lang="it-IT" dirty="0"/>
+              <a:t> </a:t>
+            </a:r>
+            <a:r>
+              <a:rPr lang="it-IT" dirty="0" err="1"/>
+              <a:t>detected</a:t>
+            </a:r>
+            <a:r>
+              <a:rPr lang="it-IT" dirty="0"/>
+              <a:t> the overlay;</a:t>
+            </a:r>
+          </a:p>
+        </p:txBody>
+      </p:sp>
+      <p:pic>
+        <p:nvPicPr>
+          <p:cNvPr id="5" name="Immagine 4">
+            <a:extLst>
+              <a:ext uri="{FF2B5EF4-FFF2-40B4-BE49-F238E27FC236}">
+                <a16:creationId xmlns:a16="http://schemas.microsoft.com/office/drawing/2014/main" id="{75BA8F06-131B-1512-4922-955D3A3A6930}"/>
+              </a:ext>
+            </a:extLst>
+          </p:cNvPr>
+          <p:cNvPicPr>
+            <a:picLocks noChangeAspect="1"/>
+          </p:cNvPicPr>
+          <p:nvPr/>
+        </p:nvPicPr>
+        <p:blipFill>
+          <a:blip r:embed="rId3"/>
+          <a:stretch>
+            <a:fillRect/>
+          </a:stretch>
+        </p:blipFill>
+        <p:spPr>
+          <a:xfrm>
+            <a:off x="677334" y="3228975"/>
+            <a:ext cx="4896289" cy="3437732"/>
+          </a:xfrm>
+          <a:prstGeom prst="rect">
+            <a:avLst/>
+          </a:prstGeom>
+        </p:spPr>
+      </p:pic>
+      <p:cxnSp>
+        <p:nvCxnSpPr>
+          <p:cNvPr id="11" name="Connettore curvo 10">
+            <a:extLst>
+              <a:ext uri="{FF2B5EF4-FFF2-40B4-BE49-F238E27FC236}">
+                <a16:creationId xmlns:a16="http://schemas.microsoft.com/office/drawing/2014/main" id="{EF262DB6-BF7A-B9E2-EA1F-B598FA19FA86}"/>
+              </a:ext>
+            </a:extLst>
+          </p:cNvPr>
+          <p:cNvCxnSpPr>
+            <a:cxnSpLocks/>
+            <a:stCxn id="12" idx="2"/>
+          </p:cNvCxnSpPr>
+          <p:nvPr/>
+        </p:nvCxnSpPr>
+        <p:spPr>
+          <a:xfrm rot="5400000">
+            <a:off x="5852783" y="4721689"/>
+            <a:ext cx="534061" cy="3009899"/>
+          </a:xfrm>
+          <a:prstGeom prst="curvedConnector2">
+            <a:avLst/>
+          </a:prstGeom>
+          <a:ln>
+            <a:solidFill>
+              <a:schemeClr val="tx1"/>
+            </a:solidFill>
+            <a:tailEnd type="triangle"/>
+          </a:ln>
+        </p:spPr>
+        <p:style>
+          <a:lnRef idx="1">
+            <a:schemeClr val="accent1"/>
+          </a:lnRef>
+          <a:fillRef idx="0">
+            <a:schemeClr val="accent1"/>
+          </a:fillRef>
+          <a:effectRef idx="0">
+            <a:schemeClr val="accent1"/>
+          </a:effectRef>
+          <a:fontRef idx="minor">
+            <a:schemeClr val="tx1"/>
+          </a:fontRef>
+        </p:style>
+      </p:cxnSp>
+      <p:sp>
+        <p:nvSpPr>
+          <p:cNvPr id="12" name="Rettangolo 11">
+            <a:extLst>
+              <a:ext uri="{FF2B5EF4-FFF2-40B4-BE49-F238E27FC236}">
+                <a16:creationId xmlns:a16="http://schemas.microsoft.com/office/drawing/2014/main" id="{7A14853D-19E8-F1EC-A852-FBC7ABA6585F}"/>
+              </a:ext>
+            </a:extLst>
+          </p:cNvPr>
+          <p:cNvSpPr/>
+          <p:nvPr/>
+        </p:nvSpPr>
+        <p:spPr>
+          <a:xfrm>
+            <a:off x="6760368" y="5313277"/>
+            <a:ext cx="1728787" cy="646331"/>
+          </a:xfrm>
+          <a:prstGeom prst="rect">
+            <a:avLst/>
+          </a:prstGeom>
+          <a:solidFill>
+            <a:schemeClr val="accent2">
+              <a:lumMod val="40000"/>
+              <a:lumOff val="60000"/>
+            </a:schemeClr>
+          </a:solidFill>
+        </p:spPr>
+        <p:style>
+          <a:lnRef idx="2">
+            <a:schemeClr val="accent1">
+              <a:shade val="15000"/>
+            </a:schemeClr>
+          </a:lnRef>
+          <a:fillRef idx="1">
+            <a:schemeClr val="accent1"/>
+          </a:fillRef>
+          <a:effectRef idx="0">
+            <a:schemeClr val="accent1"/>
+          </a:effectRef>
+          <a:fontRef idx="minor">
+            <a:schemeClr val="lt1"/>
+          </a:fontRef>
+        </p:style>
+        <p:txBody>
+          <a:bodyPr rtlCol="0" anchor="ctr"/>
+          <a:lstStyle/>
+          <a:p>
+            <a:pPr algn="ctr"/>
+            <a:endParaRPr lang="it-IT" dirty="0"/>
+          </a:p>
+          <a:p>
+            <a:pPr algn="ctr"/>
+            <a:r>
+              <a:rPr lang="it-IT" dirty="0" err="1">
+                <a:ln w="0"/>
+                <a:solidFill>
+                  <a:schemeClr val="tx1"/>
+                </a:solidFill>
+                <a:effectLst>
+                  <a:outerShdw blurRad="38100" dist="19050" dir="2700000" algn="tl" rotWithShape="0">
+                    <a:schemeClr val="dk1">
+                      <a:alpha val="40000"/>
+                    </a:schemeClr>
+                  </a:outerShdw>
+                </a:effectLst>
+              </a:rPr>
+              <a:t>Bitsream</a:t>
+            </a:r>
+            <a:r>
+              <a:rPr lang="it-IT" dirty="0">
+                <a:ln w="0"/>
+                <a:solidFill>
+                  <a:schemeClr val="tx1"/>
+                </a:solidFill>
+                <a:effectLst>
+                  <a:outerShdw blurRad="38100" dist="19050" dir="2700000" algn="tl" rotWithShape="0">
+                    <a:schemeClr val="dk1">
+                      <a:alpha val="40000"/>
+                    </a:schemeClr>
+                  </a:outerShdw>
+                </a:effectLst>
+              </a:rPr>
+              <a:t> </a:t>
+            </a:r>
+            <a:r>
+              <a:rPr lang="it-IT" dirty="0" err="1">
+                <a:ln w="0"/>
+                <a:solidFill>
+                  <a:schemeClr val="tx1"/>
+                </a:solidFill>
+                <a:effectLst>
+                  <a:outerShdw blurRad="38100" dist="19050" dir="2700000" algn="tl" rotWithShape="0">
+                    <a:schemeClr val="dk1">
+                      <a:alpha val="40000"/>
+                    </a:schemeClr>
+                  </a:outerShdw>
+                </a:effectLst>
+              </a:rPr>
+              <a:t>is</a:t>
+            </a:r>
+            <a:r>
+              <a:rPr lang="it-IT" dirty="0">
+                <a:ln w="0"/>
+                <a:solidFill>
+                  <a:schemeClr val="tx1"/>
+                </a:solidFill>
+                <a:effectLst>
+                  <a:outerShdw blurRad="38100" dist="19050" dir="2700000" algn="tl" rotWithShape="0">
+                    <a:schemeClr val="dk1">
+                      <a:alpha val="40000"/>
+                    </a:schemeClr>
+                  </a:outerShdw>
+                </a:effectLst>
+              </a:rPr>
+              <a:t> </a:t>
+            </a:r>
+            <a:r>
+              <a:rPr lang="it-IT" dirty="0" err="1">
+                <a:ln w="0"/>
+                <a:solidFill>
+                  <a:schemeClr val="tx1"/>
+                </a:solidFill>
+                <a:effectLst>
+                  <a:outerShdw blurRad="38100" dist="19050" dir="2700000" algn="tl" rotWithShape="0">
+                    <a:schemeClr val="dk1">
+                      <a:alpha val="40000"/>
+                    </a:schemeClr>
+                  </a:outerShdw>
+                </a:effectLst>
+              </a:rPr>
+              <a:t>loaded</a:t>
+            </a:r>
+            <a:r>
+              <a:rPr lang="it-IT" dirty="0">
+                <a:ln w="0"/>
+                <a:solidFill>
+                  <a:schemeClr val="tx1"/>
+                </a:solidFill>
+                <a:effectLst>
+                  <a:outerShdw blurRad="38100" dist="19050" dir="2700000" algn="tl" rotWithShape="0">
+                    <a:schemeClr val="dk1">
+                      <a:alpha val="40000"/>
+                    </a:schemeClr>
+                  </a:outerShdw>
+                </a:effectLst>
+              </a:rPr>
+              <a:t> </a:t>
+            </a:r>
+            <a:r>
+              <a:rPr lang="it-IT" dirty="0" err="1">
+                <a:ln w="0"/>
+                <a:solidFill>
+                  <a:schemeClr val="tx1"/>
+                </a:solidFill>
+                <a:effectLst>
+                  <a:outerShdw blurRad="38100" dist="19050" dir="2700000" algn="tl" rotWithShape="0">
+                    <a:schemeClr val="dk1">
+                      <a:alpha val="40000"/>
+                    </a:schemeClr>
+                  </a:outerShdw>
+                </a:effectLst>
+              </a:rPr>
+              <a:t>here</a:t>
+            </a:r>
+            <a:endParaRPr lang="it-IT" dirty="0">
+              <a:ln w="0"/>
+              <a:solidFill>
+                <a:schemeClr val="tx1"/>
+              </a:solidFill>
+              <a:effectLst>
+                <a:outerShdw blurRad="38100" dist="19050" dir="2700000" algn="tl" rotWithShape="0">
+                  <a:schemeClr val="dk1">
+                    <a:alpha val="40000"/>
+                  </a:schemeClr>
+                </a:outerShdw>
+              </a:effectLst>
+            </a:endParaRPr>
+          </a:p>
+          <a:p>
+            <a:pPr algn="ctr"/>
+            <a:endParaRPr lang="it-IT" dirty="0"/>
+          </a:p>
+        </p:txBody>
+      </p:sp>
+      <p:sp>
+        <p:nvSpPr>
+          <p:cNvPr id="13" name="Rettangolo 12">
+            <a:extLst>
+              <a:ext uri="{FF2B5EF4-FFF2-40B4-BE49-F238E27FC236}">
+                <a16:creationId xmlns:a16="http://schemas.microsoft.com/office/drawing/2014/main" id="{FA633B13-E8F2-C6D1-0332-33C190F5DC28}"/>
+              </a:ext>
+            </a:extLst>
+          </p:cNvPr>
+          <p:cNvSpPr/>
+          <p:nvPr/>
+        </p:nvSpPr>
+        <p:spPr>
+          <a:xfrm>
+            <a:off x="6760368" y="3621838"/>
+            <a:ext cx="1728787" cy="646331"/>
+          </a:xfrm>
+          <a:prstGeom prst="rect">
+            <a:avLst/>
+          </a:prstGeom>
+          <a:solidFill>
+            <a:schemeClr val="accent2">
+              <a:lumMod val="40000"/>
+              <a:lumOff val="60000"/>
+            </a:schemeClr>
+          </a:solidFill>
+        </p:spPr>
+        <p:style>
+          <a:lnRef idx="2">
+            <a:schemeClr val="accent1">
+              <a:shade val="15000"/>
+            </a:schemeClr>
+          </a:lnRef>
+          <a:fillRef idx="1">
+            <a:schemeClr val="accent1"/>
+          </a:fillRef>
+          <a:effectRef idx="0">
+            <a:schemeClr val="accent1"/>
+          </a:effectRef>
+          <a:fontRef idx="minor">
+            <a:schemeClr val="lt1"/>
+          </a:fontRef>
+        </p:style>
+        <p:txBody>
+          <a:bodyPr rtlCol="0" anchor="ctr"/>
+          <a:lstStyle/>
+          <a:p>
+            <a:pPr algn="ctr"/>
+            <a:endParaRPr lang="it-IT" dirty="0"/>
+          </a:p>
+          <a:p>
+            <a:pPr algn="ctr"/>
+            <a:r>
+              <a:rPr lang="it-IT" dirty="0">
+                <a:ln w="0"/>
+                <a:solidFill>
+                  <a:schemeClr val="tx1"/>
+                </a:solidFill>
+                <a:effectLst>
+                  <a:outerShdw blurRad="38100" dist="19050" dir="2700000" algn="tl" rotWithShape="0">
+                    <a:schemeClr val="dk1">
+                      <a:alpha val="40000"/>
+                    </a:schemeClr>
+                  </a:outerShdw>
+                </a:effectLst>
+              </a:rPr>
+              <a:t>Overlay </a:t>
+            </a:r>
+            <a:r>
+              <a:rPr lang="it-IT" dirty="0" err="1">
+                <a:ln w="0"/>
+                <a:solidFill>
+                  <a:schemeClr val="tx1"/>
+                </a:solidFill>
+                <a:effectLst>
+                  <a:outerShdw blurRad="38100" dist="19050" dir="2700000" algn="tl" rotWithShape="0">
+                    <a:schemeClr val="dk1">
+                      <a:alpha val="40000"/>
+                    </a:schemeClr>
+                  </a:outerShdw>
+                </a:effectLst>
+              </a:rPr>
+              <a:t>is</a:t>
+            </a:r>
+            <a:r>
+              <a:rPr lang="it-IT" dirty="0">
+                <a:ln w="0"/>
+                <a:solidFill>
+                  <a:schemeClr val="tx1"/>
+                </a:solidFill>
+                <a:effectLst>
+                  <a:outerShdw blurRad="38100" dist="19050" dir="2700000" algn="tl" rotWithShape="0">
+                    <a:schemeClr val="dk1">
+                      <a:alpha val="40000"/>
+                    </a:schemeClr>
+                  </a:outerShdw>
+                </a:effectLst>
+              </a:rPr>
+              <a:t> </a:t>
+            </a:r>
+            <a:r>
+              <a:rPr lang="it-IT" dirty="0" err="1">
+                <a:ln w="0"/>
+                <a:solidFill>
+                  <a:schemeClr val="tx1"/>
+                </a:solidFill>
+                <a:effectLst>
+                  <a:outerShdw blurRad="38100" dist="19050" dir="2700000" algn="tl" rotWithShape="0">
+                    <a:schemeClr val="dk1">
+                      <a:alpha val="40000"/>
+                    </a:schemeClr>
+                  </a:outerShdw>
+                </a:effectLst>
+              </a:rPr>
+              <a:t>inserted</a:t>
+            </a:r>
+            <a:r>
+              <a:rPr lang="it-IT" dirty="0">
+                <a:ln w="0"/>
+                <a:solidFill>
+                  <a:schemeClr val="tx1"/>
+                </a:solidFill>
+                <a:effectLst>
+                  <a:outerShdw blurRad="38100" dist="19050" dir="2700000" algn="tl" rotWithShape="0">
+                    <a:schemeClr val="dk1">
+                      <a:alpha val="40000"/>
+                    </a:schemeClr>
+                  </a:outerShdw>
+                </a:effectLst>
+              </a:rPr>
+              <a:t> </a:t>
+            </a:r>
+            <a:r>
+              <a:rPr lang="it-IT" dirty="0" err="1">
+                <a:ln w="0"/>
+                <a:solidFill>
+                  <a:schemeClr val="tx1"/>
+                </a:solidFill>
+                <a:effectLst>
+                  <a:outerShdw blurRad="38100" dist="19050" dir="2700000" algn="tl" rotWithShape="0">
+                    <a:schemeClr val="dk1">
+                      <a:alpha val="40000"/>
+                    </a:schemeClr>
+                  </a:outerShdw>
+                </a:effectLst>
+              </a:rPr>
+              <a:t>here</a:t>
+            </a:r>
+            <a:endParaRPr lang="it-IT" dirty="0">
+              <a:ln w="0"/>
+              <a:solidFill>
+                <a:schemeClr val="tx1"/>
+              </a:solidFill>
+              <a:effectLst>
+                <a:outerShdw blurRad="38100" dist="19050" dir="2700000" algn="tl" rotWithShape="0">
+                  <a:schemeClr val="dk1">
+                    <a:alpha val="40000"/>
+                  </a:schemeClr>
+                </a:outerShdw>
+              </a:effectLst>
+            </a:endParaRPr>
+          </a:p>
+          <a:p>
+            <a:pPr algn="ctr"/>
+            <a:endParaRPr lang="it-IT" dirty="0"/>
+          </a:p>
+        </p:txBody>
+      </p:sp>
+      <p:cxnSp>
+        <p:nvCxnSpPr>
+          <p:cNvPr id="15" name="Connettore curvo 14">
+            <a:extLst>
+              <a:ext uri="{FF2B5EF4-FFF2-40B4-BE49-F238E27FC236}">
+                <a16:creationId xmlns:a16="http://schemas.microsoft.com/office/drawing/2014/main" id="{06DC514F-EF37-BF50-A768-66B8B93F28C4}"/>
+              </a:ext>
+            </a:extLst>
+          </p:cNvPr>
+          <p:cNvCxnSpPr>
+            <a:stCxn id="13" idx="2"/>
+          </p:cNvCxnSpPr>
+          <p:nvPr/>
+        </p:nvCxnSpPr>
+        <p:spPr>
+          <a:xfrm rot="5400000">
+            <a:off x="5853598" y="3029435"/>
+            <a:ext cx="532431" cy="3009898"/>
+          </a:xfrm>
+          <a:prstGeom prst="curvedConnector2">
+            <a:avLst/>
+          </a:prstGeom>
+          <a:ln>
+            <a:tailEnd type="triangle"/>
+          </a:ln>
+        </p:spPr>
+        <p:style>
+          <a:lnRef idx="1">
+            <a:schemeClr val="dk1"/>
+          </a:lnRef>
+          <a:fillRef idx="0">
+            <a:schemeClr val="dk1"/>
+          </a:fillRef>
+          <a:effectRef idx="0">
+            <a:schemeClr val="dk1"/>
+          </a:effectRef>
+          <a:fontRef idx="minor">
+            <a:schemeClr val="tx1"/>
+          </a:fontRef>
+        </p:style>
+      </p:cxnSp>
+    </p:spTree>
+    <p:extLst>
+      <p:ext uri="{BB962C8B-B14F-4D97-AF65-F5344CB8AC3E}">
+        <p14:creationId xmlns:p14="http://schemas.microsoft.com/office/powerpoint/2010/main" val="812032543"/>
+      </p:ext>
+    </p:extLst>
+  </p:cSld>
+  <p:clrMapOvr>
+    <a:masterClrMapping/>
+  </p:clrMapOvr>
+</p:sld>
+</file>
+
+<file path=ppt/slides/slide11.xml><?xml version="1.0" encoding="utf-8"?>
+<p:sld xmlns:a="http://schemas.openxmlformats.org/drawingml/2006/main" xmlns:r="http://schemas.openxmlformats.org/officeDocument/2006/relationships" xmlns:p="http://schemas.openxmlformats.org/presentationml/2006/main">
+  <p:cSld>
+    <p:spTree>
+      <p:nvGrpSpPr>
+        <p:cNvPr id="1" name="">
+          <a:extLst>
+            <a:ext uri="{FF2B5EF4-FFF2-40B4-BE49-F238E27FC236}">
+              <a16:creationId xmlns:a16="http://schemas.microsoft.com/office/drawing/2014/main" id="{12D1692E-BDED-E1D5-F56F-98A8C0C5E04D}"/>
+            </a:ext>
+          </a:extLst>
+        </p:cNvPr>
+        <p:cNvGrpSpPr/>
+        <p:nvPr/>
+      </p:nvGrpSpPr>
+      <p:grpSpPr>
+        <a:xfrm>
+          <a:off x="0" y="0"/>
+          <a:ext cx="0" cy="0"/>
+          <a:chOff x="0" y="0"/>
+          <a:chExt cx="0" cy="0"/>
+        </a:xfrm>
+      </p:grpSpPr>
+      <p:sp>
+        <p:nvSpPr>
+          <p:cNvPr id="2" name="Titolo 1">
+            <a:extLst>
+              <a:ext uri="{FF2B5EF4-FFF2-40B4-BE49-F238E27FC236}">
+                <a16:creationId xmlns:a16="http://schemas.microsoft.com/office/drawing/2014/main" id="{9469A221-0463-AF36-1CE8-710323C66212}"/>
+              </a:ext>
+            </a:extLst>
+          </p:cNvPr>
+          <p:cNvSpPr>
+            <a:spLocks noGrp="1"/>
+          </p:cNvSpPr>
+          <p:nvPr>
+            <p:ph type="title"/>
+          </p:nvPr>
+        </p:nvSpPr>
+        <p:spPr>
+          <a:xfrm>
+            <a:off x="677334" y="78713"/>
+            <a:ext cx="4387585" cy="1320800"/>
+          </a:xfrm>
+        </p:spPr>
+        <p:txBody>
+          <a:bodyPr/>
+          <a:lstStyle/>
+          <a:p>
+            <a:r>
+              <a:rPr lang="it-IT" dirty="0"/>
+              <a:t>Step 4: Driver test</a:t>
+            </a:r>
+          </a:p>
+        </p:txBody>
+      </p:sp>
+      <p:sp>
+        <p:nvSpPr>
+          <p:cNvPr id="3" name="Segnaposto contenuto 2">
+            <a:extLst>
+              <a:ext uri="{FF2B5EF4-FFF2-40B4-BE49-F238E27FC236}">
+                <a16:creationId xmlns:a16="http://schemas.microsoft.com/office/drawing/2014/main" id="{E8FBC480-4256-D847-A8A0-4062136AEC15}"/>
+              </a:ext>
+            </a:extLst>
+          </p:cNvPr>
+          <p:cNvSpPr>
+            <a:spLocks noGrp="1"/>
+          </p:cNvSpPr>
+          <p:nvPr>
+            <p:ph idx="1"/>
+          </p:nvPr>
+        </p:nvSpPr>
+        <p:spPr>
+          <a:xfrm>
+            <a:off x="384438" y="832366"/>
+            <a:ext cx="8889564" cy="4676906"/>
+          </a:xfrm>
+        </p:spPr>
+        <p:txBody>
+          <a:bodyPr/>
+          <a:lstStyle/>
+          <a:p>
+            <a:r>
+              <a:rPr lang="it-IT" dirty="0"/>
+              <a:t>Compile </a:t>
+            </a:r>
+            <a:r>
+              <a:rPr lang="it-IT" b="1" i="1" dirty="0" err="1"/>
+              <a:t>dma_test.c</a:t>
+            </a:r>
+            <a:r>
+              <a:rPr lang="it-IT" i="1" dirty="0"/>
+              <a:t> </a:t>
+            </a:r>
+            <a:r>
+              <a:rPr lang="it-IT" dirty="0"/>
+              <a:t>with </a:t>
+            </a:r>
+            <a:r>
+              <a:rPr lang="it-IT" b="1" i="1" dirty="0" err="1"/>
+              <a:t>gcc</a:t>
+            </a:r>
+            <a:r>
+              <a:rPr lang="it-IT" b="1" i="1" dirty="0"/>
+              <a:t> </a:t>
+            </a:r>
+            <a:r>
+              <a:rPr lang="it-IT" b="1" i="1" dirty="0" err="1"/>
+              <a:t>dma_test.c</a:t>
+            </a:r>
+            <a:r>
+              <a:rPr lang="it-IT" b="1" i="1" dirty="0"/>
+              <a:t> –o </a:t>
+            </a:r>
+            <a:r>
+              <a:rPr lang="it-IT" b="1" i="1" dirty="0" err="1"/>
+              <a:t>dma_test</a:t>
+            </a:r>
+            <a:r>
+              <a:rPr lang="it-IT" b="1" i="1" dirty="0"/>
+              <a:t> </a:t>
+            </a:r>
+            <a:r>
+              <a:rPr lang="it-IT" i="1" dirty="0"/>
+              <a:t>;</a:t>
+            </a:r>
+          </a:p>
+          <a:p>
+            <a:r>
+              <a:rPr lang="it-IT" dirty="0" err="1"/>
+              <a:t>Run</a:t>
+            </a:r>
+            <a:r>
+              <a:rPr lang="it-IT" dirty="0"/>
+              <a:t> the test with </a:t>
+            </a:r>
+            <a:r>
+              <a:rPr lang="it-IT" b="1" i="1" dirty="0"/>
+              <a:t>./</a:t>
+            </a:r>
+            <a:r>
+              <a:rPr lang="it-IT" b="1" i="1" dirty="0" err="1"/>
+              <a:t>dma_test</a:t>
+            </a:r>
+            <a:r>
+              <a:rPr lang="it-IT" b="1" i="1" dirty="0"/>
+              <a:t> ;</a:t>
+            </a:r>
+          </a:p>
+        </p:txBody>
+      </p:sp>
+      <p:pic>
+        <p:nvPicPr>
+          <p:cNvPr id="5" name="Immagine 4">
+            <a:extLst>
+              <a:ext uri="{FF2B5EF4-FFF2-40B4-BE49-F238E27FC236}">
+                <a16:creationId xmlns:a16="http://schemas.microsoft.com/office/drawing/2014/main" id="{B74F185A-DC79-4282-191A-A1707F767289}"/>
+              </a:ext>
+            </a:extLst>
+          </p:cNvPr>
+          <p:cNvPicPr>
+            <a:picLocks noChangeAspect="1"/>
+          </p:cNvPicPr>
+          <p:nvPr/>
+        </p:nvPicPr>
+        <p:blipFill>
+          <a:blip r:embed="rId3"/>
+          <a:stretch>
+            <a:fillRect/>
+          </a:stretch>
+        </p:blipFill>
+        <p:spPr>
+          <a:xfrm>
+            <a:off x="398725" y="1826066"/>
+            <a:ext cx="6009216" cy="4219129"/>
+          </a:xfrm>
+          <a:prstGeom prst="rect">
+            <a:avLst/>
+          </a:prstGeom>
+        </p:spPr>
+      </p:pic>
+      <p:sp>
+        <p:nvSpPr>
+          <p:cNvPr id="13" name="Rettangolo 12">
+            <a:extLst>
+              <a:ext uri="{FF2B5EF4-FFF2-40B4-BE49-F238E27FC236}">
+                <a16:creationId xmlns:a16="http://schemas.microsoft.com/office/drawing/2014/main" id="{13E1559F-DCC2-9133-C9BB-9B3849728270}"/>
+              </a:ext>
+            </a:extLst>
+          </p:cNvPr>
+          <p:cNvSpPr/>
+          <p:nvPr/>
+        </p:nvSpPr>
+        <p:spPr>
+          <a:xfrm>
+            <a:off x="7217567" y="325172"/>
+            <a:ext cx="1728787" cy="646331"/>
+          </a:xfrm>
+          <a:prstGeom prst="rect">
+            <a:avLst/>
+          </a:prstGeom>
+          <a:solidFill>
+            <a:schemeClr val="accent2">
+              <a:lumMod val="40000"/>
+              <a:lumOff val="60000"/>
+            </a:schemeClr>
+          </a:solidFill>
+        </p:spPr>
+        <p:style>
+          <a:lnRef idx="2">
+            <a:schemeClr val="accent1">
+              <a:shade val="15000"/>
+            </a:schemeClr>
+          </a:lnRef>
+          <a:fillRef idx="1">
+            <a:schemeClr val="accent1"/>
+          </a:fillRef>
+          <a:effectRef idx="0">
+            <a:schemeClr val="accent1"/>
+          </a:effectRef>
+          <a:fontRef idx="minor">
+            <a:schemeClr val="lt1"/>
+          </a:fontRef>
+        </p:style>
+        <p:txBody>
+          <a:bodyPr rtlCol="0" anchor="ctr"/>
+          <a:lstStyle/>
+          <a:p>
+            <a:pPr algn="ctr"/>
+            <a:endParaRPr lang="it-IT" dirty="0"/>
+          </a:p>
+          <a:p>
+            <a:pPr algn="ctr"/>
+            <a:r>
+              <a:rPr lang="it-IT" b="1" dirty="0">
+                <a:ln w="0"/>
+                <a:solidFill>
+                  <a:schemeClr val="tx1"/>
+                </a:solidFill>
+                <a:effectLst>
+                  <a:outerShdw blurRad="38100" dist="19050" dir="2700000" algn="tl" rotWithShape="0">
+                    <a:schemeClr val="dk1">
+                      <a:alpha val="40000"/>
+                    </a:schemeClr>
+                  </a:outerShdw>
+                </a:effectLst>
+              </a:rPr>
+              <a:t>Test </a:t>
+            </a:r>
+            <a:r>
+              <a:rPr lang="it-IT" b="1" dirty="0" err="1">
+                <a:ln w="0"/>
+                <a:solidFill>
+                  <a:schemeClr val="tx1"/>
+                </a:solidFill>
+                <a:effectLst>
+                  <a:outerShdw blurRad="38100" dist="19050" dir="2700000" algn="tl" rotWithShape="0">
+                    <a:schemeClr val="dk1">
+                      <a:alpha val="40000"/>
+                    </a:schemeClr>
+                  </a:outerShdw>
+                </a:effectLst>
+              </a:rPr>
+              <a:t>program</a:t>
+            </a:r>
+            <a:r>
+              <a:rPr lang="it-IT" b="1" dirty="0">
+                <a:ln w="0"/>
+                <a:solidFill>
+                  <a:schemeClr val="tx1"/>
+                </a:solidFill>
+                <a:effectLst>
+                  <a:outerShdw blurRad="38100" dist="19050" dir="2700000" algn="tl" rotWithShape="0">
+                    <a:schemeClr val="dk1">
+                      <a:alpha val="40000"/>
+                    </a:schemeClr>
+                  </a:outerShdw>
+                </a:effectLst>
+              </a:rPr>
+              <a:t> starts </a:t>
+            </a:r>
+            <a:r>
+              <a:rPr lang="it-IT" b="1" dirty="0" err="1">
+                <a:ln w="0"/>
+                <a:solidFill>
+                  <a:schemeClr val="tx1"/>
+                </a:solidFill>
+                <a:effectLst>
+                  <a:outerShdw blurRad="38100" dist="19050" dir="2700000" algn="tl" rotWithShape="0">
+                    <a:schemeClr val="dk1">
+                      <a:alpha val="40000"/>
+                    </a:schemeClr>
+                  </a:outerShdw>
+                </a:effectLst>
+              </a:rPr>
+              <a:t>here</a:t>
+            </a:r>
+            <a:endParaRPr lang="it-IT" b="1" dirty="0">
+              <a:ln w="0"/>
+              <a:solidFill>
+                <a:schemeClr val="tx1"/>
+              </a:solidFill>
+              <a:effectLst>
+                <a:outerShdw blurRad="38100" dist="19050" dir="2700000" algn="tl" rotWithShape="0">
+                  <a:schemeClr val="dk1">
+                    <a:alpha val="40000"/>
+                  </a:schemeClr>
+                </a:outerShdw>
+              </a:effectLst>
+            </a:endParaRPr>
+          </a:p>
+          <a:p>
+            <a:pPr algn="ctr"/>
+            <a:endParaRPr lang="it-IT" dirty="0"/>
+          </a:p>
+        </p:txBody>
+      </p:sp>
+      <p:cxnSp>
+        <p:nvCxnSpPr>
+          <p:cNvPr id="15" name="Connettore curvo 14">
+            <a:extLst>
+              <a:ext uri="{FF2B5EF4-FFF2-40B4-BE49-F238E27FC236}">
+                <a16:creationId xmlns:a16="http://schemas.microsoft.com/office/drawing/2014/main" id="{9EE4CC9F-082C-CEEB-6BB8-1BCF0FC67F42}"/>
+              </a:ext>
+            </a:extLst>
+          </p:cNvPr>
+          <p:cNvCxnSpPr>
+            <a:cxnSpLocks/>
+            <a:stCxn id="13" idx="2"/>
+          </p:cNvCxnSpPr>
+          <p:nvPr/>
+        </p:nvCxnSpPr>
+        <p:spPr>
+          <a:xfrm rot="5400000">
+            <a:off x="6664535" y="714909"/>
+            <a:ext cx="1160832" cy="1674020"/>
+          </a:xfrm>
+          <a:prstGeom prst="curvedConnector2">
+            <a:avLst/>
+          </a:prstGeom>
+          <a:ln>
+            <a:tailEnd type="triangle"/>
+          </a:ln>
+        </p:spPr>
+        <p:style>
+          <a:lnRef idx="1">
+            <a:schemeClr val="dk1"/>
+          </a:lnRef>
+          <a:fillRef idx="0">
+            <a:schemeClr val="dk1"/>
+          </a:fillRef>
+          <a:effectRef idx="0">
+            <a:schemeClr val="dk1"/>
+          </a:effectRef>
+          <a:fontRef idx="minor">
+            <a:schemeClr val="tx1"/>
+          </a:fontRef>
+        </p:style>
+      </p:cxnSp>
+      <p:sp>
+        <p:nvSpPr>
+          <p:cNvPr id="9" name="Rettangolo 8">
+            <a:extLst>
+              <a:ext uri="{FF2B5EF4-FFF2-40B4-BE49-F238E27FC236}">
+                <a16:creationId xmlns:a16="http://schemas.microsoft.com/office/drawing/2014/main" id="{A70B47B5-0545-58FC-16B1-AA4876E715FA}"/>
+              </a:ext>
+            </a:extLst>
+          </p:cNvPr>
+          <p:cNvSpPr/>
+          <p:nvPr/>
+        </p:nvSpPr>
+        <p:spPr>
+          <a:xfrm>
+            <a:off x="8120093" y="1455828"/>
+            <a:ext cx="1728787" cy="646331"/>
+          </a:xfrm>
+          <a:prstGeom prst="rect">
+            <a:avLst/>
+          </a:prstGeom>
+          <a:solidFill>
+            <a:schemeClr val="accent2">
+              <a:lumMod val="40000"/>
+              <a:lumOff val="60000"/>
+            </a:schemeClr>
+          </a:solidFill>
+          <a:ln>
+            <a:solidFill>
+              <a:schemeClr val="tx1"/>
+            </a:solidFill>
+          </a:ln>
+        </p:spPr>
+        <p:style>
+          <a:lnRef idx="2">
+            <a:schemeClr val="accent1">
+              <a:shade val="15000"/>
+            </a:schemeClr>
+          </a:lnRef>
+          <a:fillRef idx="1">
+            <a:schemeClr val="accent1"/>
+          </a:fillRef>
+          <a:effectRef idx="0">
+            <a:schemeClr val="accent1"/>
+          </a:effectRef>
+          <a:fontRef idx="minor">
+            <a:schemeClr val="lt1"/>
+          </a:fontRef>
+        </p:style>
+        <p:txBody>
+          <a:bodyPr rtlCol="0" anchor="ctr"/>
+          <a:lstStyle/>
+          <a:p>
+            <a:pPr algn="ctr"/>
+            <a:endParaRPr lang="it-IT" b="1" i="1" dirty="0">
+              <a:ln w="0"/>
+              <a:solidFill>
+                <a:schemeClr val="tx1"/>
+              </a:solidFill>
+              <a:effectLst>
+                <a:outerShdw blurRad="38100" dist="19050" dir="2700000" algn="tl" rotWithShape="0">
+                  <a:schemeClr val="dk1">
+                    <a:alpha val="40000"/>
+                  </a:schemeClr>
+                </a:outerShdw>
+              </a:effectLst>
+            </a:endParaRPr>
+          </a:p>
+          <a:p>
+            <a:pPr algn="ctr"/>
+            <a:r>
+              <a:rPr lang="it-IT" b="1" i="1" dirty="0" err="1">
+                <a:ln w="0"/>
+                <a:solidFill>
+                  <a:schemeClr val="tx1"/>
+                </a:solidFill>
+              </a:rPr>
+              <a:t>ioctl</a:t>
+            </a:r>
+            <a:r>
+              <a:rPr lang="it-IT" b="1" i="1" dirty="0">
+                <a:ln w="0"/>
+                <a:solidFill>
+                  <a:schemeClr val="tx1"/>
+                </a:solidFill>
+              </a:rPr>
+              <a:t> </a:t>
+            </a:r>
+            <a:r>
+              <a:rPr lang="it-IT" dirty="0" err="1">
+                <a:ln w="0"/>
+                <a:solidFill>
+                  <a:schemeClr val="tx1"/>
+                </a:solidFill>
+              </a:rPr>
+              <a:t>is</a:t>
+            </a:r>
+            <a:r>
+              <a:rPr lang="it-IT" dirty="0">
+                <a:ln w="0"/>
+                <a:solidFill>
+                  <a:schemeClr val="tx1"/>
+                </a:solidFill>
+              </a:rPr>
+              <a:t> </a:t>
+            </a:r>
+            <a:r>
+              <a:rPr lang="it-IT" dirty="0" err="1">
+                <a:ln w="0"/>
+                <a:solidFill>
+                  <a:schemeClr val="tx1"/>
+                </a:solidFill>
+              </a:rPr>
+              <a:t>called</a:t>
+            </a:r>
+            <a:r>
+              <a:rPr lang="it-IT" b="1" i="1" dirty="0">
+                <a:ln w="0"/>
+                <a:solidFill>
+                  <a:schemeClr val="tx1"/>
+                </a:solidFill>
+              </a:rPr>
+              <a:t> </a:t>
+            </a:r>
+            <a:r>
+              <a:rPr lang="it-IT" dirty="0">
+                <a:ln w="0"/>
+                <a:solidFill>
+                  <a:schemeClr val="tx1"/>
+                </a:solidFill>
+              </a:rPr>
+              <a:t>(system call)</a:t>
+            </a:r>
+            <a:endParaRPr lang="it-IT" b="1" i="1" dirty="0">
+              <a:ln w="0"/>
+              <a:solidFill>
+                <a:schemeClr val="tx1"/>
+              </a:solidFill>
+            </a:endParaRPr>
+          </a:p>
+          <a:p>
+            <a:pPr algn="ctr"/>
+            <a:endParaRPr lang="it-IT" dirty="0"/>
+          </a:p>
+        </p:txBody>
+      </p:sp>
+      <p:cxnSp>
+        <p:nvCxnSpPr>
+          <p:cNvPr id="21" name="Connettore curvo 20">
+            <a:extLst>
+              <a:ext uri="{FF2B5EF4-FFF2-40B4-BE49-F238E27FC236}">
+                <a16:creationId xmlns:a16="http://schemas.microsoft.com/office/drawing/2014/main" id="{5658ED4C-1C49-1523-7047-6D1047974CE9}"/>
+              </a:ext>
+            </a:extLst>
+          </p:cNvPr>
+          <p:cNvCxnSpPr>
+            <a:cxnSpLocks/>
+            <a:stCxn id="9" idx="2"/>
+          </p:cNvCxnSpPr>
+          <p:nvPr/>
+        </p:nvCxnSpPr>
+        <p:spPr>
+          <a:xfrm rot="5400000">
+            <a:off x="7007984" y="387694"/>
+            <a:ext cx="262039" cy="3690968"/>
+          </a:xfrm>
+          <a:prstGeom prst="curvedConnector2">
+            <a:avLst/>
+          </a:prstGeom>
+          <a:ln>
+            <a:tailEnd type="triangle"/>
+          </a:ln>
+        </p:spPr>
+        <p:style>
+          <a:lnRef idx="3">
+            <a:schemeClr val="accent1"/>
+          </a:lnRef>
+          <a:fillRef idx="0">
+            <a:schemeClr val="accent1"/>
+          </a:fillRef>
+          <a:effectRef idx="2">
+            <a:schemeClr val="accent1"/>
+          </a:effectRef>
+          <a:fontRef idx="minor">
+            <a:schemeClr val="tx1"/>
+          </a:fontRef>
+        </p:style>
+      </p:cxnSp>
+      <p:cxnSp>
+        <p:nvCxnSpPr>
+          <p:cNvPr id="24" name="Connettore curvo 23">
+            <a:extLst>
+              <a:ext uri="{FF2B5EF4-FFF2-40B4-BE49-F238E27FC236}">
+                <a16:creationId xmlns:a16="http://schemas.microsoft.com/office/drawing/2014/main" id="{A883073D-74E7-0D38-F6C3-6FBEFDC27BCC}"/>
+              </a:ext>
+            </a:extLst>
+          </p:cNvPr>
+          <p:cNvCxnSpPr>
+            <a:cxnSpLocks/>
+          </p:cNvCxnSpPr>
+          <p:nvPr/>
+        </p:nvCxnSpPr>
+        <p:spPr>
+          <a:xfrm rot="5400000">
+            <a:off x="4060386" y="3302444"/>
+            <a:ext cx="324735" cy="12700"/>
+          </a:xfrm>
+          <a:prstGeom prst="curvedConnector3">
+            <a:avLst>
+              <a:gd name="adj1" fmla="val 50000"/>
+            </a:avLst>
+          </a:prstGeom>
+          <a:ln>
+            <a:tailEnd type="triangle"/>
+          </a:ln>
+        </p:spPr>
+        <p:style>
+          <a:lnRef idx="3">
+            <a:schemeClr val="accent1"/>
+          </a:lnRef>
+          <a:fillRef idx="0">
+            <a:schemeClr val="accent1"/>
+          </a:fillRef>
+          <a:effectRef idx="2">
+            <a:schemeClr val="accent1"/>
+          </a:effectRef>
+          <a:fontRef idx="minor">
+            <a:schemeClr val="tx1"/>
+          </a:fontRef>
+        </p:style>
+      </p:cxnSp>
+      <p:cxnSp>
+        <p:nvCxnSpPr>
+          <p:cNvPr id="27" name="Connettore curvo 26">
+            <a:extLst>
+              <a:ext uri="{FF2B5EF4-FFF2-40B4-BE49-F238E27FC236}">
+                <a16:creationId xmlns:a16="http://schemas.microsoft.com/office/drawing/2014/main" id="{78A561D5-E68A-5B6A-867A-414C6D10BF1C}"/>
+              </a:ext>
+            </a:extLst>
+          </p:cNvPr>
+          <p:cNvCxnSpPr>
+            <a:cxnSpLocks/>
+            <a:endCxn id="32" idx="1"/>
+          </p:cNvCxnSpPr>
+          <p:nvPr/>
+        </p:nvCxnSpPr>
+        <p:spPr>
+          <a:xfrm flipV="1">
+            <a:off x="5222081" y="2885988"/>
+            <a:ext cx="2898012" cy="749718"/>
+          </a:xfrm>
+          <a:prstGeom prst="curvedConnector3">
+            <a:avLst>
+              <a:gd name="adj1" fmla="val 50000"/>
+            </a:avLst>
+          </a:prstGeom>
+          <a:ln>
+            <a:tailEnd type="triangle"/>
+          </a:ln>
+        </p:spPr>
+        <p:style>
+          <a:lnRef idx="3">
+            <a:schemeClr val="accent1"/>
+          </a:lnRef>
+          <a:fillRef idx="0">
+            <a:schemeClr val="accent1"/>
+          </a:fillRef>
+          <a:effectRef idx="2">
+            <a:schemeClr val="accent1"/>
+          </a:effectRef>
+          <a:fontRef idx="minor">
+            <a:schemeClr val="tx1"/>
+          </a:fontRef>
+        </p:style>
+      </p:cxnSp>
+      <p:sp>
+        <p:nvSpPr>
+          <p:cNvPr id="32" name="Rettangolo 31">
+            <a:extLst>
+              <a:ext uri="{FF2B5EF4-FFF2-40B4-BE49-F238E27FC236}">
+                <a16:creationId xmlns:a16="http://schemas.microsoft.com/office/drawing/2014/main" id="{0CD6F5A9-4BFA-A6A6-1139-07E7B57A8391}"/>
+              </a:ext>
+            </a:extLst>
+          </p:cNvPr>
+          <p:cNvSpPr/>
+          <p:nvPr/>
+        </p:nvSpPr>
+        <p:spPr>
+          <a:xfrm>
+            <a:off x="8120093" y="2562822"/>
+            <a:ext cx="1728787" cy="646331"/>
+          </a:xfrm>
+          <a:prstGeom prst="rect">
+            <a:avLst/>
+          </a:prstGeom>
+          <a:solidFill>
+            <a:schemeClr val="accent2">
+              <a:lumMod val="40000"/>
+              <a:lumOff val="60000"/>
+            </a:schemeClr>
+          </a:solidFill>
+          <a:ln>
+            <a:solidFill>
+              <a:schemeClr val="tx1"/>
+            </a:solidFill>
+          </a:ln>
+        </p:spPr>
+        <p:style>
+          <a:lnRef idx="2">
+            <a:schemeClr val="accent1">
+              <a:shade val="15000"/>
+            </a:schemeClr>
+          </a:lnRef>
+          <a:fillRef idx="1">
+            <a:schemeClr val="accent1"/>
+          </a:fillRef>
+          <a:effectRef idx="0">
+            <a:schemeClr val="accent1"/>
+          </a:effectRef>
+          <a:fontRef idx="minor">
+            <a:schemeClr val="lt1"/>
+          </a:fontRef>
+        </p:style>
+        <p:txBody>
+          <a:bodyPr rtlCol="0" anchor="ctr"/>
+          <a:lstStyle/>
+          <a:p>
+            <a:pPr algn="ctr"/>
+            <a:endParaRPr lang="it-IT" b="1" i="1" dirty="0">
+              <a:ln w="0"/>
+              <a:solidFill>
+                <a:schemeClr val="tx1"/>
+              </a:solidFill>
+            </a:endParaRPr>
+          </a:p>
+          <a:p>
+            <a:pPr algn="ctr"/>
+            <a:r>
+              <a:rPr lang="it-IT" dirty="0">
+                <a:ln w="0"/>
+                <a:solidFill>
+                  <a:schemeClr val="tx1"/>
+                </a:solidFill>
+              </a:rPr>
+              <a:t>Kernel </a:t>
+            </a:r>
+            <a:r>
+              <a:rPr lang="it-IT" dirty="0" err="1">
+                <a:ln w="0"/>
+                <a:solidFill>
+                  <a:schemeClr val="tx1"/>
+                </a:solidFill>
+              </a:rPr>
+              <a:t>sees</a:t>
+            </a:r>
+            <a:r>
+              <a:rPr lang="it-IT" dirty="0">
+                <a:ln w="0"/>
+                <a:solidFill>
+                  <a:schemeClr val="tx1"/>
+                </a:solidFill>
+              </a:rPr>
+              <a:t> system </a:t>
+            </a:r>
+            <a:r>
+              <a:rPr lang="it-IT" u="sng" dirty="0">
+                <a:ln w="0"/>
+                <a:solidFill>
+                  <a:schemeClr val="tx1"/>
+                </a:solidFill>
+              </a:rPr>
+              <a:t>call</a:t>
+            </a:r>
+          </a:p>
+          <a:p>
+            <a:pPr algn="ctr"/>
+            <a:endParaRPr lang="it-IT" dirty="0"/>
+          </a:p>
+        </p:txBody>
+      </p:sp>
+      <p:sp>
+        <p:nvSpPr>
+          <p:cNvPr id="34" name="Rettangolo 33">
+            <a:extLst>
+              <a:ext uri="{FF2B5EF4-FFF2-40B4-BE49-F238E27FC236}">
+                <a16:creationId xmlns:a16="http://schemas.microsoft.com/office/drawing/2014/main" id="{5FF42CA8-ADAD-77A8-52C7-9B28A7EB9FDA}"/>
+              </a:ext>
+            </a:extLst>
+          </p:cNvPr>
+          <p:cNvSpPr/>
+          <p:nvPr/>
+        </p:nvSpPr>
+        <p:spPr>
+          <a:xfrm>
+            <a:off x="8114364" y="3716347"/>
+            <a:ext cx="1728787" cy="646331"/>
+          </a:xfrm>
+          <a:prstGeom prst="rect">
+            <a:avLst/>
+          </a:prstGeom>
+          <a:solidFill>
+            <a:schemeClr val="accent2">
+              <a:lumMod val="40000"/>
+              <a:lumOff val="60000"/>
+            </a:schemeClr>
+          </a:solidFill>
+          <a:ln>
+            <a:solidFill>
+              <a:schemeClr val="tx1"/>
+            </a:solidFill>
+          </a:ln>
+        </p:spPr>
+        <p:style>
+          <a:lnRef idx="2">
+            <a:schemeClr val="accent1">
+              <a:shade val="15000"/>
+            </a:schemeClr>
+          </a:lnRef>
+          <a:fillRef idx="1">
+            <a:schemeClr val="accent1"/>
+          </a:fillRef>
+          <a:effectRef idx="0">
+            <a:schemeClr val="accent1"/>
+          </a:effectRef>
+          <a:fontRef idx="minor">
+            <a:schemeClr val="lt1"/>
+          </a:fontRef>
+        </p:style>
+        <p:txBody>
+          <a:bodyPr rtlCol="0" anchor="ctr"/>
+          <a:lstStyle/>
+          <a:p>
+            <a:pPr algn="ctr"/>
+            <a:endParaRPr lang="it-IT" b="1" i="1" dirty="0">
+              <a:ln w="0"/>
+              <a:solidFill>
+                <a:schemeClr val="tx1"/>
+              </a:solidFill>
+              <a:effectLst>
+                <a:outerShdw blurRad="38100" dist="19050" dir="2700000" algn="tl" rotWithShape="0">
+                  <a:schemeClr val="dk1">
+                    <a:alpha val="40000"/>
+                  </a:schemeClr>
+                </a:outerShdw>
+              </a:effectLst>
+            </a:endParaRPr>
+          </a:p>
+          <a:p>
+            <a:pPr algn="ctr"/>
+            <a:r>
+              <a:rPr lang="it-IT" dirty="0">
+                <a:ln w="0"/>
+                <a:solidFill>
+                  <a:schemeClr val="tx1"/>
+                </a:solidFill>
+              </a:rPr>
+              <a:t>Call </a:t>
+            </a:r>
+            <a:r>
+              <a:rPr lang="it-IT" dirty="0" err="1">
+                <a:ln w="0"/>
+                <a:solidFill>
+                  <a:schemeClr val="tx1"/>
+                </a:solidFill>
+              </a:rPr>
+              <a:t>is</a:t>
+            </a:r>
+            <a:r>
+              <a:rPr lang="it-IT" dirty="0">
+                <a:ln w="0"/>
+                <a:solidFill>
+                  <a:schemeClr val="tx1"/>
+                </a:solidFill>
+              </a:rPr>
+              <a:t> for driver</a:t>
+            </a:r>
+          </a:p>
+          <a:p>
+            <a:pPr algn="ctr"/>
+            <a:endParaRPr lang="it-IT" dirty="0"/>
+          </a:p>
+        </p:txBody>
+      </p:sp>
+      <p:cxnSp>
+        <p:nvCxnSpPr>
+          <p:cNvPr id="35" name="Connettore curvo 34">
+            <a:extLst>
+              <a:ext uri="{FF2B5EF4-FFF2-40B4-BE49-F238E27FC236}">
+                <a16:creationId xmlns:a16="http://schemas.microsoft.com/office/drawing/2014/main" id="{63E9D4D4-B224-376A-1CC6-7E88C8CAC656}"/>
+              </a:ext>
+            </a:extLst>
+          </p:cNvPr>
+          <p:cNvCxnSpPr>
+            <a:cxnSpLocks/>
+            <a:stCxn id="32" idx="2"/>
+            <a:endCxn id="34" idx="0"/>
+          </p:cNvCxnSpPr>
+          <p:nvPr/>
+        </p:nvCxnSpPr>
+        <p:spPr>
+          <a:xfrm rot="5400000">
+            <a:off x="8728026" y="3459886"/>
+            <a:ext cx="507194" cy="5729"/>
+          </a:xfrm>
+          <a:prstGeom prst="curvedConnector3">
+            <a:avLst>
+              <a:gd name="adj1" fmla="val 50000"/>
+            </a:avLst>
+          </a:prstGeom>
+          <a:ln>
+            <a:tailEnd type="triangle"/>
+          </a:ln>
+        </p:spPr>
+        <p:style>
+          <a:lnRef idx="3">
+            <a:schemeClr val="accent1"/>
+          </a:lnRef>
+          <a:fillRef idx="0">
+            <a:schemeClr val="accent1"/>
+          </a:fillRef>
+          <a:effectRef idx="2">
+            <a:schemeClr val="accent1"/>
+          </a:effectRef>
+          <a:fontRef idx="minor">
+            <a:schemeClr val="tx1"/>
+          </a:fontRef>
+        </p:style>
+      </p:cxnSp>
+      <p:cxnSp>
+        <p:nvCxnSpPr>
+          <p:cNvPr id="38" name="Connettore curvo 37">
+            <a:extLst>
+              <a:ext uri="{FF2B5EF4-FFF2-40B4-BE49-F238E27FC236}">
+                <a16:creationId xmlns:a16="http://schemas.microsoft.com/office/drawing/2014/main" id="{2669E11C-1E95-9A69-CEF4-727B9865C49E}"/>
+              </a:ext>
+            </a:extLst>
+          </p:cNvPr>
+          <p:cNvCxnSpPr>
+            <a:cxnSpLocks/>
+            <a:stCxn id="34" idx="1"/>
+          </p:cNvCxnSpPr>
+          <p:nvPr/>
+        </p:nvCxnSpPr>
+        <p:spPr>
+          <a:xfrm rot="10800000" flipV="1">
+            <a:off x="5222082" y="4039513"/>
+            <a:ext cx="2892282" cy="625786"/>
+          </a:xfrm>
+          <a:prstGeom prst="curvedConnector3">
+            <a:avLst>
+              <a:gd name="adj1" fmla="val 50000"/>
+            </a:avLst>
+          </a:prstGeom>
+          <a:ln>
+            <a:tailEnd type="triangle"/>
+          </a:ln>
+        </p:spPr>
+        <p:style>
+          <a:lnRef idx="3">
+            <a:schemeClr val="accent1"/>
+          </a:lnRef>
+          <a:fillRef idx="0">
+            <a:schemeClr val="accent1"/>
+          </a:fillRef>
+          <a:effectRef idx="2">
+            <a:schemeClr val="accent1"/>
+          </a:effectRef>
+          <a:fontRef idx="minor">
+            <a:schemeClr val="tx1"/>
+          </a:fontRef>
+        </p:style>
+      </p:cxnSp>
+      <p:cxnSp>
+        <p:nvCxnSpPr>
+          <p:cNvPr id="52" name="Connettore curvo 51">
+            <a:extLst>
+              <a:ext uri="{FF2B5EF4-FFF2-40B4-BE49-F238E27FC236}">
+                <a16:creationId xmlns:a16="http://schemas.microsoft.com/office/drawing/2014/main" id="{737F05FC-5624-BE23-C73E-0E2EE7ED3DA7}"/>
+              </a:ext>
+            </a:extLst>
+          </p:cNvPr>
+          <p:cNvCxnSpPr>
+            <a:cxnSpLocks/>
+          </p:cNvCxnSpPr>
+          <p:nvPr/>
+        </p:nvCxnSpPr>
+        <p:spPr>
+          <a:xfrm rot="5400000">
+            <a:off x="4284224" y="2654740"/>
+            <a:ext cx="324735" cy="12700"/>
+          </a:xfrm>
+          <a:prstGeom prst="curvedConnector3">
+            <a:avLst>
+              <a:gd name="adj1" fmla="val 50000"/>
+            </a:avLst>
+          </a:prstGeom>
+          <a:ln>
+            <a:tailEnd type="triangle"/>
+          </a:ln>
+        </p:spPr>
+        <p:style>
+          <a:lnRef idx="3">
+            <a:schemeClr val="accent1"/>
+          </a:lnRef>
+          <a:fillRef idx="0">
+            <a:schemeClr val="accent1"/>
+          </a:fillRef>
+          <a:effectRef idx="2">
+            <a:schemeClr val="accent1"/>
+          </a:effectRef>
+          <a:fontRef idx="minor">
+            <a:schemeClr val="tx1"/>
+          </a:fontRef>
+        </p:style>
+      </p:cxnSp>
+      <p:cxnSp>
+        <p:nvCxnSpPr>
+          <p:cNvPr id="57" name="Connettore curvo 56">
+            <a:extLst>
+              <a:ext uri="{FF2B5EF4-FFF2-40B4-BE49-F238E27FC236}">
+                <a16:creationId xmlns:a16="http://schemas.microsoft.com/office/drawing/2014/main" id="{191C5DFD-4244-BF93-536B-037F2A45D161}"/>
+              </a:ext>
+            </a:extLst>
+          </p:cNvPr>
+          <p:cNvCxnSpPr>
+            <a:cxnSpLocks/>
+            <a:endCxn id="61" idx="1"/>
+          </p:cNvCxnSpPr>
+          <p:nvPr/>
+        </p:nvCxnSpPr>
+        <p:spPr>
+          <a:xfrm>
+            <a:off x="5222081" y="4829178"/>
+            <a:ext cx="2214562" cy="337750"/>
+          </a:xfrm>
+          <a:prstGeom prst="curvedConnector3">
+            <a:avLst>
+              <a:gd name="adj1" fmla="val 50000"/>
+            </a:avLst>
+          </a:prstGeom>
+          <a:ln>
+            <a:tailEnd type="triangle"/>
+          </a:ln>
+        </p:spPr>
+        <p:style>
+          <a:lnRef idx="3">
+            <a:schemeClr val="accent1"/>
+          </a:lnRef>
+          <a:fillRef idx="0">
+            <a:schemeClr val="accent1"/>
+          </a:fillRef>
+          <a:effectRef idx="2">
+            <a:schemeClr val="accent1"/>
+          </a:effectRef>
+          <a:fontRef idx="minor">
+            <a:schemeClr val="tx1"/>
+          </a:fontRef>
+        </p:style>
+      </p:cxnSp>
+      <p:sp>
+        <p:nvSpPr>
+          <p:cNvPr id="61" name="Rettangolo 60">
+            <a:extLst>
+              <a:ext uri="{FF2B5EF4-FFF2-40B4-BE49-F238E27FC236}">
+                <a16:creationId xmlns:a16="http://schemas.microsoft.com/office/drawing/2014/main" id="{F21304C7-FC11-A0A5-2D13-5929334D66FA}"/>
+              </a:ext>
+            </a:extLst>
+          </p:cNvPr>
+          <p:cNvSpPr/>
+          <p:nvPr/>
+        </p:nvSpPr>
+        <p:spPr>
+          <a:xfrm>
+            <a:off x="7436643" y="4685446"/>
+            <a:ext cx="2250281" cy="962963"/>
+          </a:xfrm>
+          <a:prstGeom prst="rect">
+            <a:avLst/>
+          </a:prstGeom>
+          <a:solidFill>
+            <a:schemeClr val="accent2">
+              <a:lumMod val="40000"/>
+              <a:lumOff val="60000"/>
+            </a:schemeClr>
+          </a:solidFill>
+          <a:ln>
+            <a:solidFill>
+              <a:schemeClr val="tx1"/>
+            </a:solidFill>
+          </a:ln>
+        </p:spPr>
+        <p:style>
+          <a:lnRef idx="2">
+            <a:schemeClr val="accent1">
+              <a:shade val="15000"/>
+            </a:schemeClr>
+          </a:lnRef>
+          <a:fillRef idx="1">
+            <a:schemeClr val="accent1"/>
+          </a:fillRef>
+          <a:effectRef idx="0">
+            <a:schemeClr val="accent1"/>
+          </a:effectRef>
+          <a:fontRef idx="minor">
+            <a:schemeClr val="lt1"/>
+          </a:fontRef>
+        </p:style>
+        <p:txBody>
+          <a:bodyPr rtlCol="0" anchor="ctr"/>
+          <a:lstStyle/>
+          <a:p>
+            <a:pPr algn="ctr"/>
+            <a:r>
+              <a:rPr lang="it-IT" dirty="0">
+                <a:solidFill>
+                  <a:schemeClr val="tx1"/>
+                </a:solidFill>
+              </a:rPr>
+              <a:t>Driver </a:t>
+            </a:r>
+            <a:r>
+              <a:rPr lang="it-IT" dirty="0" err="1">
+                <a:solidFill>
+                  <a:schemeClr val="tx1"/>
+                </a:solidFill>
+              </a:rPr>
+              <a:t>executes</a:t>
+            </a:r>
+            <a:r>
+              <a:rPr lang="it-IT" dirty="0">
+                <a:solidFill>
+                  <a:schemeClr val="tx1"/>
+                </a:solidFill>
+              </a:rPr>
+              <a:t> system call, </a:t>
+            </a:r>
+            <a:r>
+              <a:rPr lang="it-IT" dirty="0" err="1">
+                <a:solidFill>
+                  <a:schemeClr val="tx1"/>
+                </a:solidFill>
+              </a:rPr>
+              <a:t>addresses</a:t>
+            </a:r>
+            <a:r>
+              <a:rPr lang="it-IT" dirty="0">
+                <a:solidFill>
+                  <a:schemeClr val="tx1"/>
+                </a:solidFill>
+              </a:rPr>
+              <a:t> hardware </a:t>
+            </a:r>
+          </a:p>
+        </p:txBody>
+      </p:sp>
+      <p:cxnSp>
+        <p:nvCxnSpPr>
+          <p:cNvPr id="70" name="Connettore curvo 69">
+            <a:extLst>
+              <a:ext uri="{FF2B5EF4-FFF2-40B4-BE49-F238E27FC236}">
+                <a16:creationId xmlns:a16="http://schemas.microsoft.com/office/drawing/2014/main" id="{A8A7C923-CB65-8FF5-FF1B-FEF6A702DD04}"/>
+              </a:ext>
+            </a:extLst>
+          </p:cNvPr>
+          <p:cNvCxnSpPr>
+            <a:cxnSpLocks/>
+            <a:stCxn id="61" idx="2"/>
+          </p:cNvCxnSpPr>
+          <p:nvPr/>
+        </p:nvCxnSpPr>
+        <p:spPr>
+          <a:xfrm rot="5400000">
+            <a:off x="6800118" y="4070373"/>
+            <a:ext cx="183631" cy="3339703"/>
+          </a:xfrm>
+          <a:prstGeom prst="curvedConnector2">
+            <a:avLst/>
+          </a:prstGeom>
+          <a:ln>
+            <a:tailEnd type="triangle"/>
+          </a:ln>
+        </p:spPr>
+        <p:style>
+          <a:lnRef idx="3">
+            <a:schemeClr val="accent1"/>
+          </a:lnRef>
+          <a:fillRef idx="0">
+            <a:schemeClr val="accent1"/>
+          </a:fillRef>
+          <a:effectRef idx="2">
+            <a:schemeClr val="accent1"/>
+          </a:effectRef>
+          <a:fontRef idx="minor">
+            <a:schemeClr val="tx1"/>
+          </a:fontRef>
+        </p:style>
+      </p:cxnSp>
+    </p:spTree>
+    <p:extLst>
+      <p:ext uri="{BB962C8B-B14F-4D97-AF65-F5344CB8AC3E}">
+        <p14:creationId xmlns:p14="http://schemas.microsoft.com/office/powerpoint/2010/main" val="1477342185"/>
+      </p:ext>
+    </p:extLst>
+  </p:cSld>
+  <p:clrMapOvr>
+    <a:masterClrMapping/>
+  </p:clrMapOvr>
+  <p:timing>
+    <p:tnLst>
+      <p:par>
+        <p:cTn id="1" dur="indefinite" restart="never" nodeType="tmRoot">
+          <p:childTnLst>
+            <p:seq concurrent="1" nextAc="seek">
+              <p:cTn id="2" dur="indefinite" nodeType="mainSeq">
+                <p:childTnLst>
+                  <p:par>
+                    <p:cTn id="3" fill="hold">
+                      <p:stCondLst>
+                        <p:cond delay="indefinite"/>
+                      </p:stCondLst>
+                      <p:childTnLst>
+                        <p:par>
+                          <p:cTn id="4" fill="hold">
+                            <p:stCondLst>
+                              <p:cond delay="0"/>
+                            </p:stCondLst>
+                            <p:childTnLst>
+                              <p:par>
+                                <p:cTn id="5" presetID="1" presetClass="entr" presetSubtype="0" fill="hold" grpId="0" nodeType="clickEffect">
+                                  <p:stCondLst>
+                                    <p:cond delay="0"/>
+                                  </p:stCondLst>
+                                  <p:childTnLst>
+                                    <p:set>
+                                      <p:cBhvr>
+                                        <p:cTn id="6" dur="1" fill="hold">
+                                          <p:stCondLst>
+                                            <p:cond delay="0"/>
+                                          </p:stCondLst>
+                                        </p:cTn>
+                                        <p:tgtEl>
+                                          <p:spTgt spid="13"/>
+                                        </p:tgtEl>
+                                        <p:attrNameLst>
+                                          <p:attrName>style.visibility</p:attrName>
+                                        </p:attrNameLst>
+                                      </p:cBhvr>
+                                      <p:to>
+                                        <p:strVal val="visible"/>
+                                      </p:to>
+                                    </p:set>
+                                  </p:childTnLst>
+                                </p:cTn>
+                              </p:par>
+                              <p:par>
+                                <p:cTn id="7" presetID="1" presetClass="entr" presetSubtype="0" fill="hold" nodeType="withEffect">
+                                  <p:stCondLst>
+                                    <p:cond delay="0"/>
+                                  </p:stCondLst>
+                                  <p:childTnLst>
+                                    <p:set>
+                                      <p:cBhvr>
+                                        <p:cTn id="8" dur="1" fill="hold">
+                                          <p:stCondLst>
+                                            <p:cond delay="0"/>
+                                          </p:stCondLst>
+                                        </p:cTn>
+                                        <p:tgtEl>
+                                          <p:spTgt spid="15"/>
+                                        </p:tgtEl>
+                                        <p:attrNameLst>
+                                          <p:attrName>style.visibility</p:attrName>
+                                        </p:attrNameLst>
+                                      </p:cBhvr>
+                                      <p:to>
+                                        <p:strVal val="visible"/>
+                                      </p:to>
+                                    </p:set>
+                                  </p:childTnLst>
+                                </p:cTn>
+                              </p:par>
+                            </p:childTnLst>
+                          </p:cTn>
+                        </p:par>
+                      </p:childTnLst>
+                    </p:cTn>
+                  </p:par>
+                  <p:par>
+                    <p:cTn id="9" fill="hold">
+                      <p:stCondLst>
+                        <p:cond delay="indefinite"/>
+                      </p:stCondLst>
+                      <p:childTnLst>
+                        <p:par>
+                          <p:cTn id="10" fill="hold">
+                            <p:stCondLst>
+                              <p:cond delay="0"/>
+                            </p:stCondLst>
+                            <p:childTnLst>
+                              <p:par>
+                                <p:cTn id="11" presetID="1" presetClass="entr" presetSubtype="0" fill="hold" grpId="0" nodeType="clickEffect">
+                                  <p:stCondLst>
+                                    <p:cond delay="0"/>
+                                  </p:stCondLst>
+                                  <p:childTnLst>
+                                    <p:set>
+                                      <p:cBhvr>
+                                        <p:cTn id="12" dur="1" fill="hold">
+                                          <p:stCondLst>
+                                            <p:cond delay="0"/>
+                                          </p:stCondLst>
+                                        </p:cTn>
+                                        <p:tgtEl>
+                                          <p:spTgt spid="9"/>
+                                        </p:tgtEl>
+                                        <p:attrNameLst>
+                                          <p:attrName>style.visibility</p:attrName>
+                                        </p:attrNameLst>
+                                      </p:cBhvr>
+                                      <p:to>
+                                        <p:strVal val="visible"/>
+                                      </p:to>
+                                    </p:set>
+                                  </p:childTnLst>
+                                </p:cTn>
+                              </p:par>
+                              <p:par>
+                                <p:cTn id="13" presetID="1" presetClass="entr" presetSubtype="0" fill="hold" nodeType="withEffect">
+                                  <p:stCondLst>
+                                    <p:cond delay="0"/>
+                                  </p:stCondLst>
+                                  <p:childTnLst>
+                                    <p:set>
+                                      <p:cBhvr>
+                                        <p:cTn id="14" dur="1" fill="hold">
+                                          <p:stCondLst>
+                                            <p:cond delay="0"/>
+                                          </p:stCondLst>
+                                        </p:cTn>
+                                        <p:tgtEl>
+                                          <p:spTgt spid="21"/>
+                                        </p:tgtEl>
+                                        <p:attrNameLst>
+                                          <p:attrName>style.visibility</p:attrName>
+                                        </p:attrNameLst>
+                                      </p:cBhvr>
+                                      <p:to>
+                                        <p:strVal val="visible"/>
+                                      </p:to>
+                                    </p:set>
+                                  </p:childTnLst>
+                                </p:cTn>
+                              </p:par>
+                            </p:childTnLst>
+                          </p:cTn>
+                        </p:par>
+                      </p:childTnLst>
+                    </p:cTn>
+                  </p:par>
+                  <p:par>
+                    <p:cTn id="15" fill="hold">
+                      <p:stCondLst>
+                        <p:cond delay="indefinite"/>
+                      </p:stCondLst>
+                      <p:childTnLst>
+                        <p:par>
+                          <p:cTn id="16" fill="hold">
+                            <p:stCondLst>
+                              <p:cond delay="0"/>
+                            </p:stCondLst>
+                            <p:childTnLst>
+                              <p:par>
+                                <p:cTn id="17" presetID="1" presetClass="entr" presetSubtype="0" fill="hold" nodeType="clickEffect">
+                                  <p:stCondLst>
+                                    <p:cond delay="0"/>
+                                  </p:stCondLst>
+                                  <p:childTnLst>
+                                    <p:set>
+                                      <p:cBhvr>
+                                        <p:cTn id="18" dur="1" fill="hold">
+                                          <p:stCondLst>
+                                            <p:cond delay="0"/>
+                                          </p:stCondLst>
+                                        </p:cTn>
+                                        <p:tgtEl>
+                                          <p:spTgt spid="52"/>
+                                        </p:tgtEl>
+                                        <p:attrNameLst>
+                                          <p:attrName>style.visibility</p:attrName>
+                                        </p:attrNameLst>
+                                      </p:cBhvr>
+                                      <p:to>
+                                        <p:strVal val="visible"/>
+                                      </p:to>
+                                    </p:set>
+                                  </p:childTnLst>
+                                </p:cTn>
+                              </p:par>
+                            </p:childTnLst>
+                          </p:cTn>
+                        </p:par>
+                      </p:childTnLst>
+                    </p:cTn>
+                  </p:par>
+                  <p:par>
+                    <p:cTn id="19" fill="hold">
+                      <p:stCondLst>
+                        <p:cond delay="indefinite"/>
+                      </p:stCondLst>
+                      <p:childTnLst>
+                        <p:par>
+                          <p:cTn id="20" fill="hold">
+                            <p:stCondLst>
+                              <p:cond delay="0"/>
+                            </p:stCondLst>
+                            <p:childTnLst>
+                              <p:par>
+                                <p:cTn id="21" presetID="1" presetClass="entr" presetSubtype="0" fill="hold" nodeType="clickEffect">
+                                  <p:stCondLst>
+                                    <p:cond delay="0"/>
+                                  </p:stCondLst>
+                                  <p:childTnLst>
+                                    <p:set>
+                                      <p:cBhvr>
+                                        <p:cTn id="22" dur="1" fill="hold">
+                                          <p:stCondLst>
+                                            <p:cond delay="0"/>
+                                          </p:stCondLst>
+                                        </p:cTn>
+                                        <p:tgtEl>
+                                          <p:spTgt spid="24"/>
+                                        </p:tgtEl>
+                                        <p:attrNameLst>
+                                          <p:attrName>style.visibility</p:attrName>
+                                        </p:attrNameLst>
+                                      </p:cBhvr>
+                                      <p:to>
+                                        <p:strVal val="visible"/>
+                                      </p:to>
+                                    </p:set>
+                                  </p:childTnLst>
+                                </p:cTn>
+                              </p:par>
+                            </p:childTnLst>
+                          </p:cTn>
+                        </p:par>
+                      </p:childTnLst>
+                    </p:cTn>
+                  </p:par>
+                  <p:par>
+                    <p:cTn id="23" fill="hold">
+                      <p:stCondLst>
+                        <p:cond delay="indefinite"/>
+                      </p:stCondLst>
+                      <p:childTnLst>
+                        <p:par>
+                          <p:cTn id="24" fill="hold">
+                            <p:stCondLst>
+                              <p:cond delay="0"/>
+                            </p:stCondLst>
+                            <p:childTnLst>
+                              <p:par>
+                                <p:cTn id="25" presetID="1" presetClass="entr" presetSubtype="0" fill="hold" nodeType="clickEffect">
+                                  <p:stCondLst>
+                                    <p:cond delay="0"/>
+                                  </p:stCondLst>
+                                  <p:childTnLst>
+                                    <p:set>
+                                      <p:cBhvr>
+                                        <p:cTn id="26" dur="1" fill="hold">
+                                          <p:stCondLst>
+                                            <p:cond delay="0"/>
+                                          </p:stCondLst>
+                                        </p:cTn>
+                                        <p:tgtEl>
+                                          <p:spTgt spid="27"/>
+                                        </p:tgtEl>
+                                        <p:attrNameLst>
+                                          <p:attrName>style.visibility</p:attrName>
+                                        </p:attrNameLst>
+                                      </p:cBhvr>
+                                      <p:to>
+                                        <p:strVal val="visible"/>
+                                      </p:to>
+                                    </p:set>
+                                  </p:childTnLst>
+                                </p:cTn>
+                              </p:par>
+                              <p:par>
+                                <p:cTn id="27" presetID="1" presetClass="entr" presetSubtype="0" fill="hold" grpId="0" nodeType="withEffect">
+                                  <p:stCondLst>
+                                    <p:cond delay="0"/>
+                                  </p:stCondLst>
+                                  <p:childTnLst>
+                                    <p:set>
+                                      <p:cBhvr>
+                                        <p:cTn id="28" dur="1" fill="hold">
+                                          <p:stCondLst>
+                                            <p:cond delay="0"/>
+                                          </p:stCondLst>
+                                        </p:cTn>
+                                        <p:tgtEl>
+                                          <p:spTgt spid="32"/>
+                                        </p:tgtEl>
+                                        <p:attrNameLst>
+                                          <p:attrName>style.visibility</p:attrName>
+                                        </p:attrNameLst>
+                                      </p:cBhvr>
+                                      <p:to>
+                                        <p:strVal val="visible"/>
+                                      </p:to>
+                                    </p:set>
+                                  </p:childTnLst>
+                                </p:cTn>
+                              </p:par>
+                            </p:childTnLst>
+                          </p:cTn>
+                        </p:par>
+                      </p:childTnLst>
+                    </p:cTn>
+                  </p:par>
+                  <p:par>
+                    <p:cTn id="29" fill="hold">
+                      <p:stCondLst>
+                        <p:cond delay="indefinite"/>
+                      </p:stCondLst>
+                      <p:childTnLst>
+                        <p:par>
+                          <p:cTn id="30" fill="hold">
+                            <p:stCondLst>
+                              <p:cond delay="0"/>
+                            </p:stCondLst>
+                            <p:childTnLst>
+                              <p:par>
+                                <p:cTn id="31" presetID="1" presetClass="entr" presetSubtype="0" fill="hold" nodeType="clickEffect">
+                                  <p:stCondLst>
+                                    <p:cond delay="0"/>
+                                  </p:stCondLst>
+                                  <p:childTnLst>
+                                    <p:set>
+                                      <p:cBhvr>
+                                        <p:cTn id="32" dur="1" fill="hold">
+                                          <p:stCondLst>
+                                            <p:cond delay="0"/>
+                                          </p:stCondLst>
+                                        </p:cTn>
+                                        <p:tgtEl>
+                                          <p:spTgt spid="35"/>
+                                        </p:tgtEl>
+                                        <p:attrNameLst>
+                                          <p:attrName>style.visibility</p:attrName>
+                                        </p:attrNameLst>
+                                      </p:cBhvr>
+                                      <p:to>
+                                        <p:strVal val="visible"/>
+                                      </p:to>
+                                    </p:set>
+                                  </p:childTnLst>
+                                </p:cTn>
+                              </p:par>
+                              <p:par>
+                                <p:cTn id="33" presetID="1" presetClass="entr" presetSubtype="0" fill="hold" grpId="0" nodeType="withEffect">
+                                  <p:stCondLst>
+                                    <p:cond delay="0"/>
+                                  </p:stCondLst>
+                                  <p:childTnLst>
+                                    <p:set>
+                                      <p:cBhvr>
+                                        <p:cTn id="34" dur="1" fill="hold">
+                                          <p:stCondLst>
+                                            <p:cond delay="0"/>
+                                          </p:stCondLst>
+                                        </p:cTn>
+                                        <p:tgtEl>
+                                          <p:spTgt spid="34"/>
+                                        </p:tgtEl>
+                                        <p:attrNameLst>
+                                          <p:attrName>style.visibility</p:attrName>
+                                        </p:attrNameLst>
+                                      </p:cBhvr>
+                                      <p:to>
+                                        <p:strVal val="visible"/>
+                                      </p:to>
+                                    </p:set>
+                                  </p:childTnLst>
+                                </p:cTn>
+                              </p:par>
+                            </p:childTnLst>
+                          </p:cTn>
+                        </p:par>
+                      </p:childTnLst>
+                    </p:cTn>
+                  </p:par>
+                  <p:par>
+                    <p:cTn id="35" fill="hold">
+                      <p:stCondLst>
+                        <p:cond delay="indefinite"/>
+                      </p:stCondLst>
+                      <p:childTnLst>
+                        <p:par>
+                          <p:cTn id="36" fill="hold">
+                            <p:stCondLst>
+                              <p:cond delay="0"/>
+                            </p:stCondLst>
+                            <p:childTnLst>
+                              <p:par>
+                                <p:cTn id="37" presetID="1" presetClass="entr" presetSubtype="0" fill="hold" nodeType="clickEffect">
+                                  <p:stCondLst>
+                                    <p:cond delay="0"/>
+                                  </p:stCondLst>
+                                  <p:childTnLst>
+                                    <p:set>
+                                      <p:cBhvr>
+                                        <p:cTn id="38" dur="1" fill="hold">
+                                          <p:stCondLst>
+                                            <p:cond delay="0"/>
+                                          </p:stCondLst>
+                                        </p:cTn>
+                                        <p:tgtEl>
+                                          <p:spTgt spid="38"/>
+                                        </p:tgtEl>
+                                        <p:attrNameLst>
+                                          <p:attrName>style.visibility</p:attrName>
+                                        </p:attrNameLst>
+                                      </p:cBhvr>
+                                      <p:to>
+                                        <p:strVal val="visible"/>
+                                      </p:to>
+                                    </p:set>
+                                  </p:childTnLst>
+                                </p:cTn>
+                              </p:par>
+                            </p:childTnLst>
+                          </p:cTn>
+                        </p:par>
+                      </p:childTnLst>
+                    </p:cTn>
+                  </p:par>
+                  <p:par>
+                    <p:cTn id="39" fill="hold">
+                      <p:stCondLst>
+                        <p:cond delay="indefinite"/>
+                      </p:stCondLst>
+                      <p:childTnLst>
+                        <p:par>
+                          <p:cTn id="40" fill="hold">
+                            <p:stCondLst>
+                              <p:cond delay="0"/>
+                            </p:stCondLst>
+                            <p:childTnLst>
+                              <p:par>
+                                <p:cTn id="41" presetID="1" presetClass="entr" presetSubtype="0" fill="hold" nodeType="clickEffect">
+                                  <p:stCondLst>
+                                    <p:cond delay="0"/>
+                                  </p:stCondLst>
+                                  <p:childTnLst>
+                                    <p:set>
+                                      <p:cBhvr>
+                                        <p:cTn id="42" dur="1" fill="hold">
+                                          <p:stCondLst>
+                                            <p:cond delay="0"/>
+                                          </p:stCondLst>
+                                        </p:cTn>
+                                        <p:tgtEl>
+                                          <p:spTgt spid="57"/>
+                                        </p:tgtEl>
+                                        <p:attrNameLst>
+                                          <p:attrName>style.visibility</p:attrName>
+                                        </p:attrNameLst>
+                                      </p:cBhvr>
+                                      <p:to>
+                                        <p:strVal val="visible"/>
+                                      </p:to>
+                                    </p:set>
+                                  </p:childTnLst>
+                                </p:cTn>
+                              </p:par>
+                              <p:par>
+                                <p:cTn id="43" presetID="1" presetClass="entr" presetSubtype="0" fill="hold" grpId="0" nodeType="withEffect">
+                                  <p:stCondLst>
+                                    <p:cond delay="0"/>
+                                  </p:stCondLst>
+                                  <p:childTnLst>
+                                    <p:set>
+                                      <p:cBhvr>
+                                        <p:cTn id="44" dur="1" fill="hold">
+                                          <p:stCondLst>
+                                            <p:cond delay="0"/>
+                                          </p:stCondLst>
+                                        </p:cTn>
+                                        <p:tgtEl>
+                                          <p:spTgt spid="61"/>
+                                        </p:tgtEl>
+                                        <p:attrNameLst>
+                                          <p:attrName>style.visibility</p:attrName>
+                                        </p:attrNameLst>
+                                      </p:cBhvr>
+                                      <p:to>
+                                        <p:strVal val="visible"/>
+                                      </p:to>
+                                    </p:set>
+                                  </p:childTnLst>
+                                </p:cTn>
+                              </p:par>
+                            </p:childTnLst>
+                          </p:cTn>
+                        </p:par>
+                      </p:childTnLst>
+                    </p:cTn>
+                  </p:par>
+                  <p:par>
+                    <p:cTn id="45" fill="hold">
+                      <p:stCondLst>
+                        <p:cond delay="indefinite"/>
+                      </p:stCondLst>
+                      <p:childTnLst>
+                        <p:par>
+                          <p:cTn id="46" fill="hold">
+                            <p:stCondLst>
+                              <p:cond delay="0"/>
+                            </p:stCondLst>
+                            <p:childTnLst>
+                              <p:par>
+                                <p:cTn id="47" presetID="1" presetClass="entr" presetSubtype="0" fill="hold" nodeType="clickEffect">
+                                  <p:stCondLst>
+                                    <p:cond delay="0"/>
+                                  </p:stCondLst>
+                                  <p:childTnLst>
+                                    <p:set>
+                                      <p:cBhvr>
+                                        <p:cTn id="48" dur="1" fill="hold">
+                                          <p:stCondLst>
+                                            <p:cond delay="0"/>
+                                          </p:stCondLst>
+                                        </p:cTn>
+                                        <p:tgtEl>
+                                          <p:spTgt spid="70"/>
+                                        </p:tgtEl>
+                                        <p:attrNameLst>
+                                          <p:attrName>style.visibility</p:attrName>
+                                        </p:attrNameLst>
+                                      </p:cBhvr>
+                                      <p:to>
+                                        <p:strVal val="visible"/>
+                                      </p:to>
+                                    </p:set>
+                                  </p:childTnLst>
+                                </p:cTn>
+                              </p:par>
+                            </p:childTnLst>
+                          </p:cTn>
+                        </p:par>
+                      </p:childTnLst>
+                    </p:cTn>
+                  </p:par>
+                </p:childTnLst>
+              </p:cTn>
+              <p:prevCondLst>
+                <p:cond evt="onPrev" delay="0">
+                  <p:tgtEl>
+                    <p:sldTgt/>
+                  </p:tgtEl>
+                </p:cond>
+              </p:prevCondLst>
+              <p:nextCondLst>
+                <p:cond evt="onNext" delay="0">
+                  <p:tgtEl>
+                    <p:sldTgt/>
+                  </p:tgtEl>
+                </p:cond>
+              </p:nextCondLst>
+            </p:seq>
+          </p:childTnLst>
+        </p:cTn>
+      </p:par>
+    </p:tnLst>
+    <p:bldLst>
+      <p:bldP spid="13" grpId="0" animBg="1"/>
+      <p:bldP spid="9" grpId="0" animBg="1"/>
+      <p:bldP spid="32" grpId="0" animBg="1"/>
+      <p:bldP spid="34" grpId="0" animBg="1"/>
+      <p:bldP spid="61" grpId="0" animBg="1"/>
+    </p:bldLst>
+  </p:timing>
+</p:sld>
+</file>
+
+<file path=ppt/slides/slide12.xml><?xml version="1.0" encoding="utf-8"?>
+<p:sld xmlns:a="http://schemas.openxmlformats.org/drawingml/2006/main" xmlns:r="http://schemas.openxmlformats.org/officeDocument/2006/relationships" xmlns:p="http://schemas.openxmlformats.org/presentationml/2006/main">
+  <p:cSld>
+    <p:spTree>
+      <p:nvGrpSpPr>
+        <p:cNvPr id="1" name="">
+          <a:extLst>
+            <a:ext uri="{FF2B5EF4-FFF2-40B4-BE49-F238E27FC236}">
+              <a16:creationId xmlns:a16="http://schemas.microsoft.com/office/drawing/2014/main" id="{62B74999-8A21-1A3B-05C4-E73BA312418E}"/>
+            </a:ext>
+          </a:extLst>
+        </p:cNvPr>
+        <p:cNvGrpSpPr/>
+        <p:nvPr/>
+      </p:nvGrpSpPr>
+      <p:grpSpPr>
+        <a:xfrm>
+          <a:off x="0" y="0"/>
+          <a:ext cx="0" cy="0"/>
+          <a:chOff x="0" y="0"/>
+          <a:chExt cx="0" cy="0"/>
+        </a:xfrm>
+      </p:grpSpPr>
+      <p:sp>
+        <p:nvSpPr>
+          <p:cNvPr id="2" name="Titolo 1">
+            <a:extLst>
+              <a:ext uri="{FF2B5EF4-FFF2-40B4-BE49-F238E27FC236}">
+                <a16:creationId xmlns:a16="http://schemas.microsoft.com/office/drawing/2014/main" id="{B1971D7A-9463-3ECC-14AB-638EC3CD652B}"/>
+              </a:ext>
+            </a:extLst>
+          </p:cNvPr>
+          <p:cNvSpPr>
+            <a:spLocks noGrp="1"/>
+          </p:cNvSpPr>
+          <p:nvPr>
+            <p:ph type="title"/>
+          </p:nvPr>
+        </p:nvSpPr>
+        <p:spPr>
+          <a:xfrm>
+            <a:off x="677334" y="78713"/>
+            <a:ext cx="8596668" cy="1320800"/>
+          </a:xfrm>
+        </p:spPr>
+        <p:txBody>
+          <a:bodyPr/>
+          <a:lstStyle/>
+          <a:p>
+            <a:r>
+              <a:rPr lang="it-IT" dirty="0"/>
+              <a:t>Step 4: Driver test</a:t>
+            </a:r>
+          </a:p>
+        </p:txBody>
+      </p:sp>
+      <p:sp>
+        <p:nvSpPr>
+          <p:cNvPr id="3" name="Segnaposto contenuto 2">
+            <a:extLst>
+              <a:ext uri="{FF2B5EF4-FFF2-40B4-BE49-F238E27FC236}">
+                <a16:creationId xmlns:a16="http://schemas.microsoft.com/office/drawing/2014/main" id="{32BD1FEC-DCC7-4403-BFAB-39385A08C0F1}"/>
+              </a:ext>
+            </a:extLst>
+          </p:cNvPr>
+          <p:cNvSpPr>
+            <a:spLocks noGrp="1"/>
+          </p:cNvSpPr>
+          <p:nvPr>
+            <p:ph idx="1"/>
+          </p:nvPr>
+        </p:nvSpPr>
+        <p:spPr>
+          <a:xfrm>
+            <a:off x="384438" y="832366"/>
+            <a:ext cx="8889564" cy="4676906"/>
+          </a:xfrm>
+        </p:spPr>
+        <p:txBody>
+          <a:bodyPr/>
+          <a:lstStyle/>
+          <a:p>
+            <a:pPr marL="0" indent="0">
+              <a:buNone/>
+            </a:pPr>
+            <a:r>
+              <a:rPr lang="it-IT" b="1" i="1" dirty="0"/>
+              <a:t>Return </a:t>
+            </a:r>
+            <a:r>
+              <a:rPr lang="it-IT" b="1" i="1" dirty="0" err="1"/>
+              <a:t>path</a:t>
+            </a:r>
+            <a:endParaRPr lang="it-IT" b="1" i="1" dirty="0"/>
+          </a:p>
+        </p:txBody>
+      </p:sp>
+      <p:pic>
+        <p:nvPicPr>
+          <p:cNvPr id="5" name="Immagine 4">
+            <a:extLst>
+              <a:ext uri="{FF2B5EF4-FFF2-40B4-BE49-F238E27FC236}">
+                <a16:creationId xmlns:a16="http://schemas.microsoft.com/office/drawing/2014/main" id="{67093E6C-F48C-8A4C-DAB3-27B8EA33DB79}"/>
+              </a:ext>
+            </a:extLst>
+          </p:cNvPr>
+          <p:cNvPicPr>
+            <a:picLocks noChangeAspect="1"/>
+          </p:cNvPicPr>
+          <p:nvPr/>
+        </p:nvPicPr>
+        <p:blipFill>
+          <a:blip r:embed="rId3"/>
+          <a:stretch>
+            <a:fillRect/>
+          </a:stretch>
+        </p:blipFill>
+        <p:spPr>
+          <a:xfrm>
+            <a:off x="398725" y="1826066"/>
+            <a:ext cx="6009216" cy="4219129"/>
+          </a:xfrm>
+          <a:prstGeom prst="rect">
+            <a:avLst/>
+          </a:prstGeom>
+        </p:spPr>
+      </p:pic>
+      <p:sp>
+        <p:nvSpPr>
+          <p:cNvPr id="4" name="Rettangolo 3">
+            <a:extLst>
+              <a:ext uri="{FF2B5EF4-FFF2-40B4-BE49-F238E27FC236}">
+                <a16:creationId xmlns:a16="http://schemas.microsoft.com/office/drawing/2014/main" id="{1486C8E5-4371-17FA-B47F-0B4358784872}"/>
+              </a:ext>
+            </a:extLst>
+          </p:cNvPr>
+          <p:cNvSpPr/>
+          <p:nvPr/>
+        </p:nvSpPr>
+        <p:spPr>
+          <a:xfrm>
+            <a:off x="6500812" y="5699859"/>
+            <a:ext cx="2250281" cy="962963"/>
+          </a:xfrm>
+          <a:prstGeom prst="rect">
+            <a:avLst/>
+          </a:prstGeom>
+          <a:solidFill>
+            <a:srgbClr val="E8E7FF"/>
+          </a:solidFill>
+          <a:ln>
+            <a:solidFill>
+              <a:schemeClr val="tx1"/>
+            </a:solidFill>
+          </a:ln>
+        </p:spPr>
+        <p:style>
+          <a:lnRef idx="2">
+            <a:schemeClr val="accent1">
+              <a:shade val="15000"/>
+            </a:schemeClr>
+          </a:lnRef>
+          <a:fillRef idx="1">
+            <a:schemeClr val="accent1"/>
+          </a:fillRef>
+          <a:effectRef idx="0">
+            <a:schemeClr val="accent1"/>
+          </a:effectRef>
+          <a:fontRef idx="minor">
+            <a:schemeClr val="lt1"/>
+          </a:fontRef>
+        </p:style>
+        <p:txBody>
+          <a:bodyPr rtlCol="0" anchor="ctr"/>
+          <a:lstStyle/>
+          <a:p>
+            <a:pPr algn="ctr"/>
+            <a:r>
+              <a:rPr lang="it-IT" dirty="0">
+                <a:solidFill>
+                  <a:schemeClr val="tx1"/>
+                </a:solidFill>
+              </a:rPr>
+              <a:t>Hardware </a:t>
+            </a:r>
+            <a:r>
+              <a:rPr lang="it-IT" dirty="0" err="1">
+                <a:solidFill>
+                  <a:schemeClr val="tx1"/>
+                </a:solidFill>
+              </a:rPr>
+              <a:t>executes</a:t>
+            </a:r>
+            <a:r>
+              <a:rPr lang="it-IT" dirty="0">
+                <a:solidFill>
+                  <a:schemeClr val="tx1"/>
+                </a:solidFill>
+              </a:rPr>
+              <a:t> </a:t>
+            </a:r>
+            <a:r>
+              <a:rPr lang="it-IT" dirty="0" err="1">
+                <a:solidFill>
+                  <a:schemeClr val="tx1"/>
+                </a:solidFill>
+              </a:rPr>
+              <a:t>operation</a:t>
+            </a:r>
+            <a:endParaRPr lang="it-IT" dirty="0">
+              <a:solidFill>
+                <a:schemeClr val="tx1"/>
+              </a:solidFill>
+            </a:endParaRPr>
+          </a:p>
+        </p:txBody>
+      </p:sp>
+      <p:cxnSp>
+        <p:nvCxnSpPr>
+          <p:cNvPr id="7" name="Connettore curvo 6">
+            <a:extLst>
+              <a:ext uri="{FF2B5EF4-FFF2-40B4-BE49-F238E27FC236}">
+                <a16:creationId xmlns:a16="http://schemas.microsoft.com/office/drawing/2014/main" id="{D2D86D8C-BF67-3F5C-014A-A8E2D3A0C619}"/>
+              </a:ext>
+            </a:extLst>
+          </p:cNvPr>
+          <p:cNvCxnSpPr>
+            <a:stCxn id="5" idx="2"/>
+            <a:endCxn id="4" idx="1"/>
+          </p:cNvCxnSpPr>
+          <p:nvPr/>
+        </p:nvCxnSpPr>
+        <p:spPr>
+          <a:xfrm rot="16200000" flipH="1">
+            <a:off x="4883999" y="4564528"/>
+            <a:ext cx="136146" cy="3097479"/>
+          </a:xfrm>
+          <a:prstGeom prst="curvedConnector2">
+            <a:avLst/>
+          </a:prstGeom>
+          <a:ln>
+            <a:solidFill>
+              <a:srgbClr val="00B0F0"/>
+            </a:solidFill>
+            <a:tailEnd type="triangle"/>
+          </a:ln>
+        </p:spPr>
+        <p:style>
+          <a:lnRef idx="3">
+            <a:schemeClr val="accent1"/>
+          </a:lnRef>
+          <a:fillRef idx="0">
+            <a:schemeClr val="accent1"/>
+          </a:fillRef>
+          <a:effectRef idx="2">
+            <a:schemeClr val="accent1"/>
+          </a:effectRef>
+          <a:fontRef idx="minor">
+            <a:schemeClr val="tx1"/>
+          </a:fontRef>
+        </p:style>
+      </p:cxnSp>
+      <p:cxnSp>
+        <p:nvCxnSpPr>
+          <p:cNvPr id="8" name="Connettore curvo 7">
+            <a:extLst>
+              <a:ext uri="{FF2B5EF4-FFF2-40B4-BE49-F238E27FC236}">
+                <a16:creationId xmlns:a16="http://schemas.microsoft.com/office/drawing/2014/main" id="{EA7FA27B-9E20-0AE1-FC04-F9F549C3A465}"/>
+              </a:ext>
+            </a:extLst>
+          </p:cNvPr>
+          <p:cNvCxnSpPr>
+            <a:cxnSpLocks/>
+            <a:stCxn id="4" idx="0"/>
+          </p:cNvCxnSpPr>
+          <p:nvPr/>
+        </p:nvCxnSpPr>
+        <p:spPr>
+          <a:xfrm rot="16200000" flipV="1">
+            <a:off x="6027967" y="4101872"/>
+            <a:ext cx="777815" cy="2418159"/>
+          </a:xfrm>
+          <a:prstGeom prst="curvedConnector2">
+            <a:avLst/>
+          </a:prstGeom>
+          <a:ln>
+            <a:solidFill>
+              <a:srgbClr val="00B0F0"/>
+            </a:solidFill>
+            <a:tailEnd type="triangle"/>
+          </a:ln>
+        </p:spPr>
+        <p:style>
+          <a:lnRef idx="3">
+            <a:schemeClr val="accent1"/>
+          </a:lnRef>
+          <a:fillRef idx="0">
+            <a:schemeClr val="accent1"/>
+          </a:fillRef>
+          <a:effectRef idx="2">
+            <a:schemeClr val="accent1"/>
+          </a:effectRef>
+          <a:fontRef idx="minor">
+            <a:schemeClr val="tx1"/>
+          </a:fontRef>
+        </p:style>
+      </p:cxnSp>
+      <p:cxnSp>
+        <p:nvCxnSpPr>
+          <p:cNvPr id="16" name="Connettore curvo 15">
+            <a:extLst>
+              <a:ext uri="{FF2B5EF4-FFF2-40B4-BE49-F238E27FC236}">
+                <a16:creationId xmlns:a16="http://schemas.microsoft.com/office/drawing/2014/main" id="{11EA8A22-6E27-C2F3-EB76-B9E707B74FD5}"/>
+              </a:ext>
+            </a:extLst>
+          </p:cNvPr>
+          <p:cNvCxnSpPr>
+            <a:cxnSpLocks/>
+            <a:endCxn id="19" idx="1"/>
+          </p:cNvCxnSpPr>
+          <p:nvPr/>
+        </p:nvCxnSpPr>
+        <p:spPr>
+          <a:xfrm flipV="1">
+            <a:off x="5207797" y="4638755"/>
+            <a:ext cx="1607341" cy="119923"/>
+          </a:xfrm>
+          <a:prstGeom prst="curvedConnector3">
+            <a:avLst>
+              <a:gd name="adj1" fmla="val 50000"/>
+            </a:avLst>
+          </a:prstGeom>
+          <a:ln>
+            <a:solidFill>
+              <a:srgbClr val="00B0F0"/>
+            </a:solidFill>
+            <a:tailEnd type="triangle"/>
+          </a:ln>
+        </p:spPr>
+        <p:style>
+          <a:lnRef idx="3">
+            <a:schemeClr val="accent1"/>
+          </a:lnRef>
+          <a:fillRef idx="0">
+            <a:schemeClr val="accent1"/>
+          </a:fillRef>
+          <a:effectRef idx="2">
+            <a:schemeClr val="accent1"/>
+          </a:effectRef>
+          <a:fontRef idx="minor">
+            <a:schemeClr val="tx1"/>
+          </a:fontRef>
+        </p:style>
+      </p:cxnSp>
+      <p:sp>
+        <p:nvSpPr>
+          <p:cNvPr id="19" name="Rettangolo 18">
+            <a:extLst>
+              <a:ext uri="{FF2B5EF4-FFF2-40B4-BE49-F238E27FC236}">
+                <a16:creationId xmlns:a16="http://schemas.microsoft.com/office/drawing/2014/main" id="{5082166A-78AC-9EC9-FC09-A31D671CA852}"/>
+              </a:ext>
+            </a:extLst>
+          </p:cNvPr>
+          <p:cNvSpPr/>
+          <p:nvPr/>
+        </p:nvSpPr>
+        <p:spPr>
+          <a:xfrm>
+            <a:off x="6815138" y="4300538"/>
+            <a:ext cx="2250281" cy="676433"/>
+          </a:xfrm>
+          <a:prstGeom prst="rect">
+            <a:avLst/>
+          </a:prstGeom>
+          <a:solidFill>
+            <a:srgbClr val="E8E7FF"/>
+          </a:solidFill>
+          <a:ln>
+            <a:solidFill>
+              <a:schemeClr val="tx1"/>
+            </a:solidFill>
+          </a:ln>
+        </p:spPr>
+        <p:style>
+          <a:lnRef idx="2">
+            <a:schemeClr val="accent1">
+              <a:shade val="15000"/>
+            </a:schemeClr>
+          </a:lnRef>
+          <a:fillRef idx="1">
+            <a:schemeClr val="accent1"/>
+          </a:fillRef>
+          <a:effectRef idx="0">
+            <a:schemeClr val="accent1"/>
+          </a:effectRef>
+          <a:fontRef idx="minor">
+            <a:schemeClr val="lt1"/>
+          </a:fontRef>
+        </p:style>
+        <p:txBody>
+          <a:bodyPr rtlCol="0" anchor="ctr"/>
+          <a:lstStyle/>
+          <a:p>
+            <a:pPr algn="ctr"/>
+            <a:r>
+              <a:rPr lang="it-IT" dirty="0">
+                <a:solidFill>
+                  <a:schemeClr val="tx1"/>
+                </a:solidFill>
+              </a:rPr>
+              <a:t>Driver </a:t>
+            </a:r>
+            <a:r>
+              <a:rPr lang="it-IT" dirty="0" err="1">
+                <a:solidFill>
+                  <a:schemeClr val="tx1"/>
+                </a:solidFill>
+              </a:rPr>
+              <a:t>sends</a:t>
+            </a:r>
+            <a:r>
+              <a:rPr lang="it-IT" dirty="0">
+                <a:solidFill>
+                  <a:schemeClr val="tx1"/>
+                </a:solidFill>
+              </a:rPr>
+              <a:t> </a:t>
+            </a:r>
+            <a:r>
+              <a:rPr lang="it-IT" dirty="0" err="1">
+                <a:solidFill>
+                  <a:schemeClr val="tx1"/>
+                </a:solidFill>
+              </a:rPr>
+              <a:t>result</a:t>
+            </a:r>
+            <a:r>
+              <a:rPr lang="it-IT" dirty="0">
+                <a:solidFill>
+                  <a:schemeClr val="tx1"/>
+                </a:solidFill>
+              </a:rPr>
+              <a:t> back to the kernel</a:t>
+            </a:r>
+          </a:p>
+        </p:txBody>
+      </p:sp>
+      <p:cxnSp>
+        <p:nvCxnSpPr>
+          <p:cNvPr id="22" name="Connettore curvo 21">
+            <a:extLst>
+              <a:ext uri="{FF2B5EF4-FFF2-40B4-BE49-F238E27FC236}">
+                <a16:creationId xmlns:a16="http://schemas.microsoft.com/office/drawing/2014/main" id="{58E051B9-5DD0-39B4-C493-0BEBB3E38CB2}"/>
+              </a:ext>
+            </a:extLst>
+          </p:cNvPr>
+          <p:cNvCxnSpPr>
+            <a:cxnSpLocks/>
+            <a:stCxn id="19" idx="0"/>
+          </p:cNvCxnSpPr>
+          <p:nvPr/>
+        </p:nvCxnSpPr>
+        <p:spPr>
+          <a:xfrm rot="16200000" flipV="1">
+            <a:off x="6381314" y="2741572"/>
+            <a:ext cx="422952" cy="2694979"/>
+          </a:xfrm>
+          <a:prstGeom prst="curvedConnector2">
+            <a:avLst/>
+          </a:prstGeom>
+          <a:ln>
+            <a:solidFill>
+              <a:srgbClr val="00B0F0"/>
+            </a:solidFill>
+            <a:tailEnd type="triangle"/>
+          </a:ln>
+        </p:spPr>
+        <p:style>
+          <a:lnRef idx="3">
+            <a:schemeClr val="accent1"/>
+          </a:lnRef>
+          <a:fillRef idx="0">
+            <a:schemeClr val="accent1"/>
+          </a:fillRef>
+          <a:effectRef idx="2">
+            <a:schemeClr val="accent1"/>
+          </a:effectRef>
+          <a:fontRef idx="minor">
+            <a:schemeClr val="tx1"/>
+          </a:fontRef>
+        </p:style>
+      </p:cxnSp>
+      <p:cxnSp>
+        <p:nvCxnSpPr>
+          <p:cNvPr id="28" name="Connettore curvo 27">
+            <a:extLst>
+              <a:ext uri="{FF2B5EF4-FFF2-40B4-BE49-F238E27FC236}">
+                <a16:creationId xmlns:a16="http://schemas.microsoft.com/office/drawing/2014/main" id="{DB411E6A-C825-AB33-A1EC-0ED5046A02CD}"/>
+              </a:ext>
+            </a:extLst>
+          </p:cNvPr>
+          <p:cNvCxnSpPr>
+            <a:cxnSpLocks/>
+            <a:endCxn id="31" idx="1"/>
+          </p:cNvCxnSpPr>
+          <p:nvPr/>
+        </p:nvCxnSpPr>
+        <p:spPr>
+          <a:xfrm flipV="1">
+            <a:off x="5232799" y="3412356"/>
+            <a:ext cx="1532332" cy="329083"/>
+          </a:xfrm>
+          <a:prstGeom prst="curvedConnector3">
+            <a:avLst>
+              <a:gd name="adj1" fmla="val 50000"/>
+            </a:avLst>
+          </a:prstGeom>
+          <a:ln>
+            <a:solidFill>
+              <a:srgbClr val="00B0F0"/>
+            </a:solidFill>
+            <a:tailEnd type="triangle"/>
+          </a:ln>
+        </p:spPr>
+        <p:style>
+          <a:lnRef idx="3">
+            <a:schemeClr val="accent1"/>
+          </a:lnRef>
+          <a:fillRef idx="0">
+            <a:schemeClr val="accent1"/>
+          </a:fillRef>
+          <a:effectRef idx="2">
+            <a:schemeClr val="accent1"/>
+          </a:effectRef>
+          <a:fontRef idx="minor">
+            <a:schemeClr val="tx1"/>
+          </a:fontRef>
+        </p:style>
+      </p:cxnSp>
+      <p:sp>
+        <p:nvSpPr>
+          <p:cNvPr id="31" name="Rettangolo 30">
+            <a:extLst>
+              <a:ext uri="{FF2B5EF4-FFF2-40B4-BE49-F238E27FC236}">
+                <a16:creationId xmlns:a16="http://schemas.microsoft.com/office/drawing/2014/main" id="{084A1ED7-5D31-0377-A052-17C026095D51}"/>
+              </a:ext>
+            </a:extLst>
+          </p:cNvPr>
+          <p:cNvSpPr/>
+          <p:nvPr/>
+        </p:nvSpPr>
+        <p:spPr>
+          <a:xfrm>
+            <a:off x="6765131" y="3074139"/>
+            <a:ext cx="2250281" cy="676433"/>
+          </a:xfrm>
+          <a:prstGeom prst="rect">
+            <a:avLst/>
+          </a:prstGeom>
+          <a:solidFill>
+            <a:srgbClr val="E8E7FF"/>
+          </a:solidFill>
+          <a:ln>
+            <a:solidFill>
+              <a:schemeClr val="tx1"/>
+            </a:solidFill>
+          </a:ln>
+        </p:spPr>
+        <p:style>
+          <a:lnRef idx="2">
+            <a:schemeClr val="accent1">
+              <a:shade val="15000"/>
+            </a:schemeClr>
+          </a:lnRef>
+          <a:fillRef idx="1">
+            <a:schemeClr val="accent1"/>
+          </a:fillRef>
+          <a:effectRef idx="0">
+            <a:schemeClr val="accent1"/>
+          </a:effectRef>
+          <a:fontRef idx="minor">
+            <a:schemeClr val="lt1"/>
+          </a:fontRef>
+        </p:style>
+        <p:txBody>
+          <a:bodyPr rtlCol="0" anchor="ctr"/>
+          <a:lstStyle/>
+          <a:p>
+            <a:pPr algn="ctr"/>
+            <a:r>
+              <a:rPr lang="it-IT" b="1" i="1" dirty="0" err="1">
+                <a:solidFill>
+                  <a:schemeClr val="tx1"/>
+                </a:solidFill>
+              </a:rPr>
+              <a:t>ioctl</a:t>
+            </a:r>
+            <a:r>
+              <a:rPr lang="it-IT" dirty="0">
+                <a:solidFill>
+                  <a:schemeClr val="tx1"/>
+                </a:solidFill>
+              </a:rPr>
+              <a:t> </a:t>
+            </a:r>
+            <a:r>
+              <a:rPr lang="it-IT" dirty="0" err="1">
+                <a:solidFill>
+                  <a:schemeClr val="tx1"/>
+                </a:solidFill>
+              </a:rPr>
+              <a:t>returns</a:t>
+            </a:r>
+            <a:r>
+              <a:rPr lang="it-IT" dirty="0">
+                <a:solidFill>
+                  <a:schemeClr val="tx1"/>
+                </a:solidFill>
+              </a:rPr>
+              <a:t> </a:t>
+            </a:r>
+            <a:r>
+              <a:rPr lang="it-IT" dirty="0" err="1">
+                <a:solidFill>
+                  <a:schemeClr val="tx1"/>
+                </a:solidFill>
+              </a:rPr>
+              <a:t>requested</a:t>
+            </a:r>
+            <a:r>
+              <a:rPr lang="it-IT" dirty="0">
+                <a:solidFill>
+                  <a:schemeClr val="tx1"/>
+                </a:solidFill>
+              </a:rPr>
+              <a:t> </a:t>
+            </a:r>
+            <a:r>
+              <a:rPr lang="it-IT" dirty="0" err="1">
+                <a:solidFill>
+                  <a:schemeClr val="tx1"/>
+                </a:solidFill>
+              </a:rPr>
+              <a:t>value</a:t>
+            </a:r>
+            <a:endParaRPr lang="it-IT" dirty="0">
+              <a:solidFill>
+                <a:schemeClr val="tx1"/>
+              </a:solidFill>
+            </a:endParaRPr>
+          </a:p>
+        </p:txBody>
+      </p:sp>
+      <p:cxnSp>
+        <p:nvCxnSpPr>
+          <p:cNvPr id="39" name="Connettore curvo 38">
+            <a:extLst>
+              <a:ext uri="{FF2B5EF4-FFF2-40B4-BE49-F238E27FC236}">
+                <a16:creationId xmlns:a16="http://schemas.microsoft.com/office/drawing/2014/main" id="{32E71CCB-C0AD-D892-D509-039993B326F6}"/>
+              </a:ext>
+            </a:extLst>
+          </p:cNvPr>
+          <p:cNvCxnSpPr>
+            <a:cxnSpLocks/>
+            <a:stCxn id="31" idx="0"/>
+          </p:cNvCxnSpPr>
+          <p:nvPr/>
+        </p:nvCxnSpPr>
+        <p:spPr>
+          <a:xfrm rot="16200000" flipV="1">
+            <a:off x="6496154" y="1680021"/>
+            <a:ext cx="143264" cy="2644972"/>
+          </a:xfrm>
+          <a:prstGeom prst="curvedConnector2">
+            <a:avLst/>
+          </a:prstGeom>
+          <a:ln>
+            <a:solidFill>
+              <a:srgbClr val="00B0F0"/>
+            </a:solidFill>
+            <a:tailEnd type="triangle"/>
+          </a:ln>
+        </p:spPr>
+        <p:style>
+          <a:lnRef idx="3">
+            <a:schemeClr val="accent1"/>
+          </a:lnRef>
+          <a:fillRef idx="0">
+            <a:schemeClr val="accent1"/>
+          </a:fillRef>
+          <a:effectRef idx="2">
+            <a:schemeClr val="accent1"/>
+          </a:effectRef>
+          <a:fontRef idx="minor">
+            <a:schemeClr val="tx1"/>
+          </a:fontRef>
+        </p:style>
+      </p:cxnSp>
+      <p:cxnSp>
+        <p:nvCxnSpPr>
+          <p:cNvPr id="43" name="Connettore curvo 42">
+            <a:extLst>
+              <a:ext uri="{FF2B5EF4-FFF2-40B4-BE49-F238E27FC236}">
+                <a16:creationId xmlns:a16="http://schemas.microsoft.com/office/drawing/2014/main" id="{3C536E4D-8B97-1966-3C5C-0AB5DEDF155D}"/>
+              </a:ext>
+            </a:extLst>
+          </p:cNvPr>
+          <p:cNvCxnSpPr>
+            <a:cxnSpLocks/>
+          </p:cNvCxnSpPr>
+          <p:nvPr/>
+        </p:nvCxnSpPr>
+        <p:spPr>
+          <a:xfrm rot="5400000" flipH="1" flipV="1">
+            <a:off x="4791349" y="2643136"/>
+            <a:ext cx="321448" cy="2"/>
+          </a:xfrm>
+          <a:prstGeom prst="curvedConnector3">
+            <a:avLst>
+              <a:gd name="adj1" fmla="val 50000"/>
+            </a:avLst>
+          </a:prstGeom>
+          <a:ln>
+            <a:solidFill>
+              <a:srgbClr val="00B0F0"/>
+            </a:solidFill>
+            <a:tailEnd type="triangle"/>
+          </a:ln>
+        </p:spPr>
+        <p:style>
+          <a:lnRef idx="3">
+            <a:schemeClr val="accent1"/>
+          </a:lnRef>
+          <a:fillRef idx="0">
+            <a:schemeClr val="accent1"/>
+          </a:fillRef>
+          <a:effectRef idx="2">
+            <a:schemeClr val="accent1"/>
+          </a:effectRef>
+          <a:fontRef idx="minor">
+            <a:schemeClr val="tx1"/>
+          </a:fontRef>
+        </p:style>
+      </p:cxnSp>
+      <p:sp>
+        <p:nvSpPr>
+          <p:cNvPr id="50" name="Rettangolo 49">
+            <a:extLst>
+              <a:ext uri="{FF2B5EF4-FFF2-40B4-BE49-F238E27FC236}">
+                <a16:creationId xmlns:a16="http://schemas.microsoft.com/office/drawing/2014/main" id="{96414208-A628-0932-B9FA-07C4352DDABA}"/>
+              </a:ext>
+            </a:extLst>
+          </p:cNvPr>
+          <p:cNvSpPr/>
+          <p:nvPr/>
+        </p:nvSpPr>
+        <p:spPr>
+          <a:xfrm>
+            <a:off x="6815138" y="754392"/>
+            <a:ext cx="2250281" cy="676433"/>
+          </a:xfrm>
+          <a:prstGeom prst="rect">
+            <a:avLst/>
+          </a:prstGeom>
+          <a:solidFill>
+            <a:srgbClr val="E8E7FF"/>
+          </a:solidFill>
+          <a:ln>
+            <a:solidFill>
+              <a:schemeClr val="tx1"/>
+            </a:solidFill>
+          </a:ln>
+        </p:spPr>
+        <p:style>
+          <a:lnRef idx="2">
+            <a:schemeClr val="accent1">
+              <a:shade val="15000"/>
+            </a:schemeClr>
+          </a:lnRef>
+          <a:fillRef idx="1">
+            <a:schemeClr val="accent1"/>
+          </a:fillRef>
+          <a:effectRef idx="0">
+            <a:schemeClr val="accent1"/>
+          </a:effectRef>
+          <a:fontRef idx="minor">
+            <a:schemeClr val="lt1"/>
+          </a:fontRef>
+        </p:style>
+        <p:txBody>
+          <a:bodyPr rtlCol="0" anchor="ctr"/>
+          <a:lstStyle/>
+          <a:p>
+            <a:pPr algn="ctr"/>
+            <a:r>
+              <a:rPr lang="it-IT" dirty="0">
+                <a:solidFill>
+                  <a:schemeClr val="tx1"/>
+                </a:solidFill>
+              </a:rPr>
+              <a:t>Value </a:t>
+            </a:r>
+            <a:r>
+              <a:rPr lang="it-IT" dirty="0" err="1">
+                <a:solidFill>
+                  <a:schemeClr val="tx1"/>
+                </a:solidFill>
+              </a:rPr>
+              <a:t>is</a:t>
+            </a:r>
+            <a:r>
+              <a:rPr lang="it-IT" dirty="0">
+                <a:solidFill>
+                  <a:schemeClr val="tx1"/>
+                </a:solidFill>
+              </a:rPr>
+              <a:t> </a:t>
+            </a:r>
+            <a:r>
+              <a:rPr lang="it-IT" dirty="0" err="1">
+                <a:solidFill>
+                  <a:schemeClr val="tx1"/>
+                </a:solidFill>
+              </a:rPr>
+              <a:t>returned</a:t>
+            </a:r>
+            <a:r>
+              <a:rPr lang="it-IT" dirty="0">
+                <a:solidFill>
+                  <a:schemeClr val="tx1"/>
+                </a:solidFill>
+              </a:rPr>
+              <a:t> to </a:t>
+            </a:r>
+            <a:r>
+              <a:rPr lang="it-IT" dirty="0" err="1">
+                <a:solidFill>
+                  <a:schemeClr val="tx1"/>
+                </a:solidFill>
+              </a:rPr>
+              <a:t>userspace</a:t>
+            </a:r>
+            <a:endParaRPr lang="it-IT" dirty="0">
+              <a:solidFill>
+                <a:schemeClr val="tx1"/>
+              </a:solidFill>
+            </a:endParaRPr>
+          </a:p>
+        </p:txBody>
+      </p:sp>
+      <p:cxnSp>
+        <p:nvCxnSpPr>
+          <p:cNvPr id="53" name="Connettore curvo 52">
+            <a:extLst>
+              <a:ext uri="{FF2B5EF4-FFF2-40B4-BE49-F238E27FC236}">
+                <a16:creationId xmlns:a16="http://schemas.microsoft.com/office/drawing/2014/main" id="{506911F5-E709-1FE2-DFC5-24D5D14E3697}"/>
+              </a:ext>
+            </a:extLst>
+          </p:cNvPr>
+          <p:cNvCxnSpPr>
+            <a:cxnSpLocks/>
+            <a:endCxn id="50" idx="2"/>
+          </p:cNvCxnSpPr>
+          <p:nvPr/>
+        </p:nvCxnSpPr>
+        <p:spPr>
+          <a:xfrm flipV="1">
+            <a:off x="5232796" y="1430825"/>
+            <a:ext cx="2707483" cy="675679"/>
+          </a:xfrm>
+          <a:prstGeom prst="curvedConnector2">
+            <a:avLst/>
+          </a:prstGeom>
+          <a:ln>
+            <a:tailEnd type="triangle"/>
+          </a:ln>
+        </p:spPr>
+        <p:style>
+          <a:lnRef idx="1">
+            <a:schemeClr val="dk1"/>
+          </a:lnRef>
+          <a:fillRef idx="0">
+            <a:schemeClr val="dk1"/>
+          </a:fillRef>
+          <a:effectRef idx="0">
+            <a:schemeClr val="dk1"/>
+          </a:effectRef>
+          <a:fontRef idx="minor">
+            <a:schemeClr val="tx1"/>
+          </a:fontRef>
+        </p:style>
+      </p:cxnSp>
+    </p:spTree>
+    <p:extLst>
+      <p:ext uri="{BB962C8B-B14F-4D97-AF65-F5344CB8AC3E}">
+        <p14:creationId xmlns:p14="http://schemas.microsoft.com/office/powerpoint/2010/main" val="1164970555"/>
+      </p:ext>
+    </p:extLst>
+  </p:cSld>
+  <p:clrMapOvr>
+    <a:masterClrMapping/>
+  </p:clrMapOvr>
+  <p:timing>
+    <p:tnLst>
+      <p:par>
+        <p:cTn id="1" dur="indefinite" restart="never" nodeType="tmRoot">
+          <p:childTnLst>
+            <p:seq concurrent="1" nextAc="seek">
+              <p:cTn id="2" dur="indefinite" nodeType="mainSeq">
+                <p:childTnLst>
+                  <p:par>
+                    <p:cTn id="3" fill="hold">
+                      <p:stCondLst>
+                        <p:cond delay="indefinite"/>
+                        <p:cond evt="onBegin" delay="0">
+                          <p:tn val="2"/>
+                        </p:cond>
+                      </p:stCondLst>
+                      <p:childTnLst>
+                        <p:par>
+                          <p:cTn id="4" fill="hold">
+                            <p:stCondLst>
+                              <p:cond delay="0"/>
+                            </p:stCondLst>
+                            <p:childTnLst>
+                              <p:par>
+                                <p:cTn id="5" presetID="1" presetClass="entr" presetSubtype="0" fill="hold" grpId="0" nodeType="withEffect">
+                                  <p:stCondLst>
+                                    <p:cond delay="0"/>
+                                  </p:stCondLst>
+                                  <p:childTnLst>
+                                    <p:set>
+                                      <p:cBhvr>
+                                        <p:cTn id="6" dur="1" fill="hold">
+                                          <p:stCondLst>
+                                            <p:cond delay="0"/>
+                                          </p:stCondLst>
+                                        </p:cTn>
+                                        <p:tgtEl>
+                                          <p:spTgt spid="4"/>
+                                        </p:tgtEl>
+                                        <p:attrNameLst>
+                                          <p:attrName>style.visibility</p:attrName>
+                                        </p:attrNameLst>
+                                      </p:cBhvr>
+                                      <p:to>
+                                        <p:strVal val="visible"/>
+                                      </p:to>
+                                    </p:set>
+                                  </p:childTnLst>
+                                </p:cTn>
+                              </p:par>
+                            </p:childTnLst>
+                          </p:cTn>
+                        </p:par>
+                      </p:childTnLst>
+                    </p:cTn>
+                  </p:par>
+                  <p:par>
+                    <p:cTn id="7" fill="hold">
+                      <p:stCondLst>
+                        <p:cond delay="indefinite"/>
+                      </p:stCondLst>
+                      <p:childTnLst>
+                        <p:par>
+                          <p:cTn id="8" fill="hold">
+                            <p:stCondLst>
+                              <p:cond delay="0"/>
+                            </p:stCondLst>
+                            <p:childTnLst>
+                              <p:par>
+                                <p:cTn id="9" presetID="1" presetClass="entr" presetSubtype="0" fill="hold" nodeType="clickEffect">
+                                  <p:stCondLst>
+                                    <p:cond delay="0"/>
+                                  </p:stCondLst>
+                                  <p:childTnLst>
+                                    <p:set>
+                                      <p:cBhvr>
+                                        <p:cTn id="10" dur="1" fill="hold">
+                                          <p:stCondLst>
+                                            <p:cond delay="0"/>
+                                          </p:stCondLst>
+                                        </p:cTn>
+                                        <p:tgtEl>
+                                          <p:spTgt spid="8"/>
+                                        </p:tgtEl>
+                                        <p:attrNameLst>
+                                          <p:attrName>style.visibility</p:attrName>
+                                        </p:attrNameLst>
+                                      </p:cBhvr>
+                                      <p:to>
+                                        <p:strVal val="visible"/>
+                                      </p:to>
+                                    </p:set>
+                                  </p:childTnLst>
+                                </p:cTn>
+                              </p:par>
+                            </p:childTnLst>
+                          </p:cTn>
+                        </p:par>
+                      </p:childTnLst>
+                    </p:cTn>
+                  </p:par>
+                  <p:par>
+                    <p:cTn id="11" fill="hold">
+                      <p:stCondLst>
+                        <p:cond delay="indefinite"/>
+                      </p:stCondLst>
+                      <p:childTnLst>
+                        <p:par>
+                          <p:cTn id="12" fill="hold">
+                            <p:stCondLst>
+                              <p:cond delay="0"/>
+                            </p:stCondLst>
+                            <p:childTnLst>
+                              <p:par>
+                                <p:cTn id="13" presetID="1" presetClass="entr" presetSubtype="0" fill="hold" grpId="0" nodeType="clickEffect">
+                                  <p:stCondLst>
+                                    <p:cond delay="0"/>
+                                  </p:stCondLst>
+                                  <p:childTnLst>
+                                    <p:set>
+                                      <p:cBhvr>
+                                        <p:cTn id="14" dur="1" fill="hold">
+                                          <p:stCondLst>
+                                            <p:cond delay="0"/>
+                                          </p:stCondLst>
+                                        </p:cTn>
+                                        <p:tgtEl>
+                                          <p:spTgt spid="19"/>
+                                        </p:tgtEl>
+                                        <p:attrNameLst>
+                                          <p:attrName>style.visibility</p:attrName>
+                                        </p:attrNameLst>
+                                      </p:cBhvr>
+                                      <p:to>
+                                        <p:strVal val="visible"/>
+                                      </p:to>
+                                    </p:set>
+                                  </p:childTnLst>
+                                </p:cTn>
+                              </p:par>
+                              <p:par>
+                                <p:cTn id="15" presetID="1" presetClass="entr" presetSubtype="0" fill="hold" nodeType="withEffect">
+                                  <p:stCondLst>
+                                    <p:cond delay="0"/>
+                                  </p:stCondLst>
+                                  <p:childTnLst>
+                                    <p:set>
+                                      <p:cBhvr>
+                                        <p:cTn id="16" dur="1" fill="hold">
+                                          <p:stCondLst>
+                                            <p:cond delay="0"/>
+                                          </p:stCondLst>
+                                        </p:cTn>
+                                        <p:tgtEl>
+                                          <p:spTgt spid="16"/>
+                                        </p:tgtEl>
+                                        <p:attrNameLst>
+                                          <p:attrName>style.visibility</p:attrName>
+                                        </p:attrNameLst>
+                                      </p:cBhvr>
+                                      <p:to>
+                                        <p:strVal val="visible"/>
+                                      </p:to>
+                                    </p:set>
+                                  </p:childTnLst>
+                                </p:cTn>
+                              </p:par>
+                            </p:childTnLst>
+                          </p:cTn>
+                        </p:par>
+                      </p:childTnLst>
+                    </p:cTn>
+                  </p:par>
+                  <p:par>
+                    <p:cTn id="17" fill="hold">
+                      <p:stCondLst>
+                        <p:cond delay="indefinite"/>
+                      </p:stCondLst>
+                      <p:childTnLst>
+                        <p:par>
+                          <p:cTn id="18" fill="hold">
+                            <p:stCondLst>
+                              <p:cond delay="0"/>
+                            </p:stCondLst>
+                            <p:childTnLst>
+                              <p:par>
+                                <p:cTn id="19" presetID="1" presetClass="entr" presetSubtype="0" fill="hold" nodeType="clickEffect">
+                                  <p:stCondLst>
+                                    <p:cond delay="0"/>
+                                  </p:stCondLst>
+                                  <p:childTnLst>
+                                    <p:set>
+                                      <p:cBhvr>
+                                        <p:cTn id="20" dur="1" fill="hold">
+                                          <p:stCondLst>
+                                            <p:cond delay="0"/>
+                                          </p:stCondLst>
+                                        </p:cTn>
+                                        <p:tgtEl>
+                                          <p:spTgt spid="22"/>
+                                        </p:tgtEl>
+                                        <p:attrNameLst>
+                                          <p:attrName>style.visibility</p:attrName>
+                                        </p:attrNameLst>
+                                      </p:cBhvr>
+                                      <p:to>
+                                        <p:strVal val="visible"/>
+                                      </p:to>
+                                    </p:set>
+                                  </p:childTnLst>
+                                </p:cTn>
+                              </p:par>
+                            </p:childTnLst>
+                          </p:cTn>
+                        </p:par>
+                      </p:childTnLst>
+                    </p:cTn>
+                  </p:par>
+                  <p:par>
+                    <p:cTn id="21" fill="hold">
+                      <p:stCondLst>
+                        <p:cond delay="indefinite"/>
+                      </p:stCondLst>
+                      <p:childTnLst>
+                        <p:par>
+                          <p:cTn id="22" fill="hold">
+                            <p:stCondLst>
+                              <p:cond delay="0"/>
+                            </p:stCondLst>
+                            <p:childTnLst>
+                              <p:par>
+                                <p:cTn id="23" presetID="1" presetClass="entr" presetSubtype="0" fill="hold" nodeType="clickEffect">
+                                  <p:stCondLst>
+                                    <p:cond delay="0"/>
+                                  </p:stCondLst>
+                                  <p:childTnLst>
+                                    <p:set>
+                                      <p:cBhvr>
+                                        <p:cTn id="24" dur="1" fill="hold">
+                                          <p:stCondLst>
+                                            <p:cond delay="0"/>
+                                          </p:stCondLst>
+                                        </p:cTn>
+                                        <p:tgtEl>
+                                          <p:spTgt spid="28"/>
+                                        </p:tgtEl>
+                                        <p:attrNameLst>
+                                          <p:attrName>style.visibility</p:attrName>
+                                        </p:attrNameLst>
+                                      </p:cBhvr>
+                                      <p:to>
+                                        <p:strVal val="visible"/>
+                                      </p:to>
+                                    </p:set>
+                                  </p:childTnLst>
+                                </p:cTn>
+                              </p:par>
+                              <p:par>
+                                <p:cTn id="25" presetID="1" presetClass="entr" presetSubtype="0" fill="hold" grpId="0" nodeType="withEffect">
+                                  <p:stCondLst>
+                                    <p:cond delay="0"/>
+                                  </p:stCondLst>
+                                  <p:childTnLst>
+                                    <p:set>
+                                      <p:cBhvr>
+                                        <p:cTn id="26" dur="1" fill="hold">
+                                          <p:stCondLst>
+                                            <p:cond delay="0"/>
+                                          </p:stCondLst>
+                                        </p:cTn>
+                                        <p:tgtEl>
+                                          <p:spTgt spid="31"/>
+                                        </p:tgtEl>
+                                        <p:attrNameLst>
+                                          <p:attrName>style.visibility</p:attrName>
+                                        </p:attrNameLst>
+                                      </p:cBhvr>
+                                      <p:to>
+                                        <p:strVal val="visible"/>
+                                      </p:to>
+                                    </p:set>
+                                  </p:childTnLst>
+                                </p:cTn>
+                              </p:par>
+                            </p:childTnLst>
+                          </p:cTn>
+                        </p:par>
+                      </p:childTnLst>
+                    </p:cTn>
+                  </p:par>
+                  <p:par>
+                    <p:cTn id="27" fill="hold">
+                      <p:stCondLst>
+                        <p:cond delay="indefinite"/>
+                      </p:stCondLst>
+                      <p:childTnLst>
+                        <p:par>
+                          <p:cTn id="28" fill="hold">
+                            <p:stCondLst>
+                              <p:cond delay="0"/>
+                            </p:stCondLst>
+                            <p:childTnLst>
+                              <p:par>
+                                <p:cTn id="29" presetID="1" presetClass="entr" presetSubtype="0" fill="hold" nodeType="clickEffect">
+                                  <p:stCondLst>
+                                    <p:cond delay="0"/>
+                                  </p:stCondLst>
+                                  <p:childTnLst>
+                                    <p:set>
+                                      <p:cBhvr>
+                                        <p:cTn id="30" dur="1" fill="hold">
+                                          <p:stCondLst>
+                                            <p:cond delay="0"/>
+                                          </p:stCondLst>
+                                        </p:cTn>
+                                        <p:tgtEl>
+                                          <p:spTgt spid="39"/>
+                                        </p:tgtEl>
+                                        <p:attrNameLst>
+                                          <p:attrName>style.visibility</p:attrName>
+                                        </p:attrNameLst>
+                                      </p:cBhvr>
+                                      <p:to>
+                                        <p:strVal val="visible"/>
+                                      </p:to>
+                                    </p:set>
+                                  </p:childTnLst>
+                                </p:cTn>
+                              </p:par>
+                            </p:childTnLst>
+                          </p:cTn>
+                        </p:par>
+                      </p:childTnLst>
+                    </p:cTn>
+                  </p:par>
+                  <p:par>
+                    <p:cTn id="31" fill="hold">
+                      <p:stCondLst>
+                        <p:cond delay="indefinite"/>
+                      </p:stCondLst>
+                      <p:childTnLst>
+                        <p:par>
+                          <p:cTn id="32" fill="hold">
+                            <p:stCondLst>
+                              <p:cond delay="0"/>
+                            </p:stCondLst>
+                            <p:childTnLst>
+                              <p:par>
+                                <p:cTn id="33" presetID="1" presetClass="entr" presetSubtype="0" fill="hold" nodeType="clickEffect">
+                                  <p:stCondLst>
+                                    <p:cond delay="0"/>
+                                  </p:stCondLst>
+                                  <p:childTnLst>
+                                    <p:set>
+                                      <p:cBhvr>
+                                        <p:cTn id="34" dur="1" fill="hold">
+                                          <p:stCondLst>
+                                            <p:cond delay="0"/>
+                                          </p:stCondLst>
+                                        </p:cTn>
+                                        <p:tgtEl>
+                                          <p:spTgt spid="43"/>
+                                        </p:tgtEl>
+                                        <p:attrNameLst>
+                                          <p:attrName>style.visibility</p:attrName>
+                                        </p:attrNameLst>
+                                      </p:cBhvr>
+                                      <p:to>
+                                        <p:strVal val="visible"/>
+                                      </p:to>
+                                    </p:set>
+                                  </p:childTnLst>
+                                </p:cTn>
+                              </p:par>
+                            </p:childTnLst>
+                          </p:cTn>
+                        </p:par>
+                      </p:childTnLst>
+                    </p:cTn>
+                  </p:par>
+                  <p:par>
+                    <p:cTn id="35" fill="hold">
+                      <p:stCondLst>
+                        <p:cond delay="indefinite"/>
+                      </p:stCondLst>
+                      <p:childTnLst>
+                        <p:par>
+                          <p:cTn id="36" fill="hold">
+                            <p:stCondLst>
+                              <p:cond delay="0"/>
+                            </p:stCondLst>
+                            <p:childTnLst>
+                              <p:par>
+                                <p:cTn id="37" presetID="1" presetClass="entr" presetSubtype="0" fill="hold" nodeType="clickEffect">
+                                  <p:stCondLst>
+                                    <p:cond delay="0"/>
+                                  </p:stCondLst>
+                                  <p:childTnLst>
+                                    <p:set>
+                                      <p:cBhvr>
+                                        <p:cTn id="38" dur="1" fill="hold">
+                                          <p:stCondLst>
+                                            <p:cond delay="0"/>
+                                          </p:stCondLst>
+                                        </p:cTn>
+                                        <p:tgtEl>
+                                          <p:spTgt spid="53"/>
+                                        </p:tgtEl>
+                                        <p:attrNameLst>
+                                          <p:attrName>style.visibility</p:attrName>
+                                        </p:attrNameLst>
+                                      </p:cBhvr>
+                                      <p:to>
+                                        <p:strVal val="visible"/>
+                                      </p:to>
+                                    </p:set>
+                                  </p:childTnLst>
+                                </p:cTn>
+                              </p:par>
+                              <p:par>
+                                <p:cTn id="39" presetID="1" presetClass="entr" presetSubtype="0" fill="hold" grpId="0" nodeType="withEffect">
+                                  <p:stCondLst>
+                                    <p:cond delay="0"/>
+                                  </p:stCondLst>
+                                  <p:childTnLst>
+                                    <p:set>
+                                      <p:cBhvr>
+                                        <p:cTn id="40" dur="1" fill="hold">
+                                          <p:stCondLst>
+                                            <p:cond delay="0"/>
+                                          </p:stCondLst>
+                                        </p:cTn>
+                                        <p:tgtEl>
+                                          <p:spTgt spid="50"/>
+                                        </p:tgtEl>
+                                        <p:attrNameLst>
+                                          <p:attrName>style.visibility</p:attrName>
+                                        </p:attrNameLst>
+                                      </p:cBhvr>
+                                      <p:to>
+                                        <p:strVal val="visible"/>
+                                      </p:to>
+                                    </p:set>
+                                  </p:childTnLst>
+                                </p:cTn>
+                              </p:par>
+                            </p:childTnLst>
+                          </p:cTn>
+                        </p:par>
+                      </p:childTnLst>
+                    </p:cTn>
+                  </p:par>
+                </p:childTnLst>
+              </p:cTn>
+              <p:prevCondLst>
+                <p:cond evt="onPrev" delay="0">
+                  <p:tgtEl>
+                    <p:sldTgt/>
+                  </p:tgtEl>
+                </p:cond>
+              </p:prevCondLst>
+              <p:nextCondLst>
+                <p:cond evt="onNext" delay="0">
+                  <p:tgtEl>
+                    <p:sldTgt/>
+                  </p:tgtEl>
+                </p:cond>
+              </p:nextCondLst>
+            </p:seq>
+          </p:childTnLst>
+        </p:cTn>
+      </p:par>
+    </p:tnLst>
+    <p:bldLst>
+      <p:bldP spid="4" grpId="0" animBg="1"/>
+      <p:bldP spid="19" grpId="0" animBg="1"/>
+      <p:bldP spid="31" grpId="0" animBg="1"/>
+      <p:bldP spid="50" grpId="0" animBg="1"/>
+    </p:bldLst>
+  </p:timing>
+</p:sld>
+</file>
+
 <file path=ppt/slides/slide2.xml><?xml version="1.0" encoding="utf-8"?>
 <p:sld xmlns:a="http://schemas.openxmlformats.org/drawingml/2006/main" xmlns:r="http://schemas.openxmlformats.org/officeDocument/2006/relationships" xmlns:p="http://schemas.openxmlformats.org/presentationml/2006/main">
   <p:cSld>
@@ -6046,6 +12367,100 @@
           <a:chExt cx="0" cy="0"/>
         </a:xfrm>
       </p:grpSpPr>
+      <p:pic>
+        <p:nvPicPr>
+          <p:cNvPr id="5" name="Immagine 4">
+            <a:extLst>
+              <a:ext uri="{FF2B5EF4-FFF2-40B4-BE49-F238E27FC236}">
+                <a16:creationId xmlns:a16="http://schemas.microsoft.com/office/drawing/2014/main" id="{7E47B561-4322-DD55-32CE-48409E08932E}"/>
+              </a:ext>
+            </a:extLst>
+          </p:cNvPr>
+          <p:cNvPicPr>
+            <a:picLocks noChangeAspect="1"/>
+          </p:cNvPicPr>
+          <p:nvPr/>
+        </p:nvPicPr>
+        <p:blipFill>
+          <a:blip r:embed="rId3"/>
+          <a:stretch>
+            <a:fillRect/>
+          </a:stretch>
+        </p:blipFill>
+        <p:spPr>
+          <a:xfrm>
+            <a:off x="677334" y="1026928"/>
+            <a:ext cx="7979477" cy="5602468"/>
+          </a:xfrm>
+          <a:prstGeom prst="rect">
+            <a:avLst/>
+          </a:prstGeom>
+        </p:spPr>
+      </p:pic>
+      <p:sp>
+        <p:nvSpPr>
+          <p:cNvPr id="2" name="Titolo 1">
+            <a:extLst>
+              <a:ext uri="{FF2B5EF4-FFF2-40B4-BE49-F238E27FC236}">
+                <a16:creationId xmlns:a16="http://schemas.microsoft.com/office/drawing/2014/main" id="{BD19E790-DEA0-9AE4-4F24-8546371B9BAD}"/>
+              </a:ext>
+            </a:extLst>
+          </p:cNvPr>
+          <p:cNvSpPr>
+            <a:spLocks noGrp="1"/>
+          </p:cNvSpPr>
+          <p:nvPr>
+            <p:ph type="title"/>
+          </p:nvPr>
+        </p:nvSpPr>
+        <p:spPr>
+          <a:xfrm>
+            <a:off x="677334" y="202406"/>
+            <a:ext cx="8596668" cy="1320800"/>
+          </a:xfrm>
+        </p:spPr>
+        <p:txBody>
+          <a:bodyPr/>
+          <a:lstStyle/>
+          <a:p>
+            <a:r>
+              <a:rPr lang="it-IT" dirty="0" err="1"/>
+              <a:t>Overview</a:t>
+            </a:r>
+            <a:endParaRPr lang="it-IT" dirty="0"/>
+          </a:p>
+        </p:txBody>
+      </p:sp>
+    </p:spTree>
+    <p:extLst>
+      <p:ext uri="{BB962C8B-B14F-4D97-AF65-F5344CB8AC3E}">
+        <p14:creationId xmlns:p14="http://schemas.microsoft.com/office/powerpoint/2010/main" val="899480435"/>
+      </p:ext>
+    </p:extLst>
+  </p:cSld>
+  <p:clrMapOvr>
+    <a:masterClrMapping/>
+  </p:clrMapOvr>
+</p:sld>
+</file>
+
+<file path=ppt/slides/slide3.xml><?xml version="1.0" encoding="utf-8"?>
+<p:sld xmlns:a="http://schemas.openxmlformats.org/drawingml/2006/main" xmlns:r="http://schemas.openxmlformats.org/officeDocument/2006/relationships" xmlns:p="http://schemas.openxmlformats.org/presentationml/2006/main">
+  <p:cSld>
+    <p:spTree>
+      <p:nvGrpSpPr>
+        <p:cNvPr id="1" name=""/>
+        <p:cNvGrpSpPr/>
+        <p:nvPr/>
+      </p:nvGrpSpPr>
+      <p:grpSpPr>
+        <a:xfrm>
+          <a:off x="0" y="0"/>
+          <a:ext cx="0" cy="0"/>
+          <a:chOff x="0" y="0"/>
+          <a:chExt cx="0" cy="0"/>
+        </a:xfrm>
+      </p:grpSpPr>
       <p:sp>
         <p:nvSpPr>
           <p:cNvPr id="2" name="Titolo 1">
@@ -6102,23 +12517,18 @@
           <a:p>
             <a:r>
               <a:rPr lang="it-IT" dirty="0"/>
-              <a:t>Download the </a:t>
-            </a:r>
-            <a:r>
-              <a:rPr lang="it-IT" dirty="0" err="1"/>
-              <a:t>Kria</a:t>
-            </a:r>
-            <a:r>
-              <a:rPr lang="it-IT" dirty="0"/>
-              <a:t> Ubuntu image from the Ubuntu website: </a:t>
+              <a:t>Download the Ubuntu Desktop 22.04 LTS image from the Ubuntu website: </a:t>
             </a:r>
             <a:r>
               <a:rPr lang="it-IT" dirty="0">
-                <a:hlinkClick r:id="rId2"/>
+                <a:hlinkClick r:id="rId3"/>
               </a:rPr>
               <a:t>https://ubuntu.com/download/amd#kria-k26</a:t>
             </a:r>
-            <a:endParaRPr lang="it-IT" dirty="0"/>
+            <a:r>
+              <a:rPr lang="it-IT" dirty="0"/>
+              <a:t> </a:t>
+            </a:r>
           </a:p>
           <a:p>
             <a:r>
@@ -6145,15 +12555,7 @@
             </a:r>
             <a:r>
               <a:rPr lang="it-IT" dirty="0"/>
-              <a:t> to </a:t>
-            </a:r>
-            <a:r>
-              <a:rPr lang="it-IT" dirty="0" err="1"/>
-              <a:t>your</a:t>
-            </a:r>
-            <a:r>
-              <a:rPr lang="it-IT" dirty="0"/>
-              <a:t> computer via UART</a:t>
+              <a:t> to a computer via UART</a:t>
             </a:r>
           </a:p>
           <a:p>
@@ -6236,14 +12638,6 @@
             </a:r>
             <a:r>
               <a:rPr lang="it-IT" sz="1800" dirty="0" err="1"/>
-              <a:t>remember</a:t>
-            </a:r>
-            <a:r>
-              <a:rPr lang="it-IT" sz="1800" dirty="0"/>
-              <a:t> to </a:t>
-            </a:r>
-            <a:r>
-              <a:rPr lang="it-IT" sz="1800" dirty="0" err="1"/>
               <a:t>change</a:t>
             </a:r>
             <a:r>
@@ -6264,7 +12658,7 @@
               <a:t>Window -&gt; </a:t>
             </a:r>
             <a:r>
-              <a:rPr lang="it-IT" sz="1800" i="1" dirty="0" err="1"/>
+              <a:rPr lang="it-IT" sz="1800" i="1" u="sng" dirty="0" err="1"/>
               <a:t>Appearance</a:t>
             </a:r>
             <a:r>
@@ -6296,7 +12690,7 @@
           <p:nvPr/>
         </p:nvPicPr>
         <p:blipFill>
-          <a:blip r:embed="rId3"/>
+          <a:blip r:embed="rId4"/>
           <a:stretch>
             <a:fillRect/>
           </a:stretch>
@@ -6324,7 +12718,315 @@
 </p:sld>
 </file>
 
-<file path=ppt/slides/slide3.xml><?xml version="1.0" encoding="utf-8"?>
+<file path=ppt/slides/slide4.xml><?xml version="1.0" encoding="utf-8"?>
+<p:sld xmlns:a="http://schemas.openxmlformats.org/drawingml/2006/main" xmlns:r="http://schemas.openxmlformats.org/officeDocument/2006/relationships" xmlns:p="http://schemas.openxmlformats.org/presentationml/2006/main">
+  <p:cSld>
+    <p:spTree>
+      <p:nvGrpSpPr>
+        <p:cNvPr id="1" name="">
+          <a:extLst>
+            <a:ext uri="{FF2B5EF4-FFF2-40B4-BE49-F238E27FC236}">
+              <a16:creationId xmlns:a16="http://schemas.microsoft.com/office/drawing/2014/main" id="{00C3DC94-52B4-7EED-1364-5CE152BCD1E2}"/>
+            </a:ext>
+          </a:extLst>
+        </p:cNvPr>
+        <p:cNvGrpSpPr/>
+        <p:nvPr/>
+      </p:nvGrpSpPr>
+      <p:grpSpPr>
+        <a:xfrm>
+          <a:off x="0" y="0"/>
+          <a:ext cx="0" cy="0"/>
+          <a:chOff x="0" y="0"/>
+          <a:chExt cx="0" cy="0"/>
+        </a:xfrm>
+      </p:grpSpPr>
+      <p:pic>
+        <p:nvPicPr>
+          <p:cNvPr id="5" name="Immagine 4">
+            <a:extLst>
+              <a:ext uri="{FF2B5EF4-FFF2-40B4-BE49-F238E27FC236}">
+                <a16:creationId xmlns:a16="http://schemas.microsoft.com/office/drawing/2014/main" id="{E6FF28C0-0A1A-B8B5-75DA-87A92F1D0CDC}"/>
+              </a:ext>
+            </a:extLst>
+          </p:cNvPr>
+          <p:cNvPicPr>
+            <a:picLocks noChangeAspect="1"/>
+          </p:cNvPicPr>
+          <p:nvPr/>
+        </p:nvPicPr>
+        <p:blipFill>
+          <a:blip r:embed="rId3"/>
+          <a:stretch>
+            <a:fillRect/>
+          </a:stretch>
+        </p:blipFill>
+        <p:spPr>
+          <a:xfrm>
+            <a:off x="398725" y="1119794"/>
+            <a:ext cx="6223531" cy="4369601"/>
+          </a:xfrm>
+          <a:prstGeom prst="rect">
+            <a:avLst/>
+          </a:prstGeom>
+        </p:spPr>
+      </p:pic>
+      <p:sp>
+        <p:nvSpPr>
+          <p:cNvPr id="2" name="CasellaDiTesto 1">
+            <a:extLst>
+              <a:ext uri="{FF2B5EF4-FFF2-40B4-BE49-F238E27FC236}">
+                <a16:creationId xmlns:a16="http://schemas.microsoft.com/office/drawing/2014/main" id="{12F35B52-7873-2572-9825-177B553504FE}"/>
+              </a:ext>
+            </a:extLst>
+          </p:cNvPr>
+          <p:cNvSpPr txBox="1"/>
+          <p:nvPr/>
+        </p:nvSpPr>
+        <p:spPr>
+          <a:xfrm>
+            <a:off x="7429501" y="3105031"/>
+            <a:ext cx="2843212" cy="369332"/>
+          </a:xfrm>
+          <a:prstGeom prst="rect">
+            <a:avLst/>
+          </a:prstGeom>
+          <a:noFill/>
+        </p:spPr>
+        <p:txBody>
+          <a:bodyPr wrap="square" rtlCol="0">
+            <a:spAutoFit/>
+          </a:bodyPr>
+          <a:lstStyle/>
+          <a:p>
+            <a:r>
+              <a:rPr lang="it-IT" dirty="0"/>
+              <a:t>Ubuntu </a:t>
+            </a:r>
+            <a:r>
+              <a:rPr lang="it-IT" dirty="0" err="1"/>
+              <a:t>is</a:t>
+            </a:r>
+            <a:r>
+              <a:rPr lang="it-IT" dirty="0"/>
+              <a:t> </a:t>
+            </a:r>
+            <a:r>
+              <a:rPr lang="it-IT" dirty="0" err="1"/>
+              <a:t>installed</a:t>
+            </a:r>
+            <a:endParaRPr lang="it-IT" dirty="0"/>
+          </a:p>
+        </p:txBody>
+      </p:sp>
+      <p:sp>
+        <p:nvSpPr>
+          <p:cNvPr id="22" name="Parentesi graffa chiusa 21">
+            <a:extLst>
+              <a:ext uri="{FF2B5EF4-FFF2-40B4-BE49-F238E27FC236}">
+                <a16:creationId xmlns:a16="http://schemas.microsoft.com/office/drawing/2014/main" id="{20283A25-4ACD-77B3-990A-407CD9EF395C}"/>
+              </a:ext>
+            </a:extLst>
+          </p:cNvPr>
+          <p:cNvSpPr/>
+          <p:nvPr/>
+        </p:nvSpPr>
+        <p:spPr>
+          <a:xfrm>
+            <a:off x="6707982" y="2157413"/>
+            <a:ext cx="507206" cy="2264568"/>
+          </a:xfrm>
+          <a:prstGeom prst="rightBrace">
+            <a:avLst/>
+          </a:prstGeom>
+          <a:solidFill>
+            <a:schemeClr val="bg1"/>
+          </a:solidFill>
+          <a:ln>
+            <a:solidFill>
+              <a:schemeClr val="tx1"/>
+            </a:solidFill>
+          </a:ln>
+        </p:spPr>
+        <p:style>
+          <a:lnRef idx="1">
+            <a:schemeClr val="accent1"/>
+          </a:lnRef>
+          <a:fillRef idx="0">
+            <a:schemeClr val="accent1"/>
+          </a:fillRef>
+          <a:effectRef idx="0">
+            <a:schemeClr val="accent1"/>
+          </a:effectRef>
+          <a:fontRef idx="minor">
+            <a:schemeClr val="tx1"/>
+          </a:fontRef>
+        </p:style>
+        <p:txBody>
+          <a:bodyPr rtlCol="0" anchor="ctr"/>
+          <a:lstStyle/>
+          <a:p>
+            <a:pPr algn="ctr"/>
+            <a:endParaRPr lang="it-IT">
+              <a:ln>
+                <a:solidFill>
+                  <a:schemeClr val="tx1"/>
+                </a:solidFill>
+              </a:ln>
+            </a:endParaRPr>
+          </a:p>
+        </p:txBody>
+      </p:sp>
+      <p:sp>
+        <p:nvSpPr>
+          <p:cNvPr id="25" name="Rettangolo 24">
+            <a:extLst>
+              <a:ext uri="{FF2B5EF4-FFF2-40B4-BE49-F238E27FC236}">
+                <a16:creationId xmlns:a16="http://schemas.microsoft.com/office/drawing/2014/main" id="{0CE2238B-7E3E-E4BF-1571-4CBBE9CE9A37}"/>
+              </a:ext>
+            </a:extLst>
+          </p:cNvPr>
+          <p:cNvSpPr/>
+          <p:nvPr/>
+        </p:nvSpPr>
+        <p:spPr>
+          <a:xfrm>
+            <a:off x="7429501" y="2966531"/>
+            <a:ext cx="2143124" cy="646331"/>
+          </a:xfrm>
+          <a:prstGeom prst="rect">
+            <a:avLst/>
+          </a:prstGeom>
+          <a:solidFill>
+            <a:schemeClr val="accent2">
+              <a:lumMod val="40000"/>
+              <a:lumOff val="60000"/>
+            </a:schemeClr>
+          </a:solidFill>
+        </p:spPr>
+        <p:style>
+          <a:lnRef idx="2">
+            <a:schemeClr val="accent1">
+              <a:shade val="15000"/>
+            </a:schemeClr>
+          </a:lnRef>
+          <a:fillRef idx="1">
+            <a:schemeClr val="accent1"/>
+          </a:fillRef>
+          <a:effectRef idx="0">
+            <a:schemeClr val="accent1"/>
+          </a:effectRef>
+          <a:fontRef idx="minor">
+            <a:schemeClr val="lt1"/>
+          </a:fontRef>
+        </p:style>
+        <p:txBody>
+          <a:bodyPr rtlCol="0" anchor="ctr"/>
+          <a:lstStyle/>
+          <a:p>
+            <a:pPr algn="ctr"/>
+            <a:endParaRPr lang="it-IT" dirty="0"/>
+          </a:p>
+          <a:p>
+            <a:pPr algn="ctr"/>
+            <a:r>
+              <a:rPr lang="it-IT" dirty="0">
+                <a:ln w="0"/>
+                <a:solidFill>
+                  <a:schemeClr val="tx1"/>
+                </a:solidFill>
+                <a:effectLst>
+                  <a:outerShdw blurRad="38100" dist="19050" dir="2700000" algn="tl" rotWithShape="0">
+                    <a:schemeClr val="dk1">
+                      <a:alpha val="40000"/>
+                    </a:schemeClr>
+                  </a:outerShdw>
+                </a:effectLst>
+              </a:rPr>
+              <a:t>Ubuntu </a:t>
+            </a:r>
+            <a:r>
+              <a:rPr lang="it-IT" dirty="0" err="1">
+                <a:ln w="0"/>
+                <a:solidFill>
+                  <a:schemeClr val="tx1"/>
+                </a:solidFill>
+                <a:effectLst>
+                  <a:outerShdw blurRad="38100" dist="19050" dir="2700000" algn="tl" rotWithShape="0">
+                    <a:schemeClr val="dk1">
+                      <a:alpha val="40000"/>
+                    </a:schemeClr>
+                  </a:outerShdw>
+                </a:effectLst>
+              </a:rPr>
+              <a:t>is</a:t>
+            </a:r>
+            <a:r>
+              <a:rPr lang="it-IT" dirty="0">
+                <a:ln w="0"/>
+                <a:solidFill>
+                  <a:schemeClr val="tx1"/>
+                </a:solidFill>
+                <a:effectLst>
+                  <a:outerShdw blurRad="38100" dist="19050" dir="2700000" algn="tl" rotWithShape="0">
+                    <a:schemeClr val="dk1">
+                      <a:alpha val="40000"/>
+                    </a:schemeClr>
+                  </a:outerShdw>
+                </a:effectLst>
+              </a:rPr>
+              <a:t> </a:t>
+            </a:r>
+            <a:r>
+              <a:rPr lang="it-IT" dirty="0" err="1">
+                <a:ln w="0"/>
+                <a:solidFill>
+                  <a:schemeClr val="tx1"/>
+                </a:solidFill>
+                <a:effectLst>
+                  <a:outerShdw blurRad="38100" dist="19050" dir="2700000" algn="tl" rotWithShape="0">
+                    <a:schemeClr val="dk1">
+                      <a:alpha val="40000"/>
+                    </a:schemeClr>
+                  </a:outerShdw>
+                </a:effectLst>
+              </a:rPr>
+              <a:t>installed</a:t>
+            </a:r>
+            <a:endParaRPr lang="it-IT" dirty="0">
+              <a:ln w="0"/>
+              <a:solidFill>
+                <a:schemeClr val="tx1"/>
+              </a:solidFill>
+              <a:effectLst>
+                <a:outerShdw blurRad="38100" dist="19050" dir="2700000" algn="tl" rotWithShape="0">
+                  <a:schemeClr val="dk1">
+                    <a:alpha val="40000"/>
+                  </a:schemeClr>
+                </a:outerShdw>
+              </a:effectLst>
+            </a:endParaRPr>
+          </a:p>
+          <a:p>
+            <a:pPr algn="ctr"/>
+            <a:endParaRPr lang="it-IT" dirty="0"/>
+          </a:p>
+        </p:txBody>
+      </p:sp>
+    </p:spTree>
+    <p:extLst>
+      <p:ext uri="{BB962C8B-B14F-4D97-AF65-F5344CB8AC3E}">
+        <p14:creationId xmlns:p14="http://schemas.microsoft.com/office/powerpoint/2010/main" val="1461533733"/>
+      </p:ext>
+    </p:extLst>
+  </p:cSld>
+  <p:clrMapOvr>
+    <a:masterClrMapping/>
+  </p:clrMapOvr>
+</p:sld>
+</file>
+
+<file path=ppt/slides/slide5.xml><?xml version="1.0" encoding="utf-8"?>
 <p:sld xmlns:a="http://schemas.openxmlformats.org/drawingml/2006/main" xmlns:r="http://schemas.openxmlformats.org/officeDocument/2006/relationships" xmlns:p="http://schemas.openxmlformats.org/presentationml/2006/main">
   <p:cSld>
     <p:spTree>
@@ -6397,67 +13099,223 @@
           <a:lstStyle/>
           <a:p>
             <a:r>
-              <a:rPr lang="it-IT"/>
-              <a:t>Download PuTTY: </a:t>
-            </a:r>
-            <a:r>
-              <a:rPr lang="it-IT">
-                <a:hlinkClick r:id="rId2"/>
+              <a:rPr lang="it-IT" dirty="0"/>
+              <a:t>Download </a:t>
+            </a:r>
+            <a:r>
+              <a:rPr lang="it-IT" dirty="0" err="1"/>
+              <a:t>PuTTY</a:t>
+            </a:r>
+            <a:r>
+              <a:rPr lang="it-IT" dirty="0"/>
+              <a:t>: </a:t>
+            </a:r>
+            <a:r>
+              <a:rPr lang="it-IT" dirty="0">
+                <a:hlinkClick r:id="rId3"/>
               </a:rPr>
               <a:t>https://putty.org/index.html</a:t>
             </a:r>
             <a:r>
-              <a:rPr lang="it-IT"/>
-              <a:t> (on ubuntu: sudo apt install putty);</a:t>
-            </a:r>
-          </a:p>
-          <a:p>
-            <a:r>
-              <a:rPr lang="it-IT"/>
-              <a:t>Run it and set up the connection with the parameters shown earlier;</a:t>
-            </a:r>
-          </a:p>
-          <a:p>
-            <a:r>
-              <a:rPr lang="it-IT"/>
-              <a:t>To find the COM port you can go to the </a:t>
-            </a:r>
-            <a:r>
-              <a:rPr lang="it-IT" i="1"/>
-              <a:t>Manage Devices </a:t>
-            </a:r>
-            <a:r>
-              <a:rPr lang="it-IT"/>
-              <a:t>tab in the Control Panel (on ubuntu: </a:t>
-            </a:r>
-            <a:r>
-              <a:rPr lang="it-IT" i="1"/>
-              <a:t>ls /dev | grep tty </a:t>
-            </a:r>
-            <a:r>
-              <a:rPr lang="it-IT"/>
+              <a:rPr lang="it-IT" dirty="0"/>
+              <a:t> (on </a:t>
+            </a:r>
+            <a:r>
+              <a:rPr lang="it-IT" dirty="0" err="1"/>
+              <a:t>ubuntu</a:t>
+            </a:r>
+            <a:r>
+              <a:rPr lang="it-IT" dirty="0"/>
+              <a:t>: </a:t>
+            </a:r>
+            <a:r>
+              <a:rPr lang="it-IT" b="1" i="1" dirty="0"/>
+              <a:t>sudo </a:t>
+            </a:r>
+            <a:r>
+              <a:rPr lang="it-IT" b="1" i="1" dirty="0" err="1"/>
+              <a:t>apt</a:t>
+            </a:r>
+            <a:r>
+              <a:rPr lang="it-IT" b="1" i="1" dirty="0"/>
+              <a:t> </a:t>
+            </a:r>
+            <a:r>
+              <a:rPr lang="it-IT" b="1" i="1" dirty="0" err="1"/>
+              <a:t>install</a:t>
+            </a:r>
+            <a:r>
+              <a:rPr lang="it-IT" b="1" i="1" dirty="0"/>
+              <a:t> </a:t>
+            </a:r>
+            <a:r>
+              <a:rPr lang="it-IT" b="1" i="1" dirty="0" err="1"/>
+              <a:t>putty</a:t>
+            </a:r>
+            <a:r>
+              <a:rPr lang="it-IT" dirty="0"/>
+              <a:t>);</a:t>
+            </a:r>
+          </a:p>
+          <a:p>
+            <a:r>
+              <a:rPr lang="it-IT" dirty="0" err="1"/>
+              <a:t>Run</a:t>
+            </a:r>
+            <a:r>
+              <a:rPr lang="it-IT" dirty="0"/>
+              <a:t> </a:t>
+            </a:r>
+            <a:r>
+              <a:rPr lang="it-IT" dirty="0" err="1"/>
+              <a:t>it</a:t>
+            </a:r>
+            <a:r>
+              <a:rPr lang="it-IT" dirty="0"/>
+              <a:t> and set up the connection with the </a:t>
+            </a:r>
+            <a:r>
+              <a:rPr lang="it-IT" dirty="0" err="1"/>
+              <a:t>parameters</a:t>
+            </a:r>
+            <a:r>
+              <a:rPr lang="it-IT" dirty="0"/>
+              <a:t> </a:t>
+            </a:r>
+            <a:r>
+              <a:rPr lang="it-IT" dirty="0" err="1"/>
+              <a:t>shown</a:t>
+            </a:r>
+            <a:r>
+              <a:rPr lang="it-IT" dirty="0"/>
+              <a:t> </a:t>
+            </a:r>
+            <a:r>
+              <a:rPr lang="it-IT" dirty="0" err="1"/>
+              <a:t>earlier</a:t>
+            </a:r>
+            <a:r>
+              <a:rPr lang="it-IT" dirty="0"/>
+              <a:t>;</a:t>
+            </a:r>
+          </a:p>
+          <a:p>
+            <a:r>
+              <a:rPr lang="it-IT" dirty="0"/>
+              <a:t>To </a:t>
+            </a:r>
+            <a:r>
+              <a:rPr lang="it-IT" dirty="0" err="1"/>
+              <a:t>find</a:t>
+            </a:r>
+            <a:r>
+              <a:rPr lang="it-IT" dirty="0"/>
+              <a:t> the COM port </a:t>
+            </a:r>
+            <a:r>
+              <a:rPr lang="it-IT" dirty="0" err="1"/>
+              <a:t>you</a:t>
+            </a:r>
+            <a:r>
+              <a:rPr lang="it-IT" dirty="0"/>
+              <a:t> can go to the </a:t>
+            </a:r>
+            <a:r>
+              <a:rPr lang="it-IT" i="1" dirty="0" err="1"/>
+              <a:t>Manage</a:t>
+            </a:r>
+            <a:r>
+              <a:rPr lang="it-IT" i="1" dirty="0"/>
+              <a:t> Devices </a:t>
+            </a:r>
+            <a:r>
+              <a:rPr lang="it-IT" dirty="0"/>
+              <a:t>tab in the Control Panel (on </a:t>
+            </a:r>
+            <a:r>
+              <a:rPr lang="it-IT" dirty="0" err="1"/>
+              <a:t>ubuntu</a:t>
+            </a:r>
+            <a:r>
+              <a:rPr lang="it-IT" dirty="0"/>
+              <a:t>: </a:t>
+            </a:r>
+            <a:r>
+              <a:rPr lang="it-IT" b="1" i="1" dirty="0" err="1"/>
+              <a:t>ls</a:t>
+            </a:r>
+            <a:r>
+              <a:rPr lang="it-IT" b="1" i="1" dirty="0"/>
+              <a:t> /</a:t>
+            </a:r>
+            <a:r>
+              <a:rPr lang="it-IT" b="1" i="1" dirty="0" err="1"/>
+              <a:t>dev</a:t>
+            </a:r>
+            <a:r>
+              <a:rPr lang="it-IT" b="1" i="1" dirty="0"/>
+              <a:t> | </a:t>
+            </a:r>
+            <a:r>
+              <a:rPr lang="it-IT" b="1" i="1" dirty="0" err="1"/>
+              <a:t>grep</a:t>
+            </a:r>
+            <a:r>
+              <a:rPr lang="it-IT" b="1" i="1" dirty="0"/>
+              <a:t> </a:t>
+            </a:r>
+            <a:r>
+              <a:rPr lang="it-IT" b="1" i="1" dirty="0" err="1"/>
+              <a:t>tty</a:t>
+            </a:r>
+            <a:r>
+              <a:rPr lang="it-IT" i="1" dirty="0"/>
+              <a:t> </a:t>
+            </a:r>
+            <a:r>
+              <a:rPr lang="it-IT" dirty="0"/>
               <a:t>OR </a:t>
             </a:r>
             <a:r>
-              <a:rPr lang="it-IT" i="1"/>
-              <a:t>ls /dev | grep USB</a:t>
-            </a:r>
-            <a:r>
-              <a:rPr lang="it-IT"/>
+              <a:rPr lang="it-IT" b="1" i="1" dirty="0" err="1"/>
+              <a:t>ls</a:t>
+            </a:r>
+            <a:r>
+              <a:rPr lang="it-IT" b="1" i="1" dirty="0"/>
+              <a:t> /</a:t>
+            </a:r>
+            <a:r>
+              <a:rPr lang="it-IT" b="1" i="1" dirty="0" err="1"/>
+              <a:t>dev</a:t>
+            </a:r>
+            <a:r>
+              <a:rPr lang="it-IT" b="1" i="1" dirty="0"/>
+              <a:t> | </a:t>
+            </a:r>
+            <a:r>
+              <a:rPr lang="it-IT" b="1" i="1" dirty="0" err="1"/>
+              <a:t>grep</a:t>
+            </a:r>
+            <a:r>
+              <a:rPr lang="it-IT" b="1" i="1" dirty="0"/>
+              <a:t> USB </a:t>
+            </a:r>
+            <a:r>
+              <a:rPr lang="it-IT" dirty="0"/>
               <a:t>)</a:t>
             </a:r>
           </a:p>
           <a:p>
-            <a:endParaRPr lang="it-IT" i="1"/>
-          </a:p>
-          <a:p>
-            <a:endParaRPr lang="it-IT" i="1"/>
-          </a:p>
-          <a:p>
-            <a:endParaRPr lang="it-IT" i="1"/>
-          </a:p>
-          <a:p>
-            <a:endParaRPr lang="it-IT" i="1"/>
+            <a:endParaRPr lang="it-IT" i="1" dirty="0"/>
+          </a:p>
+          <a:p>
+            <a:endParaRPr lang="it-IT" i="1" dirty="0"/>
+          </a:p>
+          <a:p>
+            <a:endParaRPr lang="it-IT" i="1" dirty="0"/>
+          </a:p>
+          <a:p>
+            <a:endParaRPr lang="it-IT" i="1" dirty="0"/>
           </a:p>
           <a:p>
             <a:endParaRPr lang="it-IT" dirty="0"/>
@@ -6479,7 +13337,7 @@
           <p:nvPr/>
         </p:nvPicPr>
         <p:blipFill>
-          <a:blip r:embed="rId3"/>
+          <a:blip r:embed="rId4"/>
           <a:stretch>
             <a:fillRect/>
           </a:stretch>
@@ -6509,7 +13367,7 @@
           <p:nvPr/>
         </p:nvPicPr>
         <p:blipFill>
-          <a:blip r:embed="rId4"/>
+          <a:blip r:embed="rId5"/>
           <a:stretch>
             <a:fillRect/>
           </a:stretch>
@@ -6537,7 +13395,7 @@
 </p:sld>
 </file>
 
-<file path=ppt/slides/slide4.xml><?xml version="1.0" encoding="utf-8"?>
+<file path=ppt/slides/slide6.xml><?xml version="1.0" encoding="utf-8"?>
 <p:sld xmlns:a="http://schemas.openxmlformats.org/drawingml/2006/main" xmlns:r="http://schemas.openxmlformats.org/officeDocument/2006/relationships" xmlns:p="http://schemas.openxmlformats.org/presentationml/2006/main">
   <p:cSld>
     <p:bg>
@@ -6639,8 +13497,64 @@
               </a:lnSpc>
             </a:pPr>
             <a:r>
-              <a:rPr lang="it-IT" sz="1500"/>
-              <a:t>Once the PuTTY connection starts up successfully, connect the Kria’s power cable. The PuTTY window should start showing some text; </a:t>
+              <a:rPr lang="it-IT" sz="1500" dirty="0"/>
+              <a:t>Once the </a:t>
+            </a:r>
+            <a:r>
+              <a:rPr lang="it-IT" sz="1500" dirty="0" err="1"/>
+              <a:t>PuTTY</a:t>
+            </a:r>
+            <a:r>
+              <a:rPr lang="it-IT" sz="1500" dirty="0"/>
+              <a:t> connection starts up </a:t>
+            </a:r>
+            <a:r>
+              <a:rPr lang="it-IT" sz="1500" dirty="0" err="1"/>
+              <a:t>successfully</a:t>
+            </a:r>
+            <a:r>
+              <a:rPr lang="it-IT" sz="1500" dirty="0"/>
+              <a:t>, </a:t>
+            </a:r>
+            <a:r>
+              <a:rPr lang="it-IT" sz="1500" dirty="0" err="1"/>
+              <a:t>connect</a:t>
+            </a:r>
+            <a:r>
+              <a:rPr lang="it-IT" sz="1500" dirty="0"/>
+              <a:t> the </a:t>
+            </a:r>
+            <a:r>
+              <a:rPr lang="it-IT" sz="1500" dirty="0" err="1"/>
+              <a:t>Kria’s</a:t>
+            </a:r>
+            <a:r>
+              <a:rPr lang="it-IT" sz="1500" dirty="0"/>
+              <a:t> power cable. The </a:t>
+            </a:r>
+            <a:r>
+              <a:rPr lang="it-IT" sz="1500" dirty="0" err="1"/>
+              <a:t>PuTTY</a:t>
+            </a:r>
+            <a:r>
+              <a:rPr lang="it-IT" sz="1500" dirty="0"/>
+              <a:t> window </a:t>
+            </a:r>
+            <a:r>
+              <a:rPr lang="it-IT" sz="1500" dirty="0" err="1"/>
+              <a:t>should</a:t>
+            </a:r>
+            <a:r>
+              <a:rPr lang="it-IT" sz="1500" dirty="0"/>
+              <a:t> start </a:t>
+            </a:r>
+            <a:r>
+              <a:rPr lang="it-IT" sz="1500" dirty="0" err="1"/>
+              <a:t>showing</a:t>
+            </a:r>
+            <a:r>
+              <a:rPr lang="it-IT" sz="1500" dirty="0"/>
+              <a:t> some text; </a:t>
             </a:r>
           </a:p>
           <a:p>
@@ -6650,8 +13564,104 @@
               </a:lnSpc>
             </a:pPr>
             <a:r>
-              <a:rPr lang="it-IT" sz="1500"/>
-              <a:t>After the boot up is complete, you will need to set a username and password (recommendation is the same thing for both, forgetting the password is bad!);</a:t>
+              <a:rPr lang="it-IT" sz="1500" dirty="0"/>
+              <a:t>After the boot up </a:t>
+            </a:r>
+            <a:r>
+              <a:rPr lang="it-IT" sz="1500" dirty="0" err="1"/>
+              <a:t>is</a:t>
+            </a:r>
+            <a:r>
+              <a:rPr lang="it-IT" sz="1500" dirty="0"/>
+              <a:t> complete, </a:t>
+            </a:r>
+            <a:r>
+              <a:rPr lang="it-IT" sz="1500" dirty="0" err="1"/>
+              <a:t>you</a:t>
+            </a:r>
+            <a:r>
+              <a:rPr lang="it-IT" sz="1500" dirty="0"/>
+              <a:t> </a:t>
+            </a:r>
+            <a:r>
+              <a:rPr lang="it-IT" sz="1500" dirty="0" err="1"/>
+              <a:t>will</a:t>
+            </a:r>
+            <a:r>
+              <a:rPr lang="it-IT" sz="1500" dirty="0"/>
+              <a:t> </a:t>
+            </a:r>
+            <a:r>
+              <a:rPr lang="it-IT" sz="1500" dirty="0" err="1"/>
+              <a:t>need</a:t>
+            </a:r>
+            <a:r>
+              <a:rPr lang="it-IT" sz="1500" dirty="0"/>
+              <a:t> to set a username and password (</a:t>
+            </a:r>
+            <a:r>
+              <a:rPr lang="it-IT" sz="1500" dirty="0" err="1"/>
+              <a:t>recommendation</a:t>
+            </a:r>
+            <a:r>
+              <a:rPr lang="it-IT" sz="1500" dirty="0"/>
+              <a:t> </a:t>
+            </a:r>
+            <a:r>
+              <a:rPr lang="it-IT" sz="1500" dirty="0" err="1"/>
+              <a:t>is</a:t>
+            </a:r>
+            <a:r>
+              <a:rPr lang="it-IT" sz="1500" dirty="0"/>
+              <a:t> the </a:t>
+            </a:r>
+            <a:r>
+              <a:rPr lang="it-IT" sz="1500" dirty="0" err="1"/>
+              <a:t>same</a:t>
+            </a:r>
+            <a:r>
+              <a:rPr lang="it-IT" sz="1500" dirty="0"/>
+              <a:t> </a:t>
+            </a:r>
+            <a:r>
+              <a:rPr lang="it-IT" sz="1500" dirty="0" err="1"/>
+              <a:t>thing</a:t>
+            </a:r>
+            <a:r>
+              <a:rPr lang="it-IT" sz="1500" dirty="0"/>
+              <a:t> for </a:t>
+            </a:r>
+            <a:r>
+              <a:rPr lang="it-IT" sz="1500" dirty="0" err="1"/>
+              <a:t>both</a:t>
+            </a:r>
+            <a:r>
+              <a:rPr lang="it-IT" sz="1500" dirty="0"/>
+              <a:t>, </a:t>
+            </a:r>
+            <a:r>
+              <a:rPr lang="it-IT" sz="1500" dirty="0" err="1"/>
+              <a:t>forgetting</a:t>
+            </a:r>
+            <a:r>
+              <a:rPr lang="it-IT" sz="1500" dirty="0"/>
+              <a:t> the password </a:t>
+            </a:r>
+            <a:r>
+              <a:rPr lang="it-IT" sz="1500" dirty="0" err="1"/>
+              <a:t>is</a:t>
+            </a:r>
+            <a:r>
+              <a:rPr lang="it-IT" sz="1500" dirty="0"/>
+              <a:t> </a:t>
+            </a:r>
+            <a:r>
+              <a:rPr lang="it-IT" sz="1500" dirty="0" err="1"/>
+              <a:t>bad</a:t>
+            </a:r>
+            <a:r>
+              <a:rPr lang="it-IT" sz="1500" dirty="0"/>
+              <a:t>!);</a:t>
             </a:r>
           </a:p>
           <a:p>
@@ -6661,8 +13671,128 @@
               </a:lnSpc>
             </a:pPr>
             <a:r>
-              <a:rPr lang="it-IT" sz="1500"/>
-              <a:t>Once you’re logged in, it’s strongly recommended to connect the Kria to the internet via ethernet, it will make uploading files to it much less time consuming (good for repeated tests!);</a:t>
+              <a:rPr lang="it-IT" sz="1500" dirty="0"/>
+              <a:t>Once </a:t>
+            </a:r>
+            <a:r>
+              <a:rPr lang="it-IT" sz="1500" dirty="0" err="1"/>
+              <a:t>logged</a:t>
+            </a:r>
+            <a:r>
+              <a:rPr lang="it-IT" sz="1500" dirty="0"/>
+              <a:t> in, </a:t>
+            </a:r>
+            <a:r>
+              <a:rPr lang="it-IT" sz="1500" dirty="0" err="1"/>
+              <a:t>it’s</a:t>
+            </a:r>
+            <a:r>
+              <a:rPr lang="it-IT" sz="1500" dirty="0"/>
+              <a:t> </a:t>
+            </a:r>
+            <a:r>
+              <a:rPr lang="it-IT" sz="1500" dirty="0" err="1"/>
+              <a:t>strongly</a:t>
+            </a:r>
+            <a:r>
+              <a:rPr lang="it-IT" sz="1500" dirty="0"/>
+              <a:t> </a:t>
+            </a:r>
+            <a:r>
+              <a:rPr lang="it-IT" sz="1500" dirty="0" err="1"/>
+              <a:t>recommended</a:t>
+            </a:r>
+            <a:r>
+              <a:rPr lang="it-IT" sz="1500" dirty="0"/>
+              <a:t> to </a:t>
+            </a:r>
+            <a:r>
+              <a:rPr lang="it-IT" sz="1500" dirty="0" err="1"/>
+              <a:t>connect</a:t>
+            </a:r>
+            <a:r>
+              <a:rPr lang="it-IT" sz="1500" dirty="0"/>
+              <a:t> the </a:t>
+            </a:r>
+            <a:r>
+              <a:rPr lang="it-IT" sz="1500" dirty="0" err="1"/>
+              <a:t>Kria</a:t>
+            </a:r>
+            <a:r>
+              <a:rPr lang="it-IT" sz="1500" dirty="0"/>
+              <a:t> to the internet via ethernet, </a:t>
+            </a:r>
+            <a:r>
+              <a:rPr lang="it-IT" sz="1500" dirty="0" err="1"/>
+              <a:t>it</a:t>
+            </a:r>
+            <a:r>
+              <a:rPr lang="it-IT" sz="1500" dirty="0"/>
+              <a:t> </a:t>
+            </a:r>
+            <a:r>
+              <a:rPr lang="it-IT" sz="1500" dirty="0" err="1"/>
+              <a:t>will</a:t>
+            </a:r>
+            <a:r>
+              <a:rPr lang="it-IT" sz="1500" dirty="0"/>
+              <a:t> make </a:t>
+            </a:r>
+            <a:r>
+              <a:rPr lang="it-IT" sz="1500" dirty="0" err="1"/>
+              <a:t>uploading</a:t>
+            </a:r>
+            <a:r>
+              <a:rPr lang="it-IT" sz="1500" dirty="0"/>
+              <a:t> files to </a:t>
+            </a:r>
+            <a:r>
+              <a:rPr lang="it-IT" sz="1500" dirty="0" err="1"/>
+              <a:t>it</a:t>
+            </a:r>
+            <a:r>
+              <a:rPr lang="it-IT" sz="1500" dirty="0"/>
+              <a:t> </a:t>
+            </a:r>
+            <a:r>
+              <a:rPr lang="it-IT" sz="1500" dirty="0" err="1"/>
+              <a:t>much</a:t>
+            </a:r>
+            <a:r>
+              <a:rPr lang="it-IT" sz="1500" dirty="0"/>
+              <a:t> </a:t>
+            </a:r>
+            <a:r>
+              <a:rPr lang="it-IT" sz="1500" dirty="0" err="1"/>
+              <a:t>less</a:t>
+            </a:r>
+            <a:r>
+              <a:rPr lang="it-IT" sz="1500" dirty="0"/>
+              <a:t> time </a:t>
+            </a:r>
+            <a:r>
+              <a:rPr lang="it-IT" sz="1500" dirty="0" err="1"/>
+              <a:t>consuming</a:t>
+            </a:r>
+            <a:r>
+              <a:rPr lang="it-IT" sz="1500" dirty="0"/>
+              <a:t> (good for </a:t>
+            </a:r>
+            <a:r>
+              <a:rPr lang="it-IT" sz="1500" dirty="0" err="1"/>
+              <a:t>repeated</a:t>
+            </a:r>
+            <a:r>
+              <a:rPr lang="it-IT" sz="1500" dirty="0"/>
+              <a:t> </a:t>
+            </a:r>
+            <a:r>
+              <a:rPr lang="it-IT" sz="1500" dirty="0" err="1"/>
+              <a:t>tests</a:t>
+            </a:r>
+            <a:r>
+              <a:rPr lang="it-IT" sz="1500" dirty="0"/>
+              <a:t>!);</a:t>
             </a:r>
           </a:p>
           <a:p>
@@ -6672,12 +13802,72 @@
               </a:lnSpc>
             </a:pPr>
             <a:r>
-              <a:rPr lang="it-IT" sz="1500"/>
-              <a:t>If you connect to the internet, you can find out your IP address via </a:t>
-            </a:r>
-            <a:r>
-              <a:rPr lang="it-IT" sz="1500" i="1"/>
-              <a:t>ifconfig;</a:t>
+              <a:rPr lang="it-IT" sz="1500" dirty="0" err="1"/>
+              <a:t>If</a:t>
+            </a:r>
+            <a:r>
+              <a:rPr lang="it-IT" sz="1500" dirty="0"/>
+              <a:t> </a:t>
+            </a:r>
+            <a:r>
+              <a:rPr lang="it-IT" sz="1500" dirty="0" err="1"/>
+              <a:t>you</a:t>
+            </a:r>
+            <a:r>
+              <a:rPr lang="it-IT" sz="1500" dirty="0"/>
+              <a:t> </a:t>
+            </a:r>
+            <a:r>
+              <a:rPr lang="it-IT" sz="1500" dirty="0" err="1"/>
+              <a:t>connect</a:t>
+            </a:r>
+            <a:r>
+              <a:rPr lang="it-IT" sz="1500" dirty="0"/>
+              <a:t> to the internet, </a:t>
+            </a:r>
+            <a:r>
+              <a:rPr lang="it-IT" sz="1500" dirty="0" err="1"/>
+              <a:t>you</a:t>
+            </a:r>
+            <a:r>
+              <a:rPr lang="it-IT" sz="1500" dirty="0"/>
+              <a:t> can </a:t>
+            </a:r>
+            <a:r>
+              <a:rPr lang="it-IT" sz="1500" dirty="0" err="1"/>
+              <a:t>find</a:t>
+            </a:r>
+            <a:r>
+              <a:rPr lang="it-IT" sz="1500" dirty="0"/>
+              <a:t> out </a:t>
+            </a:r>
+            <a:r>
+              <a:rPr lang="it-IT" sz="1500" dirty="0" err="1"/>
+              <a:t>your</a:t>
+            </a:r>
+            <a:r>
+              <a:rPr lang="it-IT" sz="1500" dirty="0"/>
+              <a:t> IP </a:t>
+            </a:r>
+            <a:r>
+              <a:rPr lang="it-IT" sz="1500" dirty="0" err="1"/>
+              <a:t>address</a:t>
+            </a:r>
+            <a:r>
+              <a:rPr lang="it-IT" sz="1500" dirty="0"/>
+              <a:t> via </a:t>
+            </a:r>
+            <a:r>
+              <a:rPr lang="it-IT" sz="1500" b="1" i="1" dirty="0" err="1"/>
+              <a:t>ifconfig</a:t>
+            </a:r>
+            <a:r>
+              <a:rPr lang="it-IT" sz="1500" b="1" i="1" dirty="0"/>
+              <a:t> </a:t>
+            </a:r>
+            <a:r>
+              <a:rPr lang="it-IT" sz="1500" i="1" dirty="0"/>
+              <a:t>;</a:t>
             </a:r>
           </a:p>
           <a:p>
@@ -6687,8 +13877,104 @@
               </a:lnSpc>
             </a:pPr>
             <a:r>
-              <a:rPr lang="it-IT" sz="1500"/>
-              <a:t>The Kria’s IP address can be used to connect with PuTTY via Ethernet as well, as it’s a more stable connection than using UART</a:t>
+              <a:rPr lang="it-IT" sz="1500" dirty="0"/>
+              <a:t>The </a:t>
+            </a:r>
+            <a:r>
+              <a:rPr lang="it-IT" sz="1500" dirty="0" err="1"/>
+              <a:t>Kria’s</a:t>
+            </a:r>
+            <a:r>
+              <a:rPr lang="it-IT" sz="1500" dirty="0"/>
+              <a:t> IP </a:t>
+            </a:r>
+            <a:r>
+              <a:rPr lang="it-IT" sz="1500" dirty="0" err="1"/>
+              <a:t>address</a:t>
+            </a:r>
+            <a:r>
+              <a:rPr lang="it-IT" sz="1500" dirty="0"/>
+              <a:t> can be </a:t>
+            </a:r>
+            <a:r>
+              <a:rPr lang="it-IT" sz="1500" dirty="0" err="1"/>
+              <a:t>used</a:t>
+            </a:r>
+            <a:r>
+              <a:rPr lang="it-IT" sz="1500" dirty="0"/>
+              <a:t> to </a:t>
+            </a:r>
+            <a:r>
+              <a:rPr lang="it-IT" sz="1500" dirty="0" err="1"/>
+              <a:t>connect</a:t>
+            </a:r>
+            <a:r>
+              <a:rPr lang="it-IT" sz="1500" dirty="0"/>
+              <a:t> with </a:t>
+            </a:r>
+            <a:r>
+              <a:rPr lang="it-IT" sz="1500" dirty="0" err="1"/>
+              <a:t>PuTTY</a:t>
+            </a:r>
+            <a:r>
+              <a:rPr lang="it-IT" sz="1500" dirty="0"/>
+              <a:t> via Ethernet </a:t>
+            </a:r>
+            <a:r>
+              <a:rPr lang="it-IT" sz="1500" dirty="0" err="1"/>
+              <a:t>as</a:t>
+            </a:r>
+            <a:r>
+              <a:rPr lang="it-IT" sz="1500" dirty="0"/>
+              <a:t> </a:t>
+            </a:r>
+            <a:r>
+              <a:rPr lang="it-IT" sz="1500" dirty="0" err="1"/>
+              <a:t>well</a:t>
+            </a:r>
+            <a:r>
+              <a:rPr lang="it-IT" sz="1500" dirty="0"/>
+              <a:t>, </a:t>
+            </a:r>
+            <a:r>
+              <a:rPr lang="it-IT" sz="1500" dirty="0" err="1"/>
+              <a:t>as</a:t>
+            </a:r>
+            <a:r>
+              <a:rPr lang="it-IT" sz="1500" dirty="0"/>
+              <a:t> </a:t>
+            </a:r>
+            <a:r>
+              <a:rPr lang="it-IT" sz="1500" dirty="0" err="1"/>
+              <a:t>it’s</a:t>
+            </a:r>
+            <a:r>
+              <a:rPr lang="it-IT" sz="1500" dirty="0"/>
+              <a:t> a more </a:t>
+            </a:r>
+            <a:r>
+              <a:rPr lang="it-IT" sz="1500" dirty="0" err="1"/>
+              <a:t>stable</a:t>
+            </a:r>
+            <a:r>
+              <a:rPr lang="it-IT" sz="1500" dirty="0"/>
+              <a:t> connection </a:t>
+            </a:r>
+            <a:r>
+              <a:rPr lang="it-IT" sz="1500" dirty="0" err="1"/>
+              <a:t>than</a:t>
+            </a:r>
+            <a:r>
+              <a:rPr lang="it-IT" sz="1500" dirty="0"/>
+              <a:t> </a:t>
+            </a:r>
+            <a:r>
+              <a:rPr lang="it-IT" sz="1500" dirty="0" err="1"/>
+              <a:t>using</a:t>
+            </a:r>
+            <a:r>
+              <a:rPr lang="it-IT" sz="1500" dirty="0"/>
+              <a:t> UART</a:t>
             </a:r>
           </a:p>
         </p:txBody>
@@ -6708,7 +13994,7 @@
           <p:nvPr/>
         </p:nvPicPr>
         <p:blipFill>
-          <a:blip r:embed="rId2"/>
+          <a:blip r:embed="rId3"/>
           <a:stretch>
             <a:fillRect/>
           </a:stretch>
@@ -6736,7 +14022,299 @@
 </p:sld>
 </file>
 
-<file path=ppt/slides/slide5.xml><?xml version="1.0" encoding="utf-8"?>
+<file path=ppt/slides/slide7.xml><?xml version="1.0" encoding="utf-8"?>
+<p:sld xmlns:a="http://schemas.openxmlformats.org/drawingml/2006/main" xmlns:r="http://schemas.openxmlformats.org/officeDocument/2006/relationships" xmlns:p="http://schemas.openxmlformats.org/presentationml/2006/main">
+  <p:cSld>
+    <p:spTree>
+      <p:nvGrpSpPr>
+        <p:cNvPr id="1" name="">
+          <a:extLst>
+            <a:ext uri="{FF2B5EF4-FFF2-40B4-BE49-F238E27FC236}">
+              <a16:creationId xmlns:a16="http://schemas.microsoft.com/office/drawing/2014/main" id="{6D4D87C7-5D7B-F66D-B31D-39346502130D}"/>
+            </a:ext>
+          </a:extLst>
+        </p:cNvPr>
+        <p:cNvGrpSpPr/>
+        <p:nvPr/>
+      </p:nvGrpSpPr>
+      <p:grpSpPr>
+        <a:xfrm>
+          <a:off x="0" y="0"/>
+          <a:ext cx="0" cy="0"/>
+          <a:chOff x="0" y="0"/>
+          <a:chExt cx="0" cy="0"/>
+        </a:xfrm>
+      </p:grpSpPr>
+      <p:pic>
+        <p:nvPicPr>
+          <p:cNvPr id="5" name="Immagine 4">
+            <a:extLst>
+              <a:ext uri="{FF2B5EF4-FFF2-40B4-BE49-F238E27FC236}">
+                <a16:creationId xmlns:a16="http://schemas.microsoft.com/office/drawing/2014/main" id="{B186A425-2FDE-3133-A821-BE1A95B0A881}"/>
+              </a:ext>
+            </a:extLst>
+          </p:cNvPr>
+          <p:cNvPicPr>
+            <a:picLocks noChangeAspect="1"/>
+          </p:cNvPicPr>
+          <p:nvPr/>
+        </p:nvPicPr>
+        <p:blipFill>
+          <a:blip r:embed="rId3"/>
+          <a:stretch>
+            <a:fillRect/>
+          </a:stretch>
+        </p:blipFill>
+        <p:spPr>
+          <a:xfrm>
+            <a:off x="434441" y="855478"/>
+            <a:ext cx="7287954" cy="5116943"/>
+          </a:xfrm>
+          <a:prstGeom prst="rect">
+            <a:avLst/>
+          </a:prstGeom>
+        </p:spPr>
+      </p:pic>
+      <p:sp>
+        <p:nvSpPr>
+          <p:cNvPr id="3" name="CasellaDiTesto 2">
+            <a:extLst>
+              <a:ext uri="{FF2B5EF4-FFF2-40B4-BE49-F238E27FC236}">
+                <a16:creationId xmlns:a16="http://schemas.microsoft.com/office/drawing/2014/main" id="{A9E9B658-3D5B-FF93-9B0E-8CD941FF1F66}"/>
+              </a:ext>
+            </a:extLst>
+          </p:cNvPr>
+          <p:cNvSpPr txBox="1"/>
+          <p:nvPr/>
+        </p:nvSpPr>
+        <p:spPr>
+          <a:xfrm>
+            <a:off x="8015288" y="2243138"/>
+            <a:ext cx="1728787" cy="646331"/>
+          </a:xfrm>
+          <a:prstGeom prst="rect">
+            <a:avLst/>
+          </a:prstGeom>
+          <a:noFill/>
+        </p:spPr>
+        <p:txBody>
+          <a:bodyPr wrap="square" rtlCol="0">
+            <a:spAutoFit/>
+          </a:bodyPr>
+          <a:lstStyle/>
+          <a:p>
+            <a:r>
+              <a:rPr lang="it-IT" dirty="0"/>
+              <a:t>After login, </a:t>
+            </a:r>
+            <a:r>
+              <a:rPr lang="it-IT" dirty="0" err="1"/>
+              <a:t>we</a:t>
+            </a:r>
+            <a:r>
+              <a:rPr lang="it-IT" dirty="0"/>
+              <a:t> are </a:t>
+            </a:r>
+            <a:r>
+              <a:rPr lang="it-IT" dirty="0" err="1"/>
+              <a:t>here</a:t>
+            </a:r>
+            <a:endParaRPr lang="it-IT" dirty="0"/>
+          </a:p>
+        </p:txBody>
+      </p:sp>
+      <p:cxnSp>
+        <p:nvCxnSpPr>
+          <p:cNvPr id="6" name="Connettore curvo 5">
+            <a:extLst>
+              <a:ext uri="{FF2B5EF4-FFF2-40B4-BE49-F238E27FC236}">
+                <a16:creationId xmlns:a16="http://schemas.microsoft.com/office/drawing/2014/main" id="{C5D3D2D4-C8E2-F055-958F-D7E38DB52E5A}"/>
+              </a:ext>
+            </a:extLst>
+          </p:cNvPr>
+          <p:cNvCxnSpPr>
+            <a:cxnSpLocks/>
+            <a:stCxn id="3" idx="0"/>
+          </p:cNvCxnSpPr>
+          <p:nvPr/>
+        </p:nvCxnSpPr>
+        <p:spPr>
+          <a:xfrm rot="16200000" flipV="1">
+            <a:off x="7797405" y="1160860"/>
+            <a:ext cx="1007269" cy="1157287"/>
+          </a:xfrm>
+          <a:prstGeom prst="curvedConnector2">
+            <a:avLst/>
+          </a:prstGeom>
+          <a:ln>
+            <a:tailEnd type="triangle"/>
+          </a:ln>
+        </p:spPr>
+        <p:style>
+          <a:lnRef idx="1">
+            <a:schemeClr val="dk1"/>
+          </a:lnRef>
+          <a:fillRef idx="0">
+            <a:schemeClr val="dk1"/>
+          </a:fillRef>
+          <a:effectRef idx="0">
+            <a:schemeClr val="dk1"/>
+          </a:effectRef>
+          <a:fontRef idx="minor">
+            <a:schemeClr val="tx1"/>
+          </a:fontRef>
+        </p:style>
+      </p:cxnSp>
+      <p:sp>
+        <p:nvSpPr>
+          <p:cNvPr id="12" name="Rettangolo 11">
+            <a:extLst>
+              <a:ext uri="{FF2B5EF4-FFF2-40B4-BE49-F238E27FC236}">
+                <a16:creationId xmlns:a16="http://schemas.microsoft.com/office/drawing/2014/main" id="{F90FCD08-CEFD-FD63-1F48-89569ED59BCC}"/>
+              </a:ext>
+            </a:extLst>
+          </p:cNvPr>
+          <p:cNvSpPr/>
+          <p:nvPr/>
+        </p:nvSpPr>
+        <p:spPr>
+          <a:xfrm>
+            <a:off x="8015288" y="2243137"/>
+            <a:ext cx="1728787" cy="646331"/>
+          </a:xfrm>
+          <a:prstGeom prst="rect">
+            <a:avLst/>
+          </a:prstGeom>
+          <a:solidFill>
+            <a:schemeClr val="accent2">
+              <a:lumMod val="40000"/>
+              <a:lumOff val="60000"/>
+            </a:schemeClr>
+          </a:solidFill>
+        </p:spPr>
+        <p:style>
+          <a:lnRef idx="2">
+            <a:schemeClr val="accent1">
+              <a:shade val="15000"/>
+            </a:schemeClr>
+          </a:lnRef>
+          <a:fillRef idx="1">
+            <a:schemeClr val="accent1"/>
+          </a:fillRef>
+          <a:effectRef idx="0">
+            <a:schemeClr val="accent1"/>
+          </a:effectRef>
+          <a:fontRef idx="minor">
+            <a:schemeClr val="lt1"/>
+          </a:fontRef>
+        </p:style>
+        <p:txBody>
+          <a:bodyPr rtlCol="0" anchor="ctr"/>
+          <a:lstStyle/>
+          <a:p>
+            <a:pPr algn="ctr"/>
+            <a:endParaRPr lang="it-IT" dirty="0"/>
+          </a:p>
+          <a:p>
+            <a:pPr algn="ctr"/>
+            <a:r>
+              <a:rPr lang="it-IT" dirty="0">
+                <a:ln w="0"/>
+                <a:solidFill>
+                  <a:schemeClr val="tx1"/>
+                </a:solidFill>
+                <a:effectLst>
+                  <a:outerShdw blurRad="38100" dist="19050" dir="2700000" algn="tl" rotWithShape="0">
+                    <a:schemeClr val="dk1">
+                      <a:alpha val="40000"/>
+                    </a:schemeClr>
+                  </a:outerShdw>
+                </a:effectLst>
+              </a:rPr>
+              <a:t>After login, </a:t>
+            </a:r>
+            <a:r>
+              <a:rPr lang="it-IT" dirty="0" err="1">
+                <a:ln w="0"/>
+                <a:solidFill>
+                  <a:schemeClr val="tx1"/>
+                </a:solidFill>
+                <a:effectLst>
+                  <a:outerShdw blurRad="38100" dist="19050" dir="2700000" algn="tl" rotWithShape="0">
+                    <a:schemeClr val="dk1">
+                      <a:alpha val="40000"/>
+                    </a:schemeClr>
+                  </a:outerShdw>
+                </a:effectLst>
+              </a:rPr>
+              <a:t>we</a:t>
+            </a:r>
+            <a:r>
+              <a:rPr lang="it-IT" dirty="0">
+                <a:ln w="0"/>
+                <a:solidFill>
+                  <a:schemeClr val="tx1"/>
+                </a:solidFill>
+                <a:effectLst>
+                  <a:outerShdw blurRad="38100" dist="19050" dir="2700000" algn="tl" rotWithShape="0">
+                    <a:schemeClr val="dk1">
+                      <a:alpha val="40000"/>
+                    </a:schemeClr>
+                  </a:outerShdw>
+                </a:effectLst>
+              </a:rPr>
+              <a:t> are </a:t>
+            </a:r>
+            <a:r>
+              <a:rPr lang="it-IT" dirty="0" err="1">
+                <a:ln w="0"/>
+                <a:solidFill>
+                  <a:schemeClr val="tx1"/>
+                </a:solidFill>
+                <a:effectLst>
+                  <a:outerShdw blurRad="38100" dist="19050" dir="2700000" algn="tl" rotWithShape="0">
+                    <a:schemeClr val="dk1">
+                      <a:alpha val="40000"/>
+                    </a:schemeClr>
+                  </a:outerShdw>
+                </a:effectLst>
+              </a:rPr>
+              <a:t>here</a:t>
+            </a:r>
+            <a:endParaRPr lang="it-IT" dirty="0">
+              <a:ln w="0"/>
+              <a:solidFill>
+                <a:schemeClr val="tx1"/>
+              </a:solidFill>
+              <a:effectLst>
+                <a:outerShdw blurRad="38100" dist="19050" dir="2700000" algn="tl" rotWithShape="0">
+                  <a:schemeClr val="dk1">
+                    <a:alpha val="40000"/>
+                  </a:schemeClr>
+                </a:outerShdw>
+              </a:effectLst>
+            </a:endParaRPr>
+          </a:p>
+          <a:p>
+            <a:pPr algn="ctr"/>
+            <a:endParaRPr lang="it-IT" dirty="0"/>
+          </a:p>
+        </p:txBody>
+      </p:sp>
+    </p:spTree>
+    <p:extLst>
+      <p:ext uri="{BB962C8B-B14F-4D97-AF65-F5344CB8AC3E}">
+        <p14:creationId xmlns:p14="http://schemas.microsoft.com/office/powerpoint/2010/main" val="3272789794"/>
+      </p:ext>
+    </p:extLst>
+  </p:cSld>
+  <p:clrMapOvr>
+    <a:masterClrMapping/>
+  </p:clrMapOvr>
+</p:sld>
+</file>
+
+<file path=ppt/slides/slide8.xml><?xml version="1.0" encoding="utf-8"?>
 <p:sld xmlns:a="http://schemas.openxmlformats.org/drawingml/2006/main" xmlns:r="http://schemas.openxmlformats.org/officeDocument/2006/relationships" xmlns:p="http://schemas.openxmlformats.org/presentationml/2006/main">
   <p:cSld>
     <p:spTree>
@@ -6834,19 +14412,11 @@
             </a:r>
             <a:r>
               <a:rPr lang="it-IT" dirty="0" err="1"/>
-              <a:t>you</a:t>
-            </a:r>
-            <a:r>
-              <a:rPr lang="it-IT" dirty="0"/>
-              <a:t> </a:t>
-            </a:r>
-            <a:r>
-              <a:rPr lang="it-IT" dirty="0" err="1"/>
-              <a:t>have</a:t>
-            </a:r>
-            <a:r>
-              <a:rPr lang="it-IT" dirty="0"/>
-              <a:t> </a:t>
+              <a:t>there</a:t>
+            </a:r>
+            <a:r>
+              <a:rPr lang="it-IT" dirty="0"/>
+              <a:t> are </a:t>
             </a:r>
             <a:r>
               <a:rPr lang="it-IT" dirty="0" err="1"/>
@@ -7198,48 +14768,48 @@
               <a:t> </a:t>
             </a:r>
             <a:r>
-              <a:rPr lang="it-IT" i="1" dirty="0"/>
+              <a:rPr lang="it-IT" b="1" i="1" dirty="0"/>
               <a:t>sudo </a:t>
             </a:r>
             <a:r>
-              <a:rPr lang="it-IT" i="1" dirty="0" err="1"/>
+              <a:rPr lang="it-IT" b="1" i="1" dirty="0" err="1"/>
               <a:t>apt</a:t>
+            </a:r>
+            <a:r>
+              <a:rPr lang="it-IT" b="1" i="1" dirty="0"/>
+              <a:t> </a:t>
+            </a:r>
+            <a:r>
+              <a:rPr lang="it-IT" b="1" i="1" dirty="0" err="1"/>
+              <a:t>install</a:t>
+            </a:r>
+            <a:r>
+              <a:rPr lang="it-IT" b="1" i="1" dirty="0"/>
+              <a:t> </a:t>
+            </a:r>
+            <a:r>
+              <a:rPr lang="it-IT" b="1" i="1" dirty="0" err="1"/>
+              <a:t>git</a:t>
             </a:r>
             <a:r>
               <a:rPr lang="it-IT" i="1" dirty="0"/>
               <a:t> </a:t>
             </a:r>
             <a:r>
-              <a:rPr lang="it-IT" i="1" dirty="0" err="1"/>
-              <a:t>install</a:t>
-            </a:r>
-            <a:r>
-              <a:rPr lang="it-IT" i="1" dirty="0"/>
-              <a:t> </a:t>
-            </a:r>
-            <a:r>
-              <a:rPr lang="it-IT" i="1" dirty="0" err="1"/>
+              <a:rPr lang="it-IT" dirty="0"/>
+              <a:t>and </a:t>
+            </a:r>
+            <a:r>
+              <a:rPr lang="it-IT" b="1" i="1" dirty="0" err="1"/>
               <a:t>git</a:t>
             </a:r>
             <a:r>
-              <a:rPr lang="it-IT" i="1" dirty="0"/>
-              <a:t> </a:t>
-            </a:r>
-            <a:r>
-              <a:rPr lang="it-IT" dirty="0"/>
-              <a:t>and </a:t>
-            </a:r>
-            <a:r>
-              <a:rPr lang="it-IT" i="1" dirty="0" err="1"/>
-              <a:t>git</a:t>
-            </a:r>
-            <a:r>
-              <a:rPr lang="it-IT" i="1" dirty="0"/>
+              <a:rPr lang="it-IT" b="1" i="1" dirty="0"/>
               <a:t> clone </a:t>
             </a:r>
             <a:r>
-              <a:rPr lang="it-IT" i="1" dirty="0">
-                <a:hlinkClick r:id="rId2"/>
+              <a:rPr lang="it-IT" b="1" i="1" dirty="0">
+                <a:hlinkClick r:id="rId3"/>
               </a:rPr>
               <a:t>https://github.com/mdc-suite/AXI-based-drivers</a:t>
             </a:r>
@@ -7299,16 +14869,20 @@
               <a:t> </a:t>
             </a:r>
             <a:r>
+              <a:rPr lang="it-IT" b="1" i="1" dirty="0"/>
+              <a:t>sudo </a:t>
+            </a:r>
+            <a:r>
+              <a:rPr lang="it-IT" b="1" i="1" dirty="0" err="1"/>
+              <a:t>bash</a:t>
+            </a:r>
+            <a:r>
+              <a:rPr lang="it-IT" b="1" i="1" dirty="0"/>
+              <a:t> install_libs.sh</a:t>
+            </a:r>
+            <a:r>
               <a:rPr lang="it-IT" i="1" dirty="0"/>
-              <a:t>sudo </a:t>
-            </a:r>
-            <a:r>
-              <a:rPr lang="it-IT" i="1" dirty="0" err="1"/>
-              <a:t>bash</a:t>
-            </a:r>
-            <a:r>
-              <a:rPr lang="it-IT" i="1" dirty="0"/>
-              <a:t> install_libs.sh </a:t>
+              <a:t> </a:t>
             </a:r>
             <a:r>
               <a:rPr lang="it-IT" dirty="0" err="1"/>
@@ -7377,7 +14951,7 @@
 </p:sld>
 </file>
 
-<file path=ppt/slides/slide6.xml><?xml version="1.0" encoding="utf-8"?>
+<file path=ppt/slides/slide9.xml><?xml version="1.0" encoding="utf-8"?>
 <p:sld xmlns:a="http://schemas.openxmlformats.org/drawingml/2006/main" xmlns:r="http://schemas.openxmlformats.org/officeDocument/2006/relationships" xmlns:p="http://schemas.openxmlformats.org/presentationml/2006/main">
   <p:cSld>
     <p:spTree>
@@ -7483,8 +15057,12 @@
               <a:t> </a:t>
             </a:r>
             <a:r>
+              <a:rPr lang="it-IT" b="1" i="1" dirty="0"/>
+              <a:t>make</a:t>
+            </a:r>
+            <a:r>
               <a:rPr lang="it-IT" i="1" dirty="0"/>
-              <a:t>make </a:t>
+              <a:t> </a:t>
             </a:r>
             <a:r>
               <a:rPr lang="it-IT" dirty="0"/>
@@ -7505,19 +15083,19 @@
               <a:t>sudo </a:t>
             </a:r>
             <a:r>
-              <a:rPr lang="it-IT" i="1" dirty="0" err="1"/>
+              <a:rPr lang="it-IT" b="1" i="1" dirty="0" err="1"/>
               <a:t>insmod</a:t>
             </a:r>
             <a:r>
-              <a:rPr lang="it-IT" i="1" dirty="0"/>
+              <a:rPr lang="it-IT" b="1" i="1" dirty="0"/>
               <a:t> </a:t>
             </a:r>
             <a:r>
-              <a:rPr lang="it-IT" i="1" dirty="0" err="1"/>
+              <a:rPr lang="it-IT" b="1" i="1" dirty="0" err="1"/>
               <a:t>axidma.ko</a:t>
             </a:r>
             <a:r>
-              <a:rPr lang="it-IT" i="1" dirty="0"/>
+              <a:rPr lang="it-IT" b="1" i="1" dirty="0"/>
               <a:t> </a:t>
             </a:r>
             <a:r>
@@ -7567,15 +15145,15 @@
               <a:t> </a:t>
             </a:r>
             <a:r>
-              <a:rPr lang="it-IT" i="1" dirty="0"/>
+              <a:rPr lang="it-IT" b="1" i="1" dirty="0"/>
               <a:t>sudo </a:t>
             </a:r>
             <a:r>
-              <a:rPr lang="it-IT" i="1" dirty="0" err="1"/>
+              <a:rPr lang="it-IT" b="1" i="1" dirty="0" err="1"/>
               <a:t>dmesg</a:t>
             </a:r>
             <a:r>
-              <a:rPr lang="it-IT" i="1" dirty="0"/>
+              <a:rPr lang="it-IT" b="1" i="1" dirty="0"/>
               <a:t> </a:t>
             </a:r>
             <a:r>
@@ -7610,267 +15188,81 @@
               <a:rPr lang="it-IT" dirty="0"/>
               <a:t> logs;</a:t>
             </a:r>
-          </a:p>
-          <a:p>
-            <a:r>
-              <a:rPr lang="it-IT" dirty="0" err="1"/>
-              <a:t>Run</a:t>
-            </a:r>
-            <a:r>
-              <a:rPr lang="it-IT" dirty="0"/>
-              <a:t> </a:t>
-            </a:r>
-            <a:r>
-              <a:rPr lang="it-IT" i="1" dirty="0"/>
-              <a:t>sudo </a:t>
-            </a:r>
-            <a:r>
-              <a:rPr lang="it-IT" i="1" dirty="0" err="1"/>
-              <a:t>fpgautil</a:t>
-            </a:r>
-            <a:r>
-              <a:rPr lang="it-IT" i="1" dirty="0"/>
-              <a:t> –b aes256_dma.bin</a:t>
-            </a:r>
-            <a:r>
-              <a:rPr lang="it-IT" dirty="0"/>
-              <a:t> to load the bitstream;</a:t>
-            </a:r>
-          </a:p>
-          <a:p>
-            <a:r>
-              <a:rPr lang="it-IT" dirty="0" err="1"/>
-              <a:t>Run</a:t>
-            </a:r>
-            <a:r>
-              <a:rPr lang="it-IT" dirty="0"/>
-              <a:t> </a:t>
-            </a:r>
-            <a:r>
-              <a:rPr lang="it-IT" i="1" dirty="0" err="1"/>
-              <a:t>dtc</a:t>
-            </a:r>
-            <a:r>
-              <a:rPr lang="it-IT" i="1" dirty="0"/>
-              <a:t> –i </a:t>
-            </a:r>
-            <a:r>
-              <a:rPr lang="it-IT" i="1" dirty="0" err="1"/>
-              <a:t>pl.dtsi</a:t>
-            </a:r>
-            <a:r>
-              <a:rPr lang="it-IT" i="1" dirty="0"/>
-              <a:t> –o </a:t>
-            </a:r>
-            <a:r>
-              <a:rPr lang="it-IT" i="1" dirty="0" err="1"/>
-              <a:t>pl.dtbo</a:t>
-            </a:r>
-            <a:r>
-              <a:rPr lang="it-IT" i="1" dirty="0"/>
-              <a:t> -@ </a:t>
-            </a:r>
-            <a:r>
-              <a:rPr lang="it-IT" dirty="0"/>
-              <a:t>to compile the device-</a:t>
-            </a:r>
-            <a:r>
-              <a:rPr lang="it-IT" dirty="0" err="1"/>
-              <a:t>tree</a:t>
-            </a:r>
-            <a:r>
-              <a:rPr lang="it-IT" dirty="0"/>
-              <a:t> overlay;</a:t>
-            </a:r>
-          </a:p>
-          <a:p>
-            <a:r>
-              <a:rPr lang="it-IT" dirty="0" err="1"/>
-              <a:t>Run</a:t>
-            </a:r>
-            <a:r>
-              <a:rPr lang="it-IT" dirty="0"/>
-              <a:t> </a:t>
-            </a:r>
-            <a:r>
-              <a:rPr lang="it-IT" i="1" dirty="0"/>
-              <a:t>sudo </a:t>
-            </a:r>
-            <a:r>
-              <a:rPr lang="it-IT" i="1" dirty="0" err="1"/>
-              <a:t>fpgautil</a:t>
-            </a:r>
-            <a:r>
-              <a:rPr lang="it-IT" i="1" dirty="0"/>
-              <a:t> –o </a:t>
-            </a:r>
-            <a:r>
-              <a:rPr lang="it-IT" i="1" dirty="0" err="1"/>
-              <a:t>pl.dtbo</a:t>
-            </a:r>
-            <a:r>
-              <a:rPr lang="it-IT" dirty="0"/>
-              <a:t> to </a:t>
-            </a:r>
-            <a:r>
-              <a:rPr lang="it-IT" dirty="0" err="1"/>
-              <a:t>insert</a:t>
-            </a:r>
-            <a:r>
-              <a:rPr lang="it-IT" dirty="0"/>
-              <a:t> the overlay;</a:t>
-            </a:r>
-          </a:p>
-          <a:p>
-            <a:r>
-              <a:rPr lang="it-IT" dirty="0" err="1"/>
-              <a:t>Run</a:t>
-            </a:r>
-            <a:r>
-              <a:rPr lang="it-IT" dirty="0"/>
-              <a:t> </a:t>
-            </a:r>
-            <a:r>
-              <a:rPr lang="it-IT" i="1" dirty="0"/>
-              <a:t>sudo </a:t>
-            </a:r>
-            <a:r>
-              <a:rPr lang="it-IT" i="1" dirty="0" err="1"/>
-              <a:t>dmesg</a:t>
-            </a:r>
-            <a:r>
-              <a:rPr lang="it-IT" dirty="0"/>
-              <a:t> </a:t>
-            </a:r>
-            <a:r>
-              <a:rPr lang="it-IT" dirty="0" err="1"/>
-              <a:t>again</a:t>
-            </a:r>
-            <a:r>
-              <a:rPr lang="it-IT" dirty="0"/>
-              <a:t>: </a:t>
-            </a:r>
-            <a:r>
-              <a:rPr lang="it-IT" dirty="0" err="1"/>
-              <a:t>you</a:t>
-            </a:r>
-            <a:r>
-              <a:rPr lang="it-IT" dirty="0"/>
-              <a:t> </a:t>
-            </a:r>
-            <a:r>
-              <a:rPr lang="it-IT" dirty="0" err="1"/>
-              <a:t>should</a:t>
-            </a:r>
-            <a:r>
-              <a:rPr lang="it-IT" dirty="0"/>
-              <a:t> </a:t>
-            </a:r>
-            <a:r>
-              <a:rPr lang="it-IT" dirty="0" err="1"/>
-              <a:t>see</a:t>
-            </a:r>
-            <a:r>
-              <a:rPr lang="it-IT" dirty="0"/>
-              <a:t> </a:t>
-            </a:r>
-            <a:r>
-              <a:rPr lang="it-IT" dirty="0" err="1"/>
-              <a:t>that</a:t>
-            </a:r>
-            <a:r>
-              <a:rPr lang="it-IT" dirty="0"/>
-              <a:t> the driver </a:t>
-            </a:r>
-            <a:r>
-              <a:rPr lang="it-IT" dirty="0" err="1"/>
-              <a:t>has</a:t>
-            </a:r>
-            <a:r>
-              <a:rPr lang="it-IT" dirty="0"/>
-              <a:t> </a:t>
-            </a:r>
-            <a:r>
-              <a:rPr lang="it-IT" dirty="0" err="1"/>
-              <a:t>detected</a:t>
-            </a:r>
-            <a:r>
-              <a:rPr lang="it-IT" dirty="0"/>
-              <a:t> the overlay;</a:t>
-            </a:r>
-          </a:p>
-          <a:p>
-            <a:r>
-              <a:rPr lang="it-IT" dirty="0"/>
-              <a:t>Compile </a:t>
-            </a:r>
-            <a:r>
-              <a:rPr lang="it-IT" i="1" dirty="0" err="1"/>
-              <a:t>dma_test.c</a:t>
-            </a:r>
-            <a:r>
-              <a:rPr lang="it-IT" i="1" dirty="0"/>
-              <a:t> </a:t>
-            </a:r>
-            <a:r>
-              <a:rPr lang="it-IT" dirty="0"/>
-              <a:t>with </a:t>
-            </a:r>
-            <a:r>
-              <a:rPr lang="it-IT" i="1" dirty="0" err="1"/>
-              <a:t>gcc</a:t>
-            </a:r>
-            <a:r>
-              <a:rPr lang="it-IT" i="1" dirty="0"/>
-              <a:t> </a:t>
-            </a:r>
-            <a:r>
-              <a:rPr lang="it-IT" i="1" dirty="0" err="1"/>
-              <a:t>dma_test.c</a:t>
-            </a:r>
-            <a:r>
-              <a:rPr lang="it-IT" i="1" dirty="0"/>
-              <a:t> –o </a:t>
-            </a:r>
-            <a:r>
-              <a:rPr lang="it-IT" i="1" dirty="0" err="1"/>
-              <a:t>dma_test</a:t>
-            </a:r>
-            <a:r>
-              <a:rPr lang="it-IT" i="1" dirty="0"/>
-              <a:t>;</a:t>
-            </a:r>
-          </a:p>
-          <a:p>
-            <a:r>
-              <a:rPr lang="it-IT" dirty="0" err="1"/>
-              <a:t>Run</a:t>
-            </a:r>
-            <a:r>
-              <a:rPr lang="it-IT" dirty="0"/>
-              <a:t> the test with </a:t>
-            </a:r>
-            <a:r>
-              <a:rPr lang="it-IT" i="1" dirty="0"/>
-              <a:t>./</a:t>
-            </a:r>
-            <a:r>
-              <a:rPr lang="it-IT" i="1" dirty="0" err="1"/>
-              <a:t>dma_test</a:t>
-            </a:r>
-            <a:endParaRPr lang="it-IT" i="1" dirty="0"/>
           </a:p>
           <a:p>
             <a:pPr marL="0" indent="0">
               <a:buNone/>
             </a:pPr>
-            <a:r>
-              <a:rPr lang="it-IT" dirty="0"/>
-              <a:t>(</a:t>
-            </a:r>
-            <a:r>
-              <a:rPr lang="it-IT" dirty="0" err="1"/>
-              <a:t>if</a:t>
+            <a:endParaRPr lang="it-IT" dirty="0"/>
+          </a:p>
+        </p:txBody>
+      </p:sp>
+      <p:pic>
+        <p:nvPicPr>
+          <p:cNvPr id="5" name="Immagine 4">
+            <a:extLst>
+              <a:ext uri="{FF2B5EF4-FFF2-40B4-BE49-F238E27FC236}">
+                <a16:creationId xmlns:a16="http://schemas.microsoft.com/office/drawing/2014/main" id="{7EF3CF6B-EE5A-EBCF-488A-65BA17A4F149}"/>
+              </a:ext>
+            </a:extLst>
+          </p:cNvPr>
+          <p:cNvPicPr>
+            <a:picLocks noChangeAspect="1"/>
+          </p:cNvPicPr>
+          <p:nvPr/>
+        </p:nvPicPr>
+        <p:blipFill>
+          <a:blip r:embed="rId3"/>
+          <a:stretch>
+            <a:fillRect/>
+          </a:stretch>
+        </p:blipFill>
+        <p:spPr>
+          <a:xfrm>
+            <a:off x="677334" y="3228975"/>
+            <a:ext cx="4896289" cy="3437732"/>
+          </a:xfrm>
+          <a:prstGeom prst="rect">
+            <a:avLst/>
+          </a:prstGeom>
+        </p:spPr>
+      </p:pic>
+      <p:sp>
+        <p:nvSpPr>
+          <p:cNvPr id="6" name="CasellaDiTesto 5">
+            <a:extLst>
+              <a:ext uri="{FF2B5EF4-FFF2-40B4-BE49-F238E27FC236}">
+                <a16:creationId xmlns:a16="http://schemas.microsoft.com/office/drawing/2014/main" id="{96969764-3ADE-7749-81E9-7E369E9092DA}"/>
+              </a:ext>
+            </a:extLst>
+          </p:cNvPr>
+          <p:cNvSpPr txBox="1"/>
+          <p:nvPr/>
+        </p:nvSpPr>
+        <p:spPr>
+          <a:xfrm>
+            <a:off x="6436518" y="3781208"/>
+            <a:ext cx="1850231" cy="646331"/>
+          </a:xfrm>
+          <a:prstGeom prst="rect">
+            <a:avLst/>
+          </a:prstGeom>
+          <a:noFill/>
+        </p:spPr>
+        <p:txBody>
+          <a:bodyPr wrap="square" rtlCol="0">
+            <a:spAutoFit/>
+          </a:bodyPr>
+          <a:lstStyle/>
+          <a:p>
+            <a:pPr algn="ctr"/>
+            <a:r>
+              <a:rPr lang="it-IT" dirty="0"/>
+              <a:t>Driver </a:t>
+            </a:r>
+            <a:r>
+              <a:rPr lang="it-IT" dirty="0" err="1"/>
+              <a:t>is</a:t>
             </a:r>
             <a:r>
               <a:rPr lang="it-IT" dirty="0"/>
@@ -7878,15 +15270,7 @@
             </a:r>
             <a:r>
               <a:rPr lang="it-IT" dirty="0" err="1"/>
-              <a:t>your</a:t>
-            </a:r>
-            <a:r>
-              <a:rPr lang="it-IT" dirty="0"/>
-              <a:t> hardware </a:t>
-            </a:r>
-            <a:r>
-              <a:rPr lang="it-IT" dirty="0" err="1"/>
-              <a:t>changes</a:t>
+              <a:t>inserted</a:t>
             </a:r>
             <a:r>
               <a:rPr lang="it-IT" dirty="0"/>
@@ -7894,60 +15278,221 @@
             </a:r>
             <a:r>
               <a:rPr lang="it-IT" dirty="0" err="1"/>
-              <a:t>you</a:t>
-            </a:r>
-            <a:r>
-              <a:rPr lang="it-IT" dirty="0"/>
+              <a:t>here</a:t>
+            </a:r>
+            <a:endParaRPr lang="it-IT" dirty="0"/>
+          </a:p>
+        </p:txBody>
+      </p:sp>
+      <p:cxnSp>
+        <p:nvCxnSpPr>
+          <p:cNvPr id="11" name="Connettore curvo 10">
+            <a:extLst>
+              <a:ext uri="{FF2B5EF4-FFF2-40B4-BE49-F238E27FC236}">
+                <a16:creationId xmlns:a16="http://schemas.microsoft.com/office/drawing/2014/main" id="{9F2BCD0F-B64E-0949-8E15-E6BD3D8D4FB0}"/>
+              </a:ext>
+            </a:extLst>
+          </p:cNvPr>
+          <p:cNvCxnSpPr>
+            <a:stCxn id="6" idx="2"/>
+          </p:cNvCxnSpPr>
+          <p:nvPr/>
+        </p:nvCxnSpPr>
+        <p:spPr>
+          <a:xfrm rot="5400000">
+            <a:off x="5394525" y="3640734"/>
+            <a:ext cx="1180305" cy="2753915"/>
+          </a:xfrm>
+          <a:prstGeom prst="curvedConnector2">
+            <a:avLst/>
+          </a:prstGeom>
+          <a:ln>
+            <a:solidFill>
+              <a:schemeClr val="tx1"/>
+            </a:solidFill>
+            <a:tailEnd type="triangle"/>
+          </a:ln>
+        </p:spPr>
+        <p:style>
+          <a:lnRef idx="1">
+            <a:schemeClr val="accent1"/>
+          </a:lnRef>
+          <a:fillRef idx="0">
+            <a:schemeClr val="accent1"/>
+          </a:fillRef>
+          <a:effectRef idx="0">
+            <a:schemeClr val="accent1"/>
+          </a:effectRef>
+          <a:fontRef idx="minor">
+            <a:schemeClr val="tx1"/>
+          </a:fontRef>
+        </p:style>
+      </p:cxnSp>
+      <p:sp>
+        <p:nvSpPr>
+          <p:cNvPr id="12" name="Rettangolo 11">
+            <a:extLst>
+              <a:ext uri="{FF2B5EF4-FFF2-40B4-BE49-F238E27FC236}">
+                <a16:creationId xmlns:a16="http://schemas.microsoft.com/office/drawing/2014/main" id="{E7BD416B-FAC6-EE0C-38B8-7E5BAB1CBC47}"/>
+              </a:ext>
+            </a:extLst>
+          </p:cNvPr>
+          <p:cNvSpPr/>
+          <p:nvPr/>
+        </p:nvSpPr>
+        <p:spPr>
+          <a:xfrm>
+            <a:off x="6497239" y="3770715"/>
+            <a:ext cx="1728787" cy="646331"/>
+          </a:xfrm>
+          <a:prstGeom prst="rect">
+            <a:avLst/>
+          </a:prstGeom>
+          <a:solidFill>
+            <a:schemeClr val="accent2">
+              <a:lumMod val="40000"/>
+              <a:lumOff val="60000"/>
+            </a:schemeClr>
+          </a:solidFill>
+        </p:spPr>
+        <p:style>
+          <a:lnRef idx="2">
+            <a:schemeClr val="accent1">
+              <a:shade val="15000"/>
+            </a:schemeClr>
+          </a:lnRef>
+          <a:fillRef idx="1">
+            <a:schemeClr val="accent1"/>
+          </a:fillRef>
+          <a:effectRef idx="0">
+            <a:schemeClr val="accent1"/>
+          </a:effectRef>
+          <a:fontRef idx="minor">
+            <a:schemeClr val="lt1"/>
+          </a:fontRef>
+        </p:style>
+        <p:txBody>
+          <a:bodyPr rtlCol="0" anchor="ctr"/>
+          <a:lstStyle/>
+          <a:p>
+            <a:pPr algn="ctr"/>
+            <a:endParaRPr lang="it-IT" dirty="0"/>
+          </a:p>
+          <a:p>
+            <a:pPr algn="ctr"/>
+            <a:r>
+              <a:rPr lang="it-IT" dirty="0">
+                <a:ln w="0"/>
+                <a:solidFill>
+                  <a:schemeClr val="tx1"/>
+                </a:solidFill>
+                <a:effectLst>
+                  <a:outerShdw blurRad="38100" dist="19050" dir="2700000" algn="tl" rotWithShape="0">
+                    <a:schemeClr val="dk1">
+                      <a:alpha val="40000"/>
+                    </a:schemeClr>
+                  </a:outerShdw>
+                </a:effectLst>
+              </a:rPr>
+              <a:t>Driver </a:t>
+            </a:r>
+            <a:r>
+              <a:rPr lang="it-IT" dirty="0" err="1">
+                <a:ln w="0"/>
+                <a:solidFill>
+                  <a:schemeClr val="tx1"/>
+                </a:solidFill>
+                <a:effectLst>
+                  <a:outerShdw blurRad="38100" dist="19050" dir="2700000" algn="tl" rotWithShape="0">
+                    <a:schemeClr val="dk1">
+                      <a:alpha val="40000"/>
+                    </a:schemeClr>
+                  </a:outerShdw>
+                </a:effectLst>
+              </a:rPr>
+              <a:t>is</a:t>
+            </a:r>
+            <a:r>
+              <a:rPr lang="it-IT" dirty="0">
+                <a:ln w="0"/>
+                <a:solidFill>
+                  <a:schemeClr val="tx1"/>
+                </a:solidFill>
+                <a:effectLst>
+                  <a:outerShdw blurRad="38100" dist="19050" dir="2700000" algn="tl" rotWithShape="0">
+                    <a:schemeClr val="dk1">
+                      <a:alpha val="40000"/>
+                    </a:schemeClr>
+                  </a:outerShdw>
+                </a:effectLst>
+              </a:rPr>
               <a:t> </a:t>
             </a:r>
             <a:r>
-              <a:rPr lang="it-IT" dirty="0" err="1"/>
-              <a:t>also</a:t>
-            </a:r>
-            <a:r>
-              <a:rPr lang="it-IT" dirty="0"/>
+              <a:rPr lang="it-IT" dirty="0" err="1">
+                <a:ln w="0"/>
+                <a:solidFill>
+                  <a:schemeClr val="tx1"/>
+                </a:solidFill>
+                <a:effectLst>
+                  <a:outerShdw blurRad="38100" dist="19050" dir="2700000" algn="tl" rotWithShape="0">
+                    <a:schemeClr val="dk1">
+                      <a:alpha val="40000"/>
+                    </a:schemeClr>
+                  </a:outerShdw>
+                </a:effectLst>
+              </a:rPr>
+              <a:t>inserted</a:t>
+            </a:r>
+            <a:r>
+              <a:rPr lang="it-IT" dirty="0">
+                <a:ln w="0"/>
+                <a:solidFill>
+                  <a:schemeClr val="tx1"/>
+                </a:solidFill>
+                <a:effectLst>
+                  <a:outerShdw blurRad="38100" dist="19050" dir="2700000" algn="tl" rotWithShape="0">
+                    <a:schemeClr val="dk1">
+                      <a:alpha val="40000"/>
+                    </a:schemeClr>
+                  </a:outerShdw>
+                </a:effectLst>
+              </a:rPr>
               <a:t> </a:t>
             </a:r>
             <a:r>
-              <a:rPr lang="it-IT" dirty="0" err="1"/>
-              <a:t>have</a:t>
-            </a:r>
-            <a:r>
-              <a:rPr lang="it-IT" dirty="0"/>
-              <a:t> to </a:t>
-            </a:r>
-            <a:r>
-              <a:rPr lang="it-IT" dirty="0" err="1"/>
-              <a:t>change</a:t>
-            </a:r>
-            <a:r>
-              <a:rPr lang="it-IT" dirty="0"/>
-              <a:t> the device-</a:t>
-            </a:r>
-            <a:r>
-              <a:rPr lang="it-IT" dirty="0" err="1"/>
-              <a:t>tree</a:t>
-            </a:r>
-            <a:r>
-              <a:rPr lang="it-IT" dirty="0"/>
-              <a:t> overlay to match </a:t>
-            </a:r>
-            <a:r>
-              <a:rPr lang="it-IT" dirty="0" err="1"/>
-              <a:t>it</a:t>
-            </a:r>
-            <a:r>
-              <a:rPr lang="it-IT" dirty="0"/>
-              <a:t>, </a:t>
-            </a:r>
-            <a:r>
-              <a:rPr lang="it-IT" dirty="0" err="1"/>
-              <a:t>instructions</a:t>
-            </a:r>
-            <a:r>
-              <a:rPr lang="it-IT" dirty="0"/>
-              <a:t> are in the repository README)</a:t>
-            </a:r>
+              <a:rPr lang="it-IT" dirty="0" err="1">
+                <a:ln w="0"/>
+                <a:solidFill>
+                  <a:schemeClr val="tx1"/>
+                </a:solidFill>
+                <a:effectLst>
+                  <a:outerShdw blurRad="38100" dist="19050" dir="2700000" algn="tl" rotWithShape="0">
+                    <a:schemeClr val="dk1">
+                      <a:alpha val="40000"/>
+                    </a:schemeClr>
+                  </a:outerShdw>
+                </a:effectLst>
+              </a:rPr>
+              <a:t>here</a:t>
+            </a:r>
+            <a:endParaRPr lang="it-IT" dirty="0">
+              <a:ln w="0"/>
+              <a:solidFill>
+                <a:schemeClr val="tx1"/>
+              </a:solidFill>
+              <a:effectLst>
+                <a:outerShdw blurRad="38100" dist="19050" dir="2700000" algn="tl" rotWithShape="0">
+                  <a:schemeClr val="dk1">
+                    <a:alpha val="40000"/>
+                  </a:schemeClr>
+                </a:outerShdw>
+              </a:effectLst>
+            </a:endParaRPr>
+          </a:p>
+          <a:p>
+            <a:pPr algn="ctr"/>
+            <a:endParaRPr lang="it-IT" dirty="0"/>
           </a:p>
         </p:txBody>
       </p:sp>
@@ -7955,187 +15500,6 @@
     <p:extLst>
       <p:ext uri="{BB962C8B-B14F-4D97-AF65-F5344CB8AC3E}">
         <p14:creationId xmlns:p14="http://schemas.microsoft.com/office/powerpoint/2010/main" val="3419111887"/>
-      </p:ext>
-    </p:extLst>
-  </p:cSld>
-  <p:clrMapOvr>
-    <a:masterClrMapping/>
-  </p:clrMapOvr>
-</p:sld>
-</file>
-
-<file path=ppt/slides/slide7.xml><?xml version="1.0" encoding="utf-8"?>
-<p:sld xmlns:a="http://schemas.openxmlformats.org/drawingml/2006/main" xmlns:r="http://schemas.openxmlformats.org/officeDocument/2006/relationships" xmlns:p="http://schemas.openxmlformats.org/presentationml/2006/main">
-  <p:cSld>
-    <p:spTree>
-      <p:nvGrpSpPr>
-        <p:cNvPr id="1" name=""/>
-        <p:cNvGrpSpPr/>
-        <p:nvPr/>
-      </p:nvGrpSpPr>
-      <p:grpSpPr>
-        <a:xfrm>
-          <a:off x="0" y="0"/>
-          <a:ext cx="0" cy="0"/>
-          <a:chOff x="0" y="0"/>
-          <a:chExt cx="0" cy="0"/>
-        </a:xfrm>
-      </p:grpSpPr>
-      <p:sp>
-        <p:nvSpPr>
-          <p:cNvPr id="2" name="Titolo 1">
-            <a:extLst>
-              <a:ext uri="{FF2B5EF4-FFF2-40B4-BE49-F238E27FC236}">
-                <a16:creationId xmlns:a16="http://schemas.microsoft.com/office/drawing/2014/main" id="{8F07F4C8-D44F-886C-CB1A-0B274707B47F}"/>
-              </a:ext>
-            </a:extLst>
-          </p:cNvPr>
-          <p:cNvSpPr>
-            <a:spLocks noGrp="1"/>
-          </p:cNvSpPr>
-          <p:nvPr>
-            <p:ph type="title"/>
-          </p:nvPr>
-        </p:nvSpPr>
-        <p:spPr/>
-        <p:txBody>
-          <a:bodyPr/>
-          <a:lstStyle/>
-          <a:p>
-            <a:r>
-              <a:rPr lang="it-IT" dirty="0"/>
-              <a:t>On </a:t>
-            </a:r>
-            <a:r>
-              <a:rPr lang="it-IT" dirty="0" err="1"/>
-              <a:t>generic</a:t>
-            </a:r>
-            <a:r>
-              <a:rPr lang="it-IT" dirty="0"/>
-              <a:t> FPGA drivers</a:t>
-            </a:r>
-          </a:p>
-        </p:txBody>
-      </p:sp>
-      <p:sp>
-        <p:nvSpPr>
-          <p:cNvPr id="3" name="Segnaposto contenuto 2">
-            <a:extLst>
-              <a:ext uri="{FF2B5EF4-FFF2-40B4-BE49-F238E27FC236}">
-                <a16:creationId xmlns:a16="http://schemas.microsoft.com/office/drawing/2014/main" id="{91339D68-E95E-4FAA-D056-3C135A30DF68}"/>
-              </a:ext>
-            </a:extLst>
-          </p:cNvPr>
-          <p:cNvSpPr>
-            <a:spLocks noGrp="1"/>
-          </p:cNvSpPr>
-          <p:nvPr>
-            <p:ph idx="1"/>
-          </p:nvPr>
-        </p:nvSpPr>
-        <p:spPr/>
-        <p:txBody>
-          <a:bodyPr/>
-          <a:lstStyle/>
-          <a:p>
-            <a:r>
-              <a:rPr lang="it-IT" dirty="0" err="1"/>
-              <a:t>It</a:t>
-            </a:r>
-            <a:r>
-              <a:rPr lang="it-IT" dirty="0"/>
-              <a:t> </a:t>
-            </a:r>
-            <a:r>
-              <a:rPr lang="it-IT" dirty="0" err="1"/>
-              <a:t>is</a:t>
-            </a:r>
-            <a:r>
-              <a:rPr lang="it-IT" dirty="0"/>
-              <a:t> </a:t>
-            </a:r>
-            <a:r>
-              <a:rPr lang="it-IT" dirty="0" err="1"/>
-              <a:t>possible</a:t>
-            </a:r>
-            <a:r>
-              <a:rPr lang="it-IT" dirty="0"/>
-              <a:t> to </a:t>
-            </a:r>
-            <a:r>
-              <a:rPr lang="it-IT" dirty="0" err="1"/>
-              <a:t>adjust</a:t>
-            </a:r>
-            <a:r>
-              <a:rPr lang="it-IT" dirty="0"/>
-              <a:t> the driver to work for a </a:t>
-            </a:r>
-            <a:r>
-              <a:rPr lang="it-IT" dirty="0" err="1"/>
-              <a:t>generic</a:t>
-            </a:r>
-            <a:r>
-              <a:rPr lang="it-IT" dirty="0"/>
-              <a:t> FPGA </a:t>
-            </a:r>
-            <a:r>
-              <a:rPr lang="it-IT" dirty="0" err="1"/>
-              <a:t>interface</a:t>
-            </a:r>
-            <a:r>
-              <a:rPr lang="it-IT" dirty="0"/>
-              <a:t> by </a:t>
-            </a:r>
-            <a:r>
-              <a:rPr lang="it-IT" dirty="0" err="1"/>
-              <a:t>tweaking</a:t>
-            </a:r>
-            <a:r>
-              <a:rPr lang="it-IT" dirty="0"/>
-              <a:t> the </a:t>
-            </a:r>
-            <a:r>
-              <a:rPr lang="it-IT" dirty="0" err="1"/>
-              <a:t>functions</a:t>
-            </a:r>
-            <a:r>
-              <a:rPr lang="it-IT" dirty="0"/>
-              <a:t> and the device-</a:t>
-            </a:r>
-            <a:r>
-              <a:rPr lang="it-IT" dirty="0" err="1"/>
-              <a:t>tree</a:t>
-            </a:r>
-            <a:r>
-              <a:rPr lang="it-IT" dirty="0"/>
-              <a:t>,</a:t>
-            </a:r>
-            <a:r>
-              <a:rPr lang="en-US" dirty="0"/>
-              <a:t> but implementing it would imply more limited kernel side control of the hardware, or direct control of the hardware from </a:t>
-            </a:r>
-            <a:r>
-              <a:rPr lang="en-US" dirty="0" err="1"/>
-              <a:t>userspace</a:t>
-            </a:r>
-            <a:r>
-              <a:rPr lang="en-US" dirty="0"/>
-              <a:t> using pointers to PL addresses, increasing the risk of runtime errors and crashes. </a:t>
-            </a:r>
-          </a:p>
-          <a:p>
-            <a:r>
-              <a:rPr lang="en-US" dirty="0"/>
-              <a:t>In most cases, a driver specialized to the PL interface in use is preferable.</a:t>
-            </a:r>
-            <a:endParaRPr lang="it-IT" dirty="0"/>
-          </a:p>
-        </p:txBody>
-      </p:sp>
-    </p:spTree>
-    <p:extLst>
-      <p:ext uri="{BB962C8B-B14F-4D97-AF65-F5344CB8AC3E}">
-        <p14:creationId xmlns:p14="http://schemas.microsoft.com/office/powerpoint/2010/main" val="2935065846"/>
       </p:ext>
     </p:extLst>
   </p:cSld>
@@ -8400,4 +15764,319 @@
     </a:ext>
   </a:extLst>
 </a:theme>
+</file>
+
+<file path=ppt/theme/theme2.xml><?xml version="1.0" encoding="utf-8"?>
+<a:theme xmlns:a="http://schemas.openxmlformats.org/drawingml/2006/main" name="Tema di Office">
+  <a:themeElements>
+    <a:clrScheme name="Office">
+      <a:dk1>
+        <a:sysClr val="windowText" lastClr="000000"/>
+      </a:dk1>
+      <a:lt1>
+        <a:sysClr val="window" lastClr="FFFFFF"/>
+      </a:lt1>
+      <a:dk2>
+        <a:srgbClr val="0E2841"/>
+      </a:dk2>
+      <a:lt2>
+        <a:srgbClr val="E8E8E8"/>
+      </a:lt2>
+      <a:accent1>
+        <a:srgbClr val="156082"/>
+      </a:accent1>
+      <a:accent2>
+        <a:srgbClr val="E97132"/>
+      </a:accent2>
+      <a:accent3>
+        <a:srgbClr val="196B24"/>
+      </a:accent3>
+      <a:accent4>
+        <a:srgbClr val="0F9ED5"/>
+      </a:accent4>
+      <a:accent5>
+        <a:srgbClr val="A02B93"/>
+      </a:accent5>
+      <a:accent6>
+        <a:srgbClr val="4EA72E"/>
+      </a:accent6>
+      <a:hlink>
+        <a:srgbClr val="467886"/>
+      </a:hlink>
+      <a:folHlink>
+        <a:srgbClr val="96607D"/>
+      </a:folHlink>
+    </a:clrScheme>
+    <a:fontScheme name="Office">
+      <a:majorFont>
+        <a:latin typeface="Aptos Display" panose="02110004020202020204"/>
+        <a:ea typeface=""/>
+        <a:cs typeface=""/>
+        <a:font script="Jpan" typeface="游ゴシック Light"/>
+        <a:font script="Hang" typeface="맑은 고딕"/>
+        <a:font script="Hans" typeface="等线 Light"/>
+        <a:font script="Hant" typeface="新細明體"/>
+        <a:font script="Arab" typeface="Times New Roman"/>
+        <a:font script="Hebr" typeface="Times New Roman"/>
+        <a:font script="Thai" typeface="Angsana New"/>
+        <a:font script="Ethi" typeface="Nyala"/>
+        <a:font script="Beng" typeface="Vrinda"/>
+        <a:font script="Gujr" typeface="Shruti"/>
+        <a:font script="Khmr" typeface="MoolBoran"/>
+        <a:font script="Knda" typeface="Tunga"/>
+        <a:font script="Guru" typeface="Raavi"/>
+        <a:font script="Cans" typeface="Euphemia"/>
+        <a:font script="Cher" typeface="Plantagenet Cherokee"/>
+        <a:font script="Yiii" typeface="Microsoft Yi Baiti"/>
+        <a:font script="Tibt" typeface="Microsoft Himalaya"/>
+        <a:font script="Thaa" typeface="MV Boli"/>
+        <a:font script="Deva" typeface="Mangal"/>
+        <a:font script="Telu" typeface="Gautami"/>
+        <a:font script="Taml" typeface="Latha"/>
+        <a:font script="Syrc" typeface="Estrangelo Edessa"/>
+        <a:font script="Orya" typeface="Kalinga"/>
+        <a:font script="Mlym" typeface="Kartika"/>
+        <a:font script="Laoo" typeface="DokChampa"/>
+        <a:font script="Sinh" typeface="Iskoola Pota"/>
+        <a:font script="Mong" typeface="Mongolian Baiti"/>
+        <a:font script="Viet" typeface="Times New Roman"/>
+        <a:font script="Uigh" typeface="Microsoft Uighur"/>
+        <a:font script="Geor" typeface="Sylfaen"/>
+        <a:font script="Armn" typeface="Arial"/>
+        <a:font script="Bugi" typeface="Leelawadee UI"/>
+        <a:font script="Bopo" typeface="Microsoft JhengHei"/>
+        <a:font script="Java" typeface="Javanese Text"/>
+        <a:font script="Lisu" typeface="Segoe UI"/>
+        <a:font script="Mymr" typeface="Myanmar Text"/>
+        <a:font script="Nkoo" typeface="Ebrima"/>
+        <a:font script="Olck" typeface="Nirmala UI"/>
+        <a:font script="Osma" typeface="Ebrima"/>
+        <a:font script="Phag" typeface="Phagspa"/>
+        <a:font script="Syrn" typeface="Estrangelo Edessa"/>
+        <a:font script="Syrj" typeface="Estrangelo Edessa"/>
+        <a:font script="Syre" typeface="Estrangelo Edessa"/>
+        <a:font script="Sora" typeface="Nirmala UI"/>
+        <a:font script="Tale" typeface="Microsoft Tai Le"/>
+        <a:font script="Talu" typeface="Microsoft New Tai Lue"/>
+        <a:font script="Tfng" typeface="Ebrima"/>
+      </a:majorFont>
+      <a:minorFont>
+        <a:latin typeface="Aptos" panose="02110004020202020204"/>
+        <a:ea typeface=""/>
+        <a:cs typeface=""/>
+        <a:font script="Jpan" typeface="游ゴシック"/>
+        <a:font script="Hang" typeface="맑은 고딕"/>
+        <a:font script="Hans" typeface="等线"/>
+        <a:font script="Hant" typeface="新細明體"/>
+        <a:font script="Arab" typeface="Arial"/>
+        <a:font script="Hebr" typeface="Arial"/>
+        <a:font script="Thai" typeface="Cordia New"/>
+        <a:font script="Ethi" typeface="Nyala"/>
+        <a:font script="Beng" typeface="Vrinda"/>
+        <a:font script="Gujr" typeface="Shruti"/>
+        <a:font script="Khmr" typeface="DaunPenh"/>
+        <a:font script="Knda" typeface="Tunga"/>
+        <a:font script="Guru" typeface="Raavi"/>
+        <a:font script="Cans" typeface="Euphemia"/>
+        <a:font script="Cher" typeface="Plantagenet Cherokee"/>
+        <a:font script="Yiii" typeface="Microsoft Yi Baiti"/>
+        <a:font script="Tibt" typeface="Microsoft Himalaya"/>
+        <a:font script="Thaa" typeface="MV Boli"/>
+        <a:font script="Deva" typeface="Mangal"/>
+        <a:font script="Telu" typeface="Gautami"/>
+        <a:font script="Taml" typeface="Latha"/>
+        <a:font script="Syrc" typeface="Estrangelo Edessa"/>
+        <a:font script="Orya" typeface="Kalinga"/>
+        <a:font script="Mlym" typeface="Kartika"/>
+        <a:font script="Laoo" typeface="DokChampa"/>
+        <a:font script="Sinh" typeface="Iskoola Pota"/>
+        <a:font script="Mong" typeface="Mongolian Baiti"/>
+        <a:font script="Viet" typeface="Arial"/>
+        <a:font script="Uigh" typeface="Microsoft Uighur"/>
+        <a:font script="Geor" typeface="Sylfaen"/>
+        <a:font script="Armn" typeface="Arial"/>
+        <a:font script="Bugi" typeface="Leelawadee UI"/>
+        <a:font script="Bopo" typeface="Microsoft JhengHei"/>
+        <a:font script="Java" typeface="Javanese Text"/>
+        <a:font script="Lisu" typeface="Segoe UI"/>
+        <a:font script="Mymr" typeface="Myanmar Text"/>
+        <a:font script="Nkoo" typeface="Ebrima"/>
+        <a:font script="Olck" typeface="Nirmala UI"/>
+        <a:font script="Osma" typeface="Ebrima"/>
+        <a:font script="Phag" typeface="Phagspa"/>
+        <a:font script="Syrn" typeface="Estrangelo Edessa"/>
+        <a:font script="Syrj" typeface="Estrangelo Edessa"/>
+        <a:font script="Syre" typeface="Estrangelo Edessa"/>
+        <a:font script="Sora" typeface="Nirmala UI"/>
+        <a:font script="Tale" typeface="Microsoft Tai Le"/>
+        <a:font script="Talu" typeface="Microsoft New Tai Lue"/>
+        <a:font script="Tfng" typeface="Ebrima"/>
+      </a:minorFont>
+    </a:fontScheme>
+    <a:fmtScheme name="Office">
+      <a:fillStyleLst>
+        <a:solidFill>
+          <a:schemeClr val="phClr"/>
+        </a:solidFill>
+        <a:gradFill rotWithShape="1">
+          <a:gsLst>
+            <a:gs pos="0">
+              <a:schemeClr val="phClr">
+                <a:lumMod val="110000"/>
+                <a:satMod val="105000"/>
+                <a:tint val="67000"/>
+              </a:schemeClr>
+            </a:gs>
+            <a:gs pos="50000">
+              <a:schemeClr val="phClr">
+                <a:lumMod val="105000"/>
+                <a:satMod val="103000"/>
+                <a:tint val="73000"/>
+              </a:schemeClr>
+            </a:gs>
+            <a:gs pos="100000">
+              <a:schemeClr val="phClr">
+                <a:lumMod val="105000"/>
+                <a:satMod val="109000"/>
+                <a:tint val="81000"/>
+              </a:schemeClr>
+            </a:gs>
+          </a:gsLst>
+          <a:lin ang="5400000" scaled="0"/>
+        </a:gradFill>
+        <a:gradFill rotWithShape="1">
+          <a:gsLst>
+            <a:gs pos="0">
+              <a:schemeClr val="phClr">
+                <a:satMod val="103000"/>
+                <a:lumMod val="102000"/>
+                <a:tint val="94000"/>
+              </a:schemeClr>
+            </a:gs>
+            <a:gs pos="50000">
+              <a:schemeClr val="phClr">
+                <a:satMod val="110000"/>
+                <a:lumMod val="100000"/>
+                <a:shade val="100000"/>
+              </a:schemeClr>
+            </a:gs>
+            <a:gs pos="100000">
+              <a:schemeClr val="phClr">
+                <a:lumMod val="99000"/>
+                <a:satMod val="120000"/>
+                <a:shade val="78000"/>
+              </a:schemeClr>
+            </a:gs>
+          </a:gsLst>
+          <a:lin ang="5400000" scaled="0"/>
+        </a:gradFill>
+      </a:fillStyleLst>
+      <a:lnStyleLst>
+        <a:ln w="12700" cap="flat" cmpd="sng" algn="ctr">
+          <a:solidFill>
+            <a:schemeClr val="phClr"/>
+          </a:solidFill>
+          <a:prstDash val="solid"/>
+          <a:miter lim="800000"/>
+        </a:ln>
+        <a:ln w="19050" cap="flat" cmpd="sng" algn="ctr">
+          <a:solidFill>
+            <a:schemeClr val="phClr"/>
+          </a:solidFill>
+          <a:prstDash val="solid"/>
+          <a:miter lim="800000"/>
+        </a:ln>
+        <a:ln w="25400" cap="flat" cmpd="sng" algn="ctr">
+          <a:solidFill>
+            <a:schemeClr val="phClr"/>
+          </a:solidFill>
+          <a:prstDash val="solid"/>
+          <a:miter lim="800000"/>
+        </a:ln>
+      </a:lnStyleLst>
+      <a:effectStyleLst>
+        <a:effectStyle>
+          <a:effectLst/>
+        </a:effectStyle>
+        <a:effectStyle>
+          <a:effectLst/>
+        </a:effectStyle>
+        <a:effectStyle>
+          <a:effectLst>
+            <a:outerShdw blurRad="57150" dist="19050" dir="5400000" algn="ctr" rotWithShape="0">
+              <a:srgbClr val="000000">
+                <a:alpha val="63000"/>
+              </a:srgbClr>
+            </a:outerShdw>
+          </a:effectLst>
+        </a:effectStyle>
+      </a:effectStyleLst>
+      <a:bgFillStyleLst>
+        <a:solidFill>
+          <a:schemeClr val="phClr"/>
+        </a:solidFill>
+        <a:solidFill>
+          <a:schemeClr val="phClr">
+            <a:tint val="95000"/>
+            <a:satMod val="170000"/>
+          </a:schemeClr>
+        </a:solidFill>
+        <a:gradFill rotWithShape="1">
+          <a:gsLst>
+            <a:gs pos="0">
+              <a:schemeClr val="phClr">
+                <a:tint val="93000"/>
+                <a:satMod val="150000"/>
+                <a:shade val="98000"/>
+                <a:lumMod val="102000"/>
+              </a:schemeClr>
+            </a:gs>
+            <a:gs pos="50000">
+              <a:schemeClr val="phClr">
+                <a:tint val="98000"/>
+                <a:satMod val="130000"/>
+                <a:shade val="90000"/>
+                <a:lumMod val="103000"/>
+              </a:schemeClr>
+            </a:gs>
+            <a:gs pos="100000">
+              <a:schemeClr val="phClr">
+                <a:shade val="63000"/>
+                <a:satMod val="120000"/>
+              </a:schemeClr>
+            </a:gs>
+          </a:gsLst>
+          <a:lin ang="5400000" scaled="0"/>
+        </a:gradFill>
+      </a:bgFillStyleLst>
+    </a:fmtScheme>
+  </a:themeElements>
+  <a:objectDefaults>
+    <a:lnDef>
+      <a:spPr/>
+      <a:bodyPr/>
+      <a:lstStyle/>
+      <a:style>
+        <a:lnRef idx="2">
+          <a:schemeClr val="accent1"/>
+        </a:lnRef>
+        <a:fillRef idx="0">
+          <a:schemeClr val="accent1"/>
+        </a:fillRef>
+        <a:effectRef idx="1">
+          <a:schemeClr val="accent1"/>
+        </a:effectRef>
+        <a:fontRef idx="minor">
+          <a:schemeClr val="tx1"/>
+        </a:fontRef>
+      </a:style>
+    </a:lnDef>
+  </a:objectDefaults>
+  <a:extraClrSchemeLst/>
+  <a:extLst>
+    <a:ext uri="{05A4C25C-085E-4340-85A3-A5531E510DB2}">
+      <thm15:themeFamily xmlns:thm15="http://schemas.microsoft.com/office/thememl/2012/main" name="Office Theme" id="{2E142A2C-CD16-42D6-873A-C26D2A0506FA}" vid="{1BDDFF52-6CD6-40A5-AB3C-68EB2F1E4D0A}"/>
+    </a:ext>
+  </a:extLst>
+</a:theme>
 </file>